--- a/Prescrider.pptx
+++ b/Prescrider.pptx
@@ -2,14 +2,27 @@
 <file path=ppt/presentation.xml><?xml version="1.0" encoding="utf-8"?>
 <p:presentation xmlns:a="http://schemas.openxmlformats.org/drawingml/2006/main" xmlns:r="http://schemas.openxmlformats.org/officeDocument/2006/relationships" xmlns:p="http://schemas.openxmlformats.org/presentationml/2006/main" saveSubsetFonts="1">
   <p:sldMasterIdLst>
-    <p:sldMasterId id="2147483648" r:id="rId1"/>
+    <p:sldMasterId id="2147483660" r:id="rId1"/>
   </p:sldMasterIdLst>
   <p:sldIdLst>
     <p:sldId id="256" r:id="rId2"/>
-    <p:sldId id="262" r:id="rId3"/>
-    <p:sldId id="260" r:id="rId4"/>
-    <p:sldId id="259" r:id="rId5"/>
-    <p:sldId id="261" r:id="rId6"/>
+    <p:sldId id="275" r:id="rId3"/>
+    <p:sldId id="262" r:id="rId4"/>
+    <p:sldId id="260" r:id="rId5"/>
+    <p:sldId id="263" r:id="rId6"/>
+    <p:sldId id="266" r:id="rId7"/>
+    <p:sldId id="264" r:id="rId8"/>
+    <p:sldId id="265" r:id="rId9"/>
+    <p:sldId id="269" r:id="rId10"/>
+    <p:sldId id="270" r:id="rId11"/>
+    <p:sldId id="271" r:id="rId12"/>
+    <p:sldId id="259" r:id="rId13"/>
+    <p:sldId id="261" r:id="rId14"/>
+    <p:sldId id="267" r:id="rId15"/>
+    <p:sldId id="268" r:id="rId16"/>
+    <p:sldId id="274" r:id="rId17"/>
+    <p:sldId id="273" r:id="rId18"/>
+    <p:sldId id="272" r:id="rId19"/>
   </p:sldIdLst>
   <p:sldSz cx="12192000" cy="6858000"/>
   <p:notesSz cx="6858000" cy="9144000"/>
@@ -17,7 +30,7 @@
     <a:defPPr>
       <a:defRPr lang="en-US"/>
     </a:defPPr>
-    <a:lvl1pPr marL="0" algn="l" defTabSz="914400" rtl="0" eaLnBrk="1" latinLnBrk="0" hangingPunct="1">
+    <a:lvl1pPr marL="0" algn="l" defTabSz="457200" rtl="0" eaLnBrk="1" latinLnBrk="0" hangingPunct="1">
       <a:defRPr sz="1800" kern="1200">
         <a:solidFill>
           <a:schemeClr val="tx1"/>
@@ -27,7 +40,7 @@
         <a:cs typeface="+mn-cs"/>
       </a:defRPr>
     </a:lvl1pPr>
-    <a:lvl2pPr marL="457200" algn="l" defTabSz="914400" rtl="0" eaLnBrk="1" latinLnBrk="0" hangingPunct="1">
+    <a:lvl2pPr marL="457200" algn="l" defTabSz="457200" rtl="0" eaLnBrk="1" latinLnBrk="0" hangingPunct="1">
       <a:defRPr sz="1800" kern="1200">
         <a:solidFill>
           <a:schemeClr val="tx1"/>
@@ -37,7 +50,7 @@
         <a:cs typeface="+mn-cs"/>
       </a:defRPr>
     </a:lvl2pPr>
-    <a:lvl3pPr marL="914400" algn="l" defTabSz="914400" rtl="0" eaLnBrk="1" latinLnBrk="0" hangingPunct="1">
+    <a:lvl3pPr marL="914400" algn="l" defTabSz="457200" rtl="0" eaLnBrk="1" latinLnBrk="0" hangingPunct="1">
       <a:defRPr sz="1800" kern="1200">
         <a:solidFill>
           <a:schemeClr val="tx1"/>
@@ -47,7 +60,7 @@
         <a:cs typeface="+mn-cs"/>
       </a:defRPr>
     </a:lvl3pPr>
-    <a:lvl4pPr marL="1371600" algn="l" defTabSz="914400" rtl="0" eaLnBrk="1" latinLnBrk="0" hangingPunct="1">
+    <a:lvl4pPr marL="1371600" algn="l" defTabSz="457200" rtl="0" eaLnBrk="1" latinLnBrk="0" hangingPunct="1">
       <a:defRPr sz="1800" kern="1200">
         <a:solidFill>
           <a:schemeClr val="tx1"/>
@@ -57,7 +70,7 @@
         <a:cs typeface="+mn-cs"/>
       </a:defRPr>
     </a:lvl4pPr>
-    <a:lvl5pPr marL="1828800" algn="l" defTabSz="914400" rtl="0" eaLnBrk="1" latinLnBrk="0" hangingPunct="1">
+    <a:lvl5pPr marL="1828800" algn="l" defTabSz="457200" rtl="0" eaLnBrk="1" latinLnBrk="0" hangingPunct="1">
       <a:defRPr sz="1800" kern="1200">
         <a:solidFill>
           <a:schemeClr val="tx1"/>
@@ -67,7 +80,7 @@
         <a:cs typeface="+mn-cs"/>
       </a:defRPr>
     </a:lvl5pPr>
-    <a:lvl6pPr marL="2286000" algn="l" defTabSz="914400" rtl="0" eaLnBrk="1" latinLnBrk="0" hangingPunct="1">
+    <a:lvl6pPr marL="2286000" algn="l" defTabSz="457200" rtl="0" eaLnBrk="1" latinLnBrk="0" hangingPunct="1">
       <a:defRPr sz="1800" kern="1200">
         <a:solidFill>
           <a:schemeClr val="tx1"/>
@@ -77,7 +90,7 @@
         <a:cs typeface="+mn-cs"/>
       </a:defRPr>
     </a:lvl6pPr>
-    <a:lvl7pPr marL="2743200" algn="l" defTabSz="914400" rtl="0" eaLnBrk="1" latinLnBrk="0" hangingPunct="1">
+    <a:lvl7pPr marL="2743200" algn="l" defTabSz="457200" rtl="0" eaLnBrk="1" latinLnBrk="0" hangingPunct="1">
       <a:defRPr sz="1800" kern="1200">
         <a:solidFill>
           <a:schemeClr val="tx1"/>
@@ -87,7 +100,7 @@
         <a:cs typeface="+mn-cs"/>
       </a:defRPr>
     </a:lvl7pPr>
-    <a:lvl8pPr marL="3200400" algn="l" defTabSz="914400" rtl="0" eaLnBrk="1" latinLnBrk="0" hangingPunct="1">
+    <a:lvl8pPr marL="3200400" algn="l" defTabSz="457200" rtl="0" eaLnBrk="1" latinLnBrk="0" hangingPunct="1">
       <a:defRPr sz="1800" kern="1200">
         <a:solidFill>
           <a:schemeClr val="tx1"/>
@@ -97,7 +110,7 @@
         <a:cs typeface="+mn-cs"/>
       </a:defRPr>
     </a:lvl8pPr>
-    <a:lvl9pPr marL="3657600" algn="l" defTabSz="914400" rtl="0" eaLnBrk="1" latinLnBrk="0" hangingPunct="1">
+    <a:lvl9pPr marL="3657600" algn="l" defTabSz="457200" rtl="0" eaLnBrk="1" latinLnBrk="0" hangingPunct="1">
       <a:defRPr sz="1800" kern="1200">
         <a:solidFill>
           <a:schemeClr val="tx1"/>
@@ -108,11 +121,16 @@
       </a:defRPr>
     </a:lvl9pPr>
   </p:defaultTextStyle>
+  <p:extLst>
+    <p:ext uri="{EFAFB233-063F-42B5-8137-9DF3F51BA10A}">
+      <p15:sldGuideLst xmlns:p15="http://schemas.microsoft.com/office/powerpoint/2012/main"/>
+    </p:ext>
+  </p:extLst>
 </p:presentation>
 </file>
 
 <file path=ppt/slideLayouts/slideLayout1.xml><?xml version="1.0" encoding="utf-8"?>
-<p:sldLayout xmlns:a="http://schemas.openxmlformats.org/drawingml/2006/main" xmlns:r="http://schemas.openxmlformats.org/officeDocument/2006/relationships" xmlns:p="http://schemas.openxmlformats.org/presentationml/2006/main" type="title" preserve="1">
+<p:sldLayout xmlns:a="http://schemas.openxmlformats.org/drawingml/2006/main" xmlns:r="http://schemas.openxmlformats.org/officeDocument/2006/relationships" xmlns:p="http://schemas.openxmlformats.org/presentationml/2006/main" showMasterSp="0" type="title" preserve="1">
   <p:cSld name="Title Slide">
     <p:spTree>
       <p:nvGrpSpPr>
@@ -130,13 +148,83 @@
       </p:grpSpPr>
       <p:sp>
         <p:nvSpPr>
-          <p:cNvPr id="2" name="Title 1">
-            <a:extLst>
-              <a:ext uri="{FF2B5EF4-FFF2-40B4-BE49-F238E27FC236}">
-                <a16:creationId xmlns:a16="http://schemas.microsoft.com/office/drawing/2014/main" id="{643CFF21-8897-94B9-8532-F17E1E77C436}"/>
-              </a:ext>
-            </a:extLst>
-          </p:cNvPr>
+          <p:cNvPr id="7" name="Rectangle 6"/>
+          <p:cNvSpPr/>
+          <p:nvPr/>
+        </p:nvSpPr>
+        <p:spPr>
+          <a:xfrm>
+            <a:off x="3175" y="6400800"/>
+            <a:ext cx="12188825" cy="457200"/>
+          </a:xfrm>
+          <a:prstGeom prst="rect">
+            <a:avLst/>
+          </a:prstGeom>
+          <a:solidFill>
+            <a:schemeClr val="accent2"/>
+          </a:solidFill>
+          <a:ln>
+            <a:noFill/>
+          </a:ln>
+        </p:spPr>
+        <p:style>
+          <a:lnRef idx="2">
+            <a:schemeClr val="accent1">
+              <a:shade val="50000"/>
+            </a:schemeClr>
+          </a:lnRef>
+          <a:fillRef idx="1">
+            <a:schemeClr val="accent1"/>
+          </a:fillRef>
+          <a:effectRef idx="0">
+            <a:schemeClr val="accent1"/>
+          </a:effectRef>
+          <a:fontRef idx="minor">
+            <a:schemeClr val="lt1"/>
+          </a:fontRef>
+        </p:style>
+      </p:sp>
+      <p:sp>
+        <p:nvSpPr>
+          <p:cNvPr id="8" name="Rectangle 7"/>
+          <p:cNvSpPr/>
+          <p:nvPr/>
+        </p:nvSpPr>
+        <p:spPr>
+          <a:xfrm>
+            <a:off x="15" y="6334316"/>
+            <a:ext cx="12188825" cy="64008"/>
+          </a:xfrm>
+          <a:prstGeom prst="rect">
+            <a:avLst/>
+          </a:prstGeom>
+          <a:solidFill>
+            <a:schemeClr val="accent1"/>
+          </a:solidFill>
+          <a:ln>
+            <a:noFill/>
+          </a:ln>
+        </p:spPr>
+        <p:style>
+          <a:lnRef idx="2">
+            <a:schemeClr val="accent1">
+              <a:shade val="50000"/>
+            </a:schemeClr>
+          </a:lnRef>
+          <a:fillRef idx="1">
+            <a:schemeClr val="accent1"/>
+          </a:fillRef>
+          <a:effectRef idx="0">
+            <a:schemeClr val="accent1"/>
+          </a:effectRef>
+          <a:fontRef idx="minor">
+            <a:schemeClr val="lt1"/>
+          </a:fontRef>
+        </p:style>
+      </p:sp>
+      <p:sp>
+        <p:nvSpPr>
+          <p:cNvPr id="2" name="Title 1"/>
           <p:cNvSpPr>
             <a:spLocks noGrp="1"/>
           </p:cNvSpPr>
@@ -146,15 +234,27 @@
         </p:nvSpPr>
         <p:spPr>
           <a:xfrm>
-            <a:off x="1524000" y="1122363"/>
-            <a:ext cx="9144000" cy="2387600"/>
-          </a:xfrm>
-        </p:spPr>
-        <p:txBody>
-          <a:bodyPr anchor="b"/>
+            <a:off x="1097280" y="758952"/>
+            <a:ext cx="10058400" cy="3566160"/>
+          </a:xfrm>
+        </p:spPr>
+        <p:txBody>
+          <a:bodyPr anchor="b">
+            <a:normAutofit/>
+          </a:bodyPr>
           <a:lstStyle>
-            <a:lvl1pPr algn="ctr">
-              <a:defRPr sz="6000"/>
+            <a:lvl1pPr algn="l">
+              <a:lnSpc>
+                <a:spcPct val="85000"/>
+              </a:lnSpc>
+              <a:defRPr sz="8000" spc="-50" baseline="0">
+                <a:solidFill>
+                  <a:schemeClr val="tx1">
+                    <a:lumMod val="85000"/>
+                    <a:lumOff val="15000"/>
+                  </a:schemeClr>
+                </a:solidFill>
+              </a:defRPr>
             </a:lvl1pPr>
           </a:lstStyle>
           <a:p>
@@ -162,18 +262,13 @@
               <a:rPr lang="en-US"/>
               <a:t>Click to edit Master title style</a:t>
             </a:r>
-          </a:p>
-        </p:txBody>
-      </p:sp>
-      <p:sp>
-        <p:nvSpPr>
-          <p:cNvPr id="3" name="Subtitle 2">
-            <a:extLst>
-              <a:ext uri="{FF2B5EF4-FFF2-40B4-BE49-F238E27FC236}">
-                <a16:creationId xmlns:a16="http://schemas.microsoft.com/office/drawing/2014/main" id="{125DFC8E-07D0-CF82-C1D6-DD9230105964}"/>
-              </a:ext>
-            </a:extLst>
-          </p:cNvPr>
+            <a:endParaRPr lang="en-US" dirty="0"/>
+          </a:p>
+        </p:txBody>
+      </p:sp>
+      <p:sp>
+        <p:nvSpPr>
+          <p:cNvPr id="3" name="Subtitle 2"/>
           <p:cNvSpPr>
             <a:spLocks noGrp="1"/>
           </p:cNvSpPr>
@@ -183,48 +278,55 @@
         </p:nvSpPr>
         <p:spPr>
           <a:xfrm>
-            <a:off x="1524000" y="3602038"/>
-            <a:ext cx="9144000" cy="1655762"/>
-          </a:xfrm>
-        </p:spPr>
-        <p:txBody>
-          <a:bodyPr/>
+            <a:off x="1100051" y="4455620"/>
+            <a:ext cx="10058400" cy="1143000"/>
+          </a:xfrm>
+        </p:spPr>
+        <p:txBody>
+          <a:bodyPr lIns="91440" rIns="91440">
+            <a:normAutofit/>
+          </a:bodyPr>
           <a:lstStyle>
-            <a:lvl1pPr marL="0" indent="0" algn="ctr">
+            <a:lvl1pPr marL="0" indent="0" algn="l">
               <a:buNone/>
-              <a:defRPr sz="2400"/>
+              <a:defRPr sz="2400" cap="all" spc="200" baseline="0">
+                <a:solidFill>
+                  <a:schemeClr val="tx2"/>
+                </a:solidFill>
+                <a:latin typeface="+mj-lt"/>
+              </a:defRPr>
             </a:lvl1pPr>
             <a:lvl2pPr marL="457200" indent="0" algn="ctr">
               <a:buNone/>
-              <a:defRPr sz="2000"/>
+              <a:defRPr sz="2400"/>
             </a:lvl2pPr>
             <a:lvl3pPr marL="914400" indent="0" algn="ctr">
               <a:buNone/>
-              <a:defRPr sz="1800"/>
+              <a:defRPr sz="2400"/>
             </a:lvl3pPr>
             <a:lvl4pPr marL="1371600" indent="0" algn="ctr">
               <a:buNone/>
-              <a:defRPr sz="1600"/>
+              <a:defRPr sz="2000"/>
             </a:lvl4pPr>
             <a:lvl5pPr marL="1828800" indent="0" algn="ctr">
               <a:buNone/>
-              <a:defRPr sz="1600"/>
+              <a:defRPr sz="2000"/>
             </a:lvl5pPr>
             <a:lvl6pPr marL="2286000" indent="0" algn="ctr">
               <a:buNone/>
-              <a:defRPr sz="1600"/>
+              <a:defRPr sz="2000"/>
             </a:lvl6pPr>
             <a:lvl7pPr marL="2743200" indent="0" algn="ctr">
               <a:buNone/>
-              <a:defRPr sz="1600"/>
+              <a:defRPr sz="2000"/>
             </a:lvl7pPr>
             <a:lvl8pPr marL="3200400" indent="0" algn="ctr">
               <a:buNone/>
-              <a:defRPr sz="1600"/>
+              <a:defRPr sz="2000"/>
             </a:lvl8pPr>
             <a:lvl9pPr marL="3657600" indent="0" algn="ctr">
               <a:buNone/>
-              <a:defRPr sz="1600"/>
+              <a:defRPr sz="2000"/>
             </a:lvl9pPr>
           </a:lstStyle>
           <a:p>
@@ -232,18 +334,13 @@
               <a:rPr lang="en-US"/>
               <a:t>Click to edit Master subtitle style</a:t>
             </a:r>
-          </a:p>
-        </p:txBody>
-      </p:sp>
-      <p:sp>
-        <p:nvSpPr>
-          <p:cNvPr id="4" name="Date Placeholder 3">
-            <a:extLst>
-              <a:ext uri="{FF2B5EF4-FFF2-40B4-BE49-F238E27FC236}">
-                <a16:creationId xmlns:a16="http://schemas.microsoft.com/office/drawing/2014/main" id="{7D4C8977-12E7-0DBC-A630-048FCA556449}"/>
-              </a:ext>
-            </a:extLst>
-          </p:cNvPr>
+            <a:endParaRPr lang="en-US" dirty="0"/>
+          </a:p>
+        </p:txBody>
+      </p:sp>
+      <p:sp>
+        <p:nvSpPr>
+          <p:cNvPr id="4" name="Date Placeholder 3"/>
           <p:cNvSpPr>
             <a:spLocks noGrp="1"/>
           </p:cNvSpPr>
@@ -266,13 +363,7 @@
       </p:sp>
       <p:sp>
         <p:nvSpPr>
-          <p:cNvPr id="5" name="Footer Placeholder 4">
-            <a:extLst>
-              <a:ext uri="{FF2B5EF4-FFF2-40B4-BE49-F238E27FC236}">
-                <a16:creationId xmlns:a16="http://schemas.microsoft.com/office/drawing/2014/main" id="{8E8347EA-BD18-6A72-E4F1-92B573801798}"/>
-              </a:ext>
-            </a:extLst>
-          </p:cNvPr>
+          <p:cNvPr id="5" name="Footer Placeholder 4"/>
           <p:cNvSpPr>
             <a:spLocks noGrp="1"/>
           </p:cNvSpPr>
@@ -291,13 +382,7 @@
       </p:sp>
       <p:sp>
         <p:nvSpPr>
-          <p:cNvPr id="6" name="Slide Number Placeholder 5">
-            <a:extLst>
-              <a:ext uri="{FF2B5EF4-FFF2-40B4-BE49-F238E27FC236}">
-                <a16:creationId xmlns:a16="http://schemas.microsoft.com/office/drawing/2014/main" id="{62C00BE1-67E0-7680-7869-A4BB3AB2FF9D}"/>
-              </a:ext>
-            </a:extLst>
-          </p:cNvPr>
+          <p:cNvPr id="6" name="Slide Number Placeholder 5"/>
           <p:cNvSpPr>
             <a:spLocks noGrp="1"/>
           </p:cNvSpPr>
@@ -318,10 +403,48 @@
           </a:p>
         </p:txBody>
       </p:sp>
+      <p:cxnSp>
+        <p:nvCxnSpPr>
+          <p:cNvPr id="9" name="Straight Connector 8"/>
+          <p:cNvCxnSpPr/>
+          <p:nvPr/>
+        </p:nvCxnSpPr>
+        <p:spPr>
+          <a:xfrm>
+            <a:off x="1207658" y="4343400"/>
+            <a:ext cx="9875520" cy="0"/>
+          </a:xfrm>
+          <a:prstGeom prst="line">
+            <a:avLst/>
+          </a:prstGeom>
+          <a:ln w="6350">
+            <a:solidFill>
+              <a:schemeClr val="tx1">
+                <a:lumMod val="50000"/>
+                <a:lumOff val="50000"/>
+              </a:schemeClr>
+            </a:solidFill>
+          </a:ln>
+        </p:spPr>
+        <p:style>
+          <a:lnRef idx="1">
+            <a:schemeClr val="accent1"/>
+          </a:lnRef>
+          <a:fillRef idx="0">
+            <a:schemeClr val="accent1"/>
+          </a:fillRef>
+          <a:effectRef idx="0">
+            <a:schemeClr val="accent1"/>
+          </a:effectRef>
+          <a:fontRef idx="minor">
+            <a:schemeClr val="tx1"/>
+          </a:fontRef>
+        </p:style>
+      </p:cxnSp>
     </p:spTree>
     <p:extLst>
       <p:ext uri="{BB962C8B-B14F-4D97-AF65-F5344CB8AC3E}">
-        <p14:creationId xmlns:p14="http://schemas.microsoft.com/office/powerpoint/2010/main" val="3415264971"/>
+        <p14:creationId xmlns:p14="http://schemas.microsoft.com/office/powerpoint/2010/main" val="3503496899"/>
       </p:ext>
     </p:extLst>
   </p:cSld>
@@ -350,13 +473,7 @@
       </p:grpSpPr>
       <p:sp>
         <p:nvSpPr>
-          <p:cNvPr id="2" name="Title 1">
-            <a:extLst>
-              <a:ext uri="{FF2B5EF4-FFF2-40B4-BE49-F238E27FC236}">
-                <a16:creationId xmlns:a16="http://schemas.microsoft.com/office/drawing/2014/main" id="{8A5471D7-26D4-ED50-2B42-6D787E7E0D91}"/>
-              </a:ext>
-            </a:extLst>
-          </p:cNvPr>
+          <p:cNvPr id="2" name="Title 1"/>
           <p:cNvSpPr>
             <a:spLocks noGrp="1"/>
           </p:cNvSpPr>
@@ -373,18 +490,13 @@
               <a:rPr lang="en-US"/>
               <a:t>Click to edit Master title style</a:t>
             </a:r>
-          </a:p>
-        </p:txBody>
-      </p:sp>
-      <p:sp>
-        <p:nvSpPr>
-          <p:cNvPr id="3" name="Vertical Text Placeholder 2">
-            <a:extLst>
-              <a:ext uri="{FF2B5EF4-FFF2-40B4-BE49-F238E27FC236}">
-                <a16:creationId xmlns:a16="http://schemas.microsoft.com/office/drawing/2014/main" id="{BEF53D85-D107-6E38-5AEC-F8A275862387}"/>
-              </a:ext>
-            </a:extLst>
-          </p:cNvPr>
+            <a:endParaRPr lang="en-US" dirty="0"/>
+          </a:p>
+        </p:txBody>
+      </p:sp>
+      <p:sp>
+        <p:nvSpPr>
+          <p:cNvPr id="3" name="Vertical Text Placeholder 2"/>
           <p:cNvSpPr>
             <a:spLocks noGrp="1"/>
           </p:cNvSpPr>
@@ -394,7 +506,7 @@
         </p:nvSpPr>
         <p:spPr/>
         <p:txBody>
-          <a:bodyPr vert="eaVert"/>
+          <a:bodyPr vert="eaVert" lIns="45720" tIns="0" rIns="45720" bIns="0"/>
           <a:lstStyle/>
           <a:p>
             <a:pPr lvl="0"/>
@@ -430,18 +542,13 @@
               <a:rPr lang="en-US"/>
               <a:t>Fifth level</a:t>
             </a:r>
-          </a:p>
-        </p:txBody>
-      </p:sp>
-      <p:sp>
-        <p:nvSpPr>
-          <p:cNvPr id="4" name="Date Placeholder 3">
-            <a:extLst>
-              <a:ext uri="{FF2B5EF4-FFF2-40B4-BE49-F238E27FC236}">
-                <a16:creationId xmlns:a16="http://schemas.microsoft.com/office/drawing/2014/main" id="{EA376581-072A-7E99-DD22-C32324F5FD34}"/>
-              </a:ext>
-            </a:extLst>
-          </p:cNvPr>
+            <a:endParaRPr lang="en-US" dirty="0"/>
+          </a:p>
+        </p:txBody>
+      </p:sp>
+      <p:sp>
+        <p:nvSpPr>
+          <p:cNvPr id="4" name="Date Placeholder 3"/>
           <p:cNvSpPr>
             <a:spLocks noGrp="1"/>
           </p:cNvSpPr>
@@ -464,13 +571,7 @@
       </p:sp>
       <p:sp>
         <p:nvSpPr>
-          <p:cNvPr id="5" name="Footer Placeholder 4">
-            <a:extLst>
-              <a:ext uri="{FF2B5EF4-FFF2-40B4-BE49-F238E27FC236}">
-                <a16:creationId xmlns:a16="http://schemas.microsoft.com/office/drawing/2014/main" id="{A7617DF9-E340-244E-9460-CF89AE618940}"/>
-              </a:ext>
-            </a:extLst>
-          </p:cNvPr>
+          <p:cNvPr id="5" name="Footer Placeholder 4"/>
           <p:cNvSpPr>
             <a:spLocks noGrp="1"/>
           </p:cNvSpPr>
@@ -489,13 +590,7 @@
       </p:sp>
       <p:sp>
         <p:nvSpPr>
-          <p:cNvPr id="6" name="Slide Number Placeholder 5">
-            <a:extLst>
-              <a:ext uri="{FF2B5EF4-FFF2-40B4-BE49-F238E27FC236}">
-                <a16:creationId xmlns:a16="http://schemas.microsoft.com/office/drawing/2014/main" id="{86900E1C-0BEB-019C-7D8F-B20AEC9FC5D6}"/>
-              </a:ext>
-            </a:extLst>
-          </p:cNvPr>
+          <p:cNvPr id="6" name="Slide Number Placeholder 5"/>
           <p:cNvSpPr>
             <a:spLocks noGrp="1"/>
           </p:cNvSpPr>
@@ -519,7 +614,7 @@
     </p:spTree>
     <p:extLst>
       <p:ext uri="{BB962C8B-B14F-4D97-AF65-F5344CB8AC3E}">
-        <p14:creationId xmlns:p14="http://schemas.microsoft.com/office/powerpoint/2010/main" val="330231293"/>
+        <p14:creationId xmlns:p14="http://schemas.microsoft.com/office/powerpoint/2010/main" val="3486383765"/>
       </p:ext>
     </p:extLst>
   </p:cSld>
@@ -530,7 +625,7 @@
 </file>
 
 <file path=ppt/slideLayouts/slideLayout11.xml><?xml version="1.0" encoding="utf-8"?>
-<p:sldLayout xmlns:a="http://schemas.openxmlformats.org/drawingml/2006/main" xmlns:r="http://schemas.openxmlformats.org/officeDocument/2006/relationships" xmlns:p="http://schemas.openxmlformats.org/presentationml/2006/main" type="vertTitleAndTx" preserve="1">
+<p:sldLayout xmlns:a="http://schemas.openxmlformats.org/drawingml/2006/main" xmlns:r="http://schemas.openxmlformats.org/officeDocument/2006/relationships" xmlns:p="http://schemas.openxmlformats.org/presentationml/2006/main" showMasterSp="0" type="vertTitleAndTx" preserve="1">
   <p:cSld name="Vertical Title and Text">
     <p:spTree>
       <p:nvGrpSpPr>
@@ -548,13 +643,83 @@
       </p:grpSpPr>
       <p:sp>
         <p:nvSpPr>
-          <p:cNvPr id="2" name="Vertical Title 1">
-            <a:extLst>
-              <a:ext uri="{FF2B5EF4-FFF2-40B4-BE49-F238E27FC236}">
-                <a16:creationId xmlns:a16="http://schemas.microsoft.com/office/drawing/2014/main" id="{3392894D-B146-2980-BBB7-D22B44F8B093}"/>
-              </a:ext>
-            </a:extLst>
-          </p:cNvPr>
+          <p:cNvPr id="7" name="Rectangle 6"/>
+          <p:cNvSpPr/>
+          <p:nvPr/>
+        </p:nvSpPr>
+        <p:spPr>
+          <a:xfrm>
+            <a:off x="3175" y="6400800"/>
+            <a:ext cx="12188825" cy="457200"/>
+          </a:xfrm>
+          <a:prstGeom prst="rect">
+            <a:avLst/>
+          </a:prstGeom>
+          <a:solidFill>
+            <a:schemeClr val="accent2"/>
+          </a:solidFill>
+          <a:ln>
+            <a:noFill/>
+          </a:ln>
+        </p:spPr>
+        <p:style>
+          <a:lnRef idx="2">
+            <a:schemeClr val="accent1">
+              <a:shade val="50000"/>
+            </a:schemeClr>
+          </a:lnRef>
+          <a:fillRef idx="1">
+            <a:schemeClr val="accent1"/>
+          </a:fillRef>
+          <a:effectRef idx="0">
+            <a:schemeClr val="accent1"/>
+          </a:effectRef>
+          <a:fontRef idx="minor">
+            <a:schemeClr val="lt1"/>
+          </a:fontRef>
+        </p:style>
+      </p:sp>
+      <p:sp>
+        <p:nvSpPr>
+          <p:cNvPr id="8" name="Rectangle 7"/>
+          <p:cNvSpPr/>
+          <p:nvPr/>
+        </p:nvSpPr>
+        <p:spPr>
+          <a:xfrm>
+            <a:off x="15" y="6334316"/>
+            <a:ext cx="12188825" cy="64008"/>
+          </a:xfrm>
+          <a:prstGeom prst="rect">
+            <a:avLst/>
+          </a:prstGeom>
+          <a:solidFill>
+            <a:schemeClr val="accent1"/>
+          </a:solidFill>
+          <a:ln>
+            <a:noFill/>
+          </a:ln>
+        </p:spPr>
+        <p:style>
+          <a:lnRef idx="2">
+            <a:schemeClr val="accent1">
+              <a:shade val="50000"/>
+            </a:schemeClr>
+          </a:lnRef>
+          <a:fillRef idx="1">
+            <a:schemeClr val="accent1"/>
+          </a:fillRef>
+          <a:effectRef idx="0">
+            <a:schemeClr val="accent1"/>
+          </a:effectRef>
+          <a:fontRef idx="minor">
+            <a:schemeClr val="lt1"/>
+          </a:fontRef>
+        </p:style>
+      </p:sp>
+      <p:sp>
+        <p:nvSpPr>
+          <p:cNvPr id="2" name="Vertical Title 1"/>
           <p:cNvSpPr>
             <a:spLocks noGrp="1"/>
           </p:cNvSpPr>
@@ -564,8 +729,8 @@
         </p:nvSpPr>
         <p:spPr>
           <a:xfrm>
-            <a:off x="8724900" y="365125"/>
-            <a:ext cx="2628900" cy="5811838"/>
+            <a:off x="8724900" y="414778"/>
+            <a:ext cx="2628900" cy="5757421"/>
           </a:xfrm>
         </p:spPr>
         <p:txBody>
@@ -576,18 +741,13 @@
               <a:rPr lang="en-US"/>
               <a:t>Click to edit Master title style</a:t>
             </a:r>
-          </a:p>
-        </p:txBody>
-      </p:sp>
-      <p:sp>
-        <p:nvSpPr>
-          <p:cNvPr id="3" name="Vertical Text Placeholder 2">
-            <a:extLst>
-              <a:ext uri="{FF2B5EF4-FFF2-40B4-BE49-F238E27FC236}">
-                <a16:creationId xmlns:a16="http://schemas.microsoft.com/office/drawing/2014/main" id="{D45AAB26-5111-3083-B0C4-2366BC78EF65}"/>
-              </a:ext>
-            </a:extLst>
-          </p:cNvPr>
+            <a:endParaRPr lang="en-US" dirty="0"/>
+          </a:p>
+        </p:txBody>
+      </p:sp>
+      <p:sp>
+        <p:nvSpPr>
+          <p:cNvPr id="3" name="Vertical Text Placeholder 2"/>
           <p:cNvSpPr>
             <a:spLocks noGrp="1"/>
           </p:cNvSpPr>
@@ -597,12 +757,12 @@
         </p:nvSpPr>
         <p:spPr>
           <a:xfrm>
-            <a:off x="838200" y="365125"/>
-            <a:ext cx="7734300" cy="5811838"/>
-          </a:xfrm>
-        </p:spPr>
-        <p:txBody>
-          <a:bodyPr vert="eaVert"/>
+            <a:off x="838200" y="414778"/>
+            <a:ext cx="7734300" cy="5757422"/>
+          </a:xfrm>
+        </p:spPr>
+        <p:txBody>
+          <a:bodyPr vert="eaVert" lIns="45720" tIns="0" rIns="45720" bIns="0"/>
           <a:lstStyle/>
           <a:p>
             <a:pPr lvl="0"/>
@@ -638,18 +798,13 @@
               <a:rPr lang="en-US"/>
               <a:t>Fifth level</a:t>
             </a:r>
-          </a:p>
-        </p:txBody>
-      </p:sp>
-      <p:sp>
-        <p:nvSpPr>
-          <p:cNvPr id="4" name="Date Placeholder 3">
-            <a:extLst>
-              <a:ext uri="{FF2B5EF4-FFF2-40B4-BE49-F238E27FC236}">
-                <a16:creationId xmlns:a16="http://schemas.microsoft.com/office/drawing/2014/main" id="{CC9F4960-AEC0-CB39-200D-4DE66B5D9C37}"/>
-              </a:ext>
-            </a:extLst>
-          </p:cNvPr>
+            <a:endParaRPr lang="en-US" dirty="0"/>
+          </a:p>
+        </p:txBody>
+      </p:sp>
+      <p:sp>
+        <p:nvSpPr>
+          <p:cNvPr id="4" name="Date Placeholder 3"/>
           <p:cNvSpPr>
             <a:spLocks noGrp="1"/>
           </p:cNvSpPr>
@@ -672,13 +827,7 @@
       </p:sp>
       <p:sp>
         <p:nvSpPr>
-          <p:cNvPr id="5" name="Footer Placeholder 4">
-            <a:extLst>
-              <a:ext uri="{FF2B5EF4-FFF2-40B4-BE49-F238E27FC236}">
-                <a16:creationId xmlns:a16="http://schemas.microsoft.com/office/drawing/2014/main" id="{B2FDC2E2-37D9-8EFD-6D5E-47CF6CBE4278}"/>
-              </a:ext>
-            </a:extLst>
-          </p:cNvPr>
+          <p:cNvPr id="5" name="Footer Placeholder 4"/>
           <p:cNvSpPr>
             <a:spLocks noGrp="1"/>
           </p:cNvSpPr>
@@ -697,13 +846,7 @@
       </p:sp>
       <p:sp>
         <p:nvSpPr>
-          <p:cNvPr id="6" name="Slide Number Placeholder 5">
-            <a:extLst>
-              <a:ext uri="{FF2B5EF4-FFF2-40B4-BE49-F238E27FC236}">
-                <a16:creationId xmlns:a16="http://schemas.microsoft.com/office/drawing/2014/main" id="{22F690F5-EB6D-2F9E-A3EE-915948662F41}"/>
-              </a:ext>
-            </a:extLst>
-          </p:cNvPr>
+          <p:cNvPr id="6" name="Slide Number Placeholder 5"/>
           <p:cNvSpPr>
             <a:spLocks noGrp="1"/>
           </p:cNvSpPr>
@@ -727,7 +870,7 @@
     </p:spTree>
     <p:extLst>
       <p:ext uri="{BB962C8B-B14F-4D97-AF65-F5344CB8AC3E}">
-        <p14:creationId xmlns:p14="http://schemas.microsoft.com/office/powerpoint/2010/main" val="3000216697"/>
+        <p14:creationId xmlns:p14="http://schemas.microsoft.com/office/powerpoint/2010/main" val="2887933054"/>
       </p:ext>
     </p:extLst>
   </p:cSld>
@@ -756,13 +899,7 @@
       </p:grpSpPr>
       <p:sp>
         <p:nvSpPr>
-          <p:cNvPr id="2" name="Title 1">
-            <a:extLst>
-              <a:ext uri="{FF2B5EF4-FFF2-40B4-BE49-F238E27FC236}">
-                <a16:creationId xmlns:a16="http://schemas.microsoft.com/office/drawing/2014/main" id="{9B9C2B06-A314-A7C3-950C-F1C5EDB5D321}"/>
-              </a:ext>
-            </a:extLst>
-          </p:cNvPr>
+          <p:cNvPr id="2" name="Title 1"/>
           <p:cNvSpPr>
             <a:spLocks noGrp="1"/>
           </p:cNvSpPr>
@@ -773,24 +910,23 @@
         <p:spPr/>
         <p:txBody>
           <a:bodyPr/>
-          <a:lstStyle/>
+          <a:lstStyle>
+            <a:lvl1pPr marL="0">
+              <a:defRPr/>
+            </a:lvl1pPr>
+          </a:lstStyle>
           <a:p>
             <a:r>
               <a:rPr lang="en-US"/>
               <a:t>Click to edit Master title style</a:t>
             </a:r>
-          </a:p>
-        </p:txBody>
-      </p:sp>
-      <p:sp>
-        <p:nvSpPr>
-          <p:cNvPr id="3" name="Content Placeholder 2">
-            <a:extLst>
-              <a:ext uri="{FF2B5EF4-FFF2-40B4-BE49-F238E27FC236}">
-                <a16:creationId xmlns:a16="http://schemas.microsoft.com/office/drawing/2014/main" id="{4BEC5C4F-E81C-8A40-AF42-DC34E998E965}"/>
-              </a:ext>
-            </a:extLst>
-          </p:cNvPr>
+            <a:endParaRPr lang="en-US" dirty="0"/>
+          </a:p>
+        </p:txBody>
+      </p:sp>
+      <p:sp>
+        <p:nvSpPr>
+          <p:cNvPr id="3" name="Content Placeholder 2"/>
           <p:cNvSpPr>
             <a:spLocks noGrp="1"/>
           </p:cNvSpPr>
@@ -836,18 +972,13 @@
               <a:rPr lang="en-US"/>
               <a:t>Fifth level</a:t>
             </a:r>
-          </a:p>
-        </p:txBody>
-      </p:sp>
-      <p:sp>
-        <p:nvSpPr>
-          <p:cNvPr id="4" name="Date Placeholder 3">
-            <a:extLst>
-              <a:ext uri="{FF2B5EF4-FFF2-40B4-BE49-F238E27FC236}">
-                <a16:creationId xmlns:a16="http://schemas.microsoft.com/office/drawing/2014/main" id="{4D56DFB2-19F9-996B-AFA6-0CB9EE954BC7}"/>
-              </a:ext>
-            </a:extLst>
-          </p:cNvPr>
+            <a:endParaRPr lang="en-US" dirty="0"/>
+          </a:p>
+        </p:txBody>
+      </p:sp>
+      <p:sp>
+        <p:nvSpPr>
+          <p:cNvPr id="4" name="Date Placeholder 3"/>
           <p:cNvSpPr>
             <a:spLocks noGrp="1"/>
           </p:cNvSpPr>
@@ -870,13 +1001,7 @@
       </p:sp>
       <p:sp>
         <p:nvSpPr>
-          <p:cNvPr id="5" name="Footer Placeholder 4">
-            <a:extLst>
-              <a:ext uri="{FF2B5EF4-FFF2-40B4-BE49-F238E27FC236}">
-                <a16:creationId xmlns:a16="http://schemas.microsoft.com/office/drawing/2014/main" id="{1F54BAE8-55F0-FE74-BBAA-D19ABE3505C9}"/>
-              </a:ext>
-            </a:extLst>
-          </p:cNvPr>
+          <p:cNvPr id="5" name="Footer Placeholder 4"/>
           <p:cNvSpPr>
             <a:spLocks noGrp="1"/>
           </p:cNvSpPr>
@@ -895,13 +1020,7 @@
       </p:sp>
       <p:sp>
         <p:nvSpPr>
-          <p:cNvPr id="6" name="Slide Number Placeholder 5">
-            <a:extLst>
-              <a:ext uri="{FF2B5EF4-FFF2-40B4-BE49-F238E27FC236}">
-                <a16:creationId xmlns:a16="http://schemas.microsoft.com/office/drawing/2014/main" id="{CCFFA7A0-CE93-6AB2-3E00-256770F4F15E}"/>
-              </a:ext>
-            </a:extLst>
-          </p:cNvPr>
+          <p:cNvPr id="6" name="Slide Number Placeholder 5"/>
           <p:cNvSpPr>
             <a:spLocks noGrp="1"/>
           </p:cNvSpPr>
@@ -925,7 +1044,7 @@
     </p:spTree>
     <p:extLst>
       <p:ext uri="{BB962C8B-B14F-4D97-AF65-F5344CB8AC3E}">
-        <p14:creationId xmlns:p14="http://schemas.microsoft.com/office/powerpoint/2010/main" val="405785943"/>
+        <p14:creationId xmlns:p14="http://schemas.microsoft.com/office/powerpoint/2010/main" val="1991504786"/>
       </p:ext>
     </p:extLst>
   </p:cSld>
@@ -936,8 +1055,16 @@
 </file>
 
 <file path=ppt/slideLayouts/slideLayout3.xml><?xml version="1.0" encoding="utf-8"?>
-<p:sldLayout xmlns:a="http://schemas.openxmlformats.org/drawingml/2006/main" xmlns:r="http://schemas.openxmlformats.org/officeDocument/2006/relationships" xmlns:p="http://schemas.openxmlformats.org/presentationml/2006/main" type="secHead" preserve="1">
+<p:sldLayout xmlns:a="http://schemas.openxmlformats.org/drawingml/2006/main" xmlns:r="http://schemas.openxmlformats.org/officeDocument/2006/relationships" xmlns:p="http://schemas.openxmlformats.org/presentationml/2006/main" showMasterSp="0" type="secHead" preserve="1">
   <p:cSld name="Section Header">
+    <p:bg>
+      <p:bgPr>
+        <a:solidFill>
+          <a:schemeClr val="bg1"/>
+        </a:solidFill>
+        <a:effectLst/>
+      </p:bgPr>
+    </p:bg>
     <p:spTree>
       <p:nvGrpSpPr>
         <p:cNvPr id="1" name=""/>
@@ -954,13 +1081,83 @@
       </p:grpSpPr>
       <p:sp>
         <p:nvSpPr>
-          <p:cNvPr id="2" name="Title 1">
-            <a:extLst>
-              <a:ext uri="{FF2B5EF4-FFF2-40B4-BE49-F238E27FC236}">
-                <a16:creationId xmlns:a16="http://schemas.microsoft.com/office/drawing/2014/main" id="{FB559C8C-72C7-2A57-3859-DC6B249F8374}"/>
-              </a:ext>
-            </a:extLst>
-          </p:cNvPr>
+          <p:cNvPr id="7" name="Rectangle 6"/>
+          <p:cNvSpPr/>
+          <p:nvPr/>
+        </p:nvSpPr>
+        <p:spPr>
+          <a:xfrm>
+            <a:off x="3175" y="6400800"/>
+            <a:ext cx="12188825" cy="457200"/>
+          </a:xfrm>
+          <a:prstGeom prst="rect">
+            <a:avLst/>
+          </a:prstGeom>
+          <a:solidFill>
+            <a:schemeClr val="accent2"/>
+          </a:solidFill>
+          <a:ln>
+            <a:noFill/>
+          </a:ln>
+        </p:spPr>
+        <p:style>
+          <a:lnRef idx="2">
+            <a:schemeClr val="accent1">
+              <a:shade val="50000"/>
+            </a:schemeClr>
+          </a:lnRef>
+          <a:fillRef idx="1">
+            <a:schemeClr val="accent1"/>
+          </a:fillRef>
+          <a:effectRef idx="0">
+            <a:schemeClr val="accent1"/>
+          </a:effectRef>
+          <a:fontRef idx="minor">
+            <a:schemeClr val="lt1"/>
+          </a:fontRef>
+        </p:style>
+      </p:sp>
+      <p:sp>
+        <p:nvSpPr>
+          <p:cNvPr id="8" name="Rectangle 7"/>
+          <p:cNvSpPr/>
+          <p:nvPr/>
+        </p:nvSpPr>
+        <p:spPr>
+          <a:xfrm>
+            <a:off x="15" y="6334316"/>
+            <a:ext cx="12188825" cy="64008"/>
+          </a:xfrm>
+          <a:prstGeom prst="rect">
+            <a:avLst/>
+          </a:prstGeom>
+          <a:solidFill>
+            <a:schemeClr val="accent1"/>
+          </a:solidFill>
+          <a:ln>
+            <a:noFill/>
+          </a:ln>
+        </p:spPr>
+        <p:style>
+          <a:lnRef idx="2">
+            <a:schemeClr val="accent1">
+              <a:shade val="50000"/>
+            </a:schemeClr>
+          </a:lnRef>
+          <a:fillRef idx="1">
+            <a:schemeClr val="accent1"/>
+          </a:fillRef>
+          <a:effectRef idx="0">
+            <a:schemeClr val="accent1"/>
+          </a:effectRef>
+          <a:fontRef idx="minor">
+            <a:schemeClr val="lt1"/>
+          </a:fontRef>
+        </p:style>
+      </p:sp>
+      <p:sp>
+        <p:nvSpPr>
+          <p:cNvPr id="2" name="Title 1"/>
           <p:cNvSpPr>
             <a:spLocks noGrp="1"/>
           </p:cNvSpPr>
@@ -970,15 +1167,27 @@
         </p:nvSpPr>
         <p:spPr>
           <a:xfrm>
-            <a:off x="831850" y="1709738"/>
-            <a:ext cx="10515600" cy="2852737"/>
-          </a:xfrm>
-        </p:spPr>
-        <p:txBody>
-          <a:bodyPr anchor="b"/>
+            <a:off x="1097280" y="758952"/>
+            <a:ext cx="10058400" cy="3566160"/>
+          </a:xfrm>
+        </p:spPr>
+        <p:txBody>
+          <a:bodyPr anchor="b" anchorCtr="0">
+            <a:normAutofit/>
+          </a:bodyPr>
           <a:lstStyle>
             <a:lvl1pPr>
-              <a:defRPr sz="6000"/>
+              <a:lnSpc>
+                <a:spcPct val="85000"/>
+              </a:lnSpc>
+              <a:defRPr sz="8000" b="0">
+                <a:solidFill>
+                  <a:schemeClr val="tx1">
+                    <a:lumMod val="85000"/>
+                    <a:lumOff val="15000"/>
+                  </a:schemeClr>
+                </a:solidFill>
+              </a:defRPr>
             </a:lvl1pPr>
           </a:lstStyle>
           <a:p>
@@ -986,18 +1195,13 @@
               <a:rPr lang="en-US"/>
               <a:t>Click to edit Master title style</a:t>
             </a:r>
-          </a:p>
-        </p:txBody>
-      </p:sp>
-      <p:sp>
-        <p:nvSpPr>
-          <p:cNvPr id="3" name="Text Placeholder 2">
-            <a:extLst>
-              <a:ext uri="{FF2B5EF4-FFF2-40B4-BE49-F238E27FC236}">
-                <a16:creationId xmlns:a16="http://schemas.microsoft.com/office/drawing/2014/main" id="{AE885D71-74E3-1D8F-8FFB-ED8A08B59BE1}"/>
-              </a:ext>
-            </a:extLst>
-          </p:cNvPr>
+            <a:endParaRPr lang="en-US" dirty="0"/>
+          </a:p>
+        </p:txBody>
+      </p:sp>
+      <p:sp>
+        <p:nvSpPr>
+          <p:cNvPr id="3" name="Text Placeholder 2"/>
           <p:cNvSpPr>
             <a:spLocks noGrp="1"/>
           </p:cNvSpPr>
@@ -1007,99 +1211,100 @@
         </p:nvSpPr>
         <p:spPr>
           <a:xfrm>
-            <a:off x="831850" y="4589463"/>
-            <a:ext cx="10515600" cy="1500187"/>
-          </a:xfrm>
-        </p:spPr>
-        <p:txBody>
-          <a:bodyPr/>
+            <a:off x="1097280" y="4453128"/>
+            <a:ext cx="10058400" cy="1143000"/>
+          </a:xfrm>
+        </p:spPr>
+        <p:txBody>
+          <a:bodyPr lIns="91440" rIns="91440" anchor="t" anchorCtr="0">
+            <a:normAutofit/>
+          </a:bodyPr>
           <a:lstStyle>
             <a:lvl1pPr marL="0" indent="0">
               <a:buNone/>
-              <a:defRPr sz="2400">
-                <a:solidFill>
-                  <a:schemeClr val="tx1">
-                    <a:tint val="82000"/>
-                  </a:schemeClr>
-                </a:solidFill>
+              <a:defRPr sz="2400" cap="all" spc="200" baseline="0">
+                <a:solidFill>
+                  <a:schemeClr val="tx2"/>
+                </a:solidFill>
+                <a:latin typeface="+mj-lt"/>
               </a:defRPr>
             </a:lvl1pPr>
             <a:lvl2pPr marL="457200" indent="0">
               <a:buNone/>
-              <a:defRPr sz="2000">
+              <a:defRPr sz="1800">
                 <a:solidFill>
                   <a:schemeClr val="tx1">
-                    <a:tint val="82000"/>
+                    <a:tint val="75000"/>
                   </a:schemeClr>
                 </a:solidFill>
               </a:defRPr>
             </a:lvl2pPr>
             <a:lvl3pPr marL="914400" indent="0">
               <a:buNone/>
-              <a:defRPr sz="1800">
+              <a:defRPr sz="1600">
                 <a:solidFill>
                   <a:schemeClr val="tx1">
-                    <a:tint val="82000"/>
+                    <a:tint val="75000"/>
                   </a:schemeClr>
                 </a:solidFill>
               </a:defRPr>
             </a:lvl3pPr>
             <a:lvl4pPr marL="1371600" indent="0">
               <a:buNone/>
-              <a:defRPr sz="1600">
+              <a:defRPr sz="1400">
                 <a:solidFill>
                   <a:schemeClr val="tx1">
-                    <a:tint val="82000"/>
+                    <a:tint val="75000"/>
                   </a:schemeClr>
                 </a:solidFill>
               </a:defRPr>
             </a:lvl4pPr>
             <a:lvl5pPr marL="1828800" indent="0">
               <a:buNone/>
-              <a:defRPr sz="1600">
+              <a:defRPr sz="1400">
                 <a:solidFill>
                   <a:schemeClr val="tx1">
-                    <a:tint val="82000"/>
+                    <a:tint val="75000"/>
                   </a:schemeClr>
                 </a:solidFill>
               </a:defRPr>
             </a:lvl5pPr>
             <a:lvl6pPr marL="2286000" indent="0">
               <a:buNone/>
-              <a:defRPr sz="1600">
+              <a:defRPr sz="1400">
                 <a:solidFill>
                   <a:schemeClr val="tx1">
-                    <a:tint val="82000"/>
+                    <a:tint val="75000"/>
                   </a:schemeClr>
                 </a:solidFill>
               </a:defRPr>
             </a:lvl6pPr>
             <a:lvl7pPr marL="2743200" indent="0">
               <a:buNone/>
-              <a:defRPr sz="1600">
+              <a:defRPr sz="1400">
                 <a:solidFill>
                   <a:schemeClr val="tx1">
-                    <a:tint val="82000"/>
+                    <a:tint val="75000"/>
                   </a:schemeClr>
                 </a:solidFill>
               </a:defRPr>
             </a:lvl7pPr>
             <a:lvl8pPr marL="3200400" indent="0">
               <a:buNone/>
-              <a:defRPr sz="1600">
+              <a:defRPr sz="1400">
                 <a:solidFill>
                   <a:schemeClr val="tx1">
-                    <a:tint val="82000"/>
+                    <a:tint val="75000"/>
                   </a:schemeClr>
                 </a:solidFill>
               </a:defRPr>
             </a:lvl8pPr>
             <a:lvl9pPr marL="3657600" indent="0">
               <a:buNone/>
-              <a:defRPr sz="1600">
+              <a:defRPr sz="1400">
                 <a:solidFill>
                   <a:schemeClr val="tx1">
-                    <a:tint val="82000"/>
+                    <a:tint val="75000"/>
                   </a:schemeClr>
                 </a:solidFill>
               </a:defRPr>
@@ -1116,13 +1321,7 @@
       </p:sp>
       <p:sp>
         <p:nvSpPr>
-          <p:cNvPr id="4" name="Date Placeholder 3">
-            <a:extLst>
-              <a:ext uri="{FF2B5EF4-FFF2-40B4-BE49-F238E27FC236}">
-                <a16:creationId xmlns:a16="http://schemas.microsoft.com/office/drawing/2014/main" id="{A2E70902-96AE-BD1E-2B9A-0A67B27001AD}"/>
-              </a:ext>
-            </a:extLst>
-          </p:cNvPr>
+          <p:cNvPr id="4" name="Date Placeholder 3"/>
           <p:cNvSpPr>
             <a:spLocks noGrp="1"/>
           </p:cNvSpPr>
@@ -1145,13 +1344,7 @@
       </p:sp>
       <p:sp>
         <p:nvSpPr>
-          <p:cNvPr id="5" name="Footer Placeholder 4">
-            <a:extLst>
-              <a:ext uri="{FF2B5EF4-FFF2-40B4-BE49-F238E27FC236}">
-                <a16:creationId xmlns:a16="http://schemas.microsoft.com/office/drawing/2014/main" id="{9F16A541-420B-E9E0-2136-EC86253EEFBC}"/>
-              </a:ext>
-            </a:extLst>
-          </p:cNvPr>
+          <p:cNvPr id="5" name="Footer Placeholder 4"/>
           <p:cNvSpPr>
             <a:spLocks noGrp="1"/>
           </p:cNvSpPr>
@@ -1170,13 +1363,7 @@
       </p:sp>
       <p:sp>
         <p:nvSpPr>
-          <p:cNvPr id="6" name="Slide Number Placeholder 5">
-            <a:extLst>
-              <a:ext uri="{FF2B5EF4-FFF2-40B4-BE49-F238E27FC236}">
-                <a16:creationId xmlns:a16="http://schemas.microsoft.com/office/drawing/2014/main" id="{A30BA741-AF6C-B9C8-8B91-23030F2D0C05}"/>
-              </a:ext>
-            </a:extLst>
-          </p:cNvPr>
+          <p:cNvPr id="6" name="Slide Number Placeholder 5"/>
           <p:cNvSpPr>
             <a:spLocks noGrp="1"/>
           </p:cNvSpPr>
@@ -1197,10 +1384,48 @@
           </a:p>
         </p:txBody>
       </p:sp>
+      <p:cxnSp>
+        <p:nvCxnSpPr>
+          <p:cNvPr id="9" name="Straight Connector 8"/>
+          <p:cNvCxnSpPr/>
+          <p:nvPr/>
+        </p:nvCxnSpPr>
+        <p:spPr>
+          <a:xfrm>
+            <a:off x="1207658" y="4343400"/>
+            <a:ext cx="9875520" cy="0"/>
+          </a:xfrm>
+          <a:prstGeom prst="line">
+            <a:avLst/>
+          </a:prstGeom>
+          <a:ln w="6350">
+            <a:solidFill>
+              <a:schemeClr val="tx1">
+                <a:lumMod val="50000"/>
+                <a:lumOff val="50000"/>
+              </a:schemeClr>
+            </a:solidFill>
+          </a:ln>
+        </p:spPr>
+        <p:style>
+          <a:lnRef idx="1">
+            <a:schemeClr val="accent1"/>
+          </a:lnRef>
+          <a:fillRef idx="0">
+            <a:schemeClr val="accent1"/>
+          </a:fillRef>
+          <a:effectRef idx="0">
+            <a:schemeClr val="accent1"/>
+          </a:effectRef>
+          <a:fontRef idx="minor">
+            <a:schemeClr val="tx1"/>
+          </a:fontRef>
+        </p:style>
+      </p:cxnSp>
     </p:spTree>
     <p:extLst>
       <p:ext uri="{BB962C8B-B14F-4D97-AF65-F5344CB8AC3E}">
-        <p14:creationId xmlns:p14="http://schemas.microsoft.com/office/powerpoint/2010/main" val="3564538436"/>
+        <p14:creationId xmlns:p14="http://schemas.microsoft.com/office/powerpoint/2010/main" val="3855476892"/>
       </p:ext>
     </p:extLst>
   </p:cSld>
@@ -1229,13 +1454,7 @@
       </p:grpSpPr>
       <p:sp>
         <p:nvSpPr>
-          <p:cNvPr id="2" name="Title 1">
-            <a:extLst>
-              <a:ext uri="{FF2B5EF4-FFF2-40B4-BE49-F238E27FC236}">
-                <a16:creationId xmlns:a16="http://schemas.microsoft.com/office/drawing/2014/main" id="{D76553B1-C90A-6C08-DC15-F9693F1F07C5}"/>
-              </a:ext>
-            </a:extLst>
-          </p:cNvPr>
+          <p:cNvPr id="8" name="Title 7"/>
           <p:cNvSpPr>
             <a:spLocks noGrp="1"/>
           </p:cNvSpPr>
@@ -1243,7 +1462,12 @@
             <p:ph type="title"/>
           </p:nvPr>
         </p:nvSpPr>
-        <p:spPr/>
+        <p:spPr>
+          <a:xfrm>
+            <a:off x="1097280" y="286603"/>
+            <a:ext cx="10058400" cy="1450757"/>
+          </a:xfrm>
+        </p:spPr>
         <p:txBody>
           <a:bodyPr/>
           <a:lstStyle/>
@@ -1252,18 +1476,13 @@
               <a:rPr lang="en-US"/>
               <a:t>Click to edit Master title style</a:t>
             </a:r>
-          </a:p>
-        </p:txBody>
-      </p:sp>
-      <p:sp>
-        <p:nvSpPr>
-          <p:cNvPr id="3" name="Content Placeholder 2">
-            <a:extLst>
-              <a:ext uri="{FF2B5EF4-FFF2-40B4-BE49-F238E27FC236}">
-                <a16:creationId xmlns:a16="http://schemas.microsoft.com/office/drawing/2014/main" id="{30BA3E0A-7DD4-6DBE-7F92-122A1C41A3E1}"/>
-              </a:ext>
-            </a:extLst>
-          </p:cNvPr>
+            <a:endParaRPr lang="en-US" dirty="0"/>
+          </a:p>
+        </p:txBody>
+      </p:sp>
+      <p:sp>
+        <p:nvSpPr>
+          <p:cNvPr id="3" name="Content Placeholder 2"/>
           <p:cNvSpPr>
             <a:spLocks noGrp="1"/>
           </p:cNvSpPr>
@@ -1273,8 +1492,8 @@
         </p:nvSpPr>
         <p:spPr>
           <a:xfrm>
-            <a:off x="838200" y="1825625"/>
-            <a:ext cx="5181600" cy="4351338"/>
+            <a:off x="1097279" y="1845734"/>
+            <a:ext cx="4937760" cy="4023360"/>
           </a:xfrm>
         </p:spPr>
         <p:txBody>
@@ -1314,18 +1533,13 @@
               <a:rPr lang="en-US"/>
               <a:t>Fifth level</a:t>
             </a:r>
-          </a:p>
-        </p:txBody>
-      </p:sp>
-      <p:sp>
-        <p:nvSpPr>
-          <p:cNvPr id="4" name="Content Placeholder 3">
-            <a:extLst>
-              <a:ext uri="{FF2B5EF4-FFF2-40B4-BE49-F238E27FC236}">
-                <a16:creationId xmlns:a16="http://schemas.microsoft.com/office/drawing/2014/main" id="{A98ED4AC-CEFE-1550-CDC3-1C3A5BC0CF93}"/>
-              </a:ext>
-            </a:extLst>
-          </p:cNvPr>
+            <a:endParaRPr lang="en-US" dirty="0"/>
+          </a:p>
+        </p:txBody>
+      </p:sp>
+      <p:sp>
+        <p:nvSpPr>
+          <p:cNvPr id="4" name="Content Placeholder 3"/>
           <p:cNvSpPr>
             <a:spLocks noGrp="1"/>
           </p:cNvSpPr>
@@ -1335,8 +1549,8 @@
         </p:nvSpPr>
         <p:spPr>
           <a:xfrm>
-            <a:off x="6172200" y="1825625"/>
-            <a:ext cx="5181600" cy="4351338"/>
+            <a:off x="6217920" y="1845735"/>
+            <a:ext cx="4937760" cy="4023360"/>
           </a:xfrm>
         </p:spPr>
         <p:txBody>
@@ -1376,18 +1590,13 @@
               <a:rPr lang="en-US"/>
               <a:t>Fifth level</a:t>
             </a:r>
-          </a:p>
-        </p:txBody>
-      </p:sp>
-      <p:sp>
-        <p:nvSpPr>
-          <p:cNvPr id="5" name="Date Placeholder 4">
-            <a:extLst>
-              <a:ext uri="{FF2B5EF4-FFF2-40B4-BE49-F238E27FC236}">
-                <a16:creationId xmlns:a16="http://schemas.microsoft.com/office/drawing/2014/main" id="{22FE34FD-A2FE-5015-0EDE-B83CF5D86FB2}"/>
-              </a:ext>
-            </a:extLst>
-          </p:cNvPr>
+            <a:endParaRPr lang="en-US" dirty="0"/>
+          </a:p>
+        </p:txBody>
+      </p:sp>
+      <p:sp>
+        <p:nvSpPr>
+          <p:cNvPr id="5" name="Date Placeholder 4"/>
           <p:cNvSpPr>
             <a:spLocks noGrp="1"/>
           </p:cNvSpPr>
@@ -1410,13 +1619,7 @@
       </p:sp>
       <p:sp>
         <p:nvSpPr>
-          <p:cNvPr id="6" name="Footer Placeholder 5">
-            <a:extLst>
-              <a:ext uri="{FF2B5EF4-FFF2-40B4-BE49-F238E27FC236}">
-                <a16:creationId xmlns:a16="http://schemas.microsoft.com/office/drawing/2014/main" id="{CD8154EC-C176-4D75-CF21-F08AB6432972}"/>
-              </a:ext>
-            </a:extLst>
-          </p:cNvPr>
+          <p:cNvPr id="6" name="Footer Placeholder 5"/>
           <p:cNvSpPr>
             <a:spLocks noGrp="1"/>
           </p:cNvSpPr>
@@ -1435,13 +1638,7 @@
       </p:sp>
       <p:sp>
         <p:nvSpPr>
-          <p:cNvPr id="7" name="Slide Number Placeholder 6">
-            <a:extLst>
-              <a:ext uri="{FF2B5EF4-FFF2-40B4-BE49-F238E27FC236}">
-                <a16:creationId xmlns:a16="http://schemas.microsoft.com/office/drawing/2014/main" id="{5E85213D-04D2-2911-FED0-3BFC593B711C}"/>
-              </a:ext>
-            </a:extLst>
-          </p:cNvPr>
+          <p:cNvPr id="7" name="Slide Number Placeholder 6"/>
           <p:cNvSpPr>
             <a:spLocks noGrp="1"/>
           </p:cNvSpPr>
@@ -1465,7 +1662,7 @@
     </p:spTree>
     <p:extLst>
       <p:ext uri="{BB962C8B-B14F-4D97-AF65-F5344CB8AC3E}">
-        <p14:creationId xmlns:p14="http://schemas.microsoft.com/office/powerpoint/2010/main" val="3875427088"/>
+        <p14:creationId xmlns:p14="http://schemas.microsoft.com/office/powerpoint/2010/main" val="1422093296"/>
       </p:ext>
     </p:extLst>
   </p:cSld>
@@ -1494,13 +1691,7 @@
       </p:grpSpPr>
       <p:sp>
         <p:nvSpPr>
-          <p:cNvPr id="2" name="Title 1">
-            <a:extLst>
-              <a:ext uri="{FF2B5EF4-FFF2-40B4-BE49-F238E27FC236}">
-                <a16:creationId xmlns:a16="http://schemas.microsoft.com/office/drawing/2014/main" id="{D1EEC45F-24C7-B91A-667D-65FFE3B9B459}"/>
-              </a:ext>
-            </a:extLst>
-          </p:cNvPr>
+          <p:cNvPr id="10" name="Title 9"/>
           <p:cNvSpPr>
             <a:spLocks noGrp="1"/>
           </p:cNvSpPr>
@@ -1510,8 +1701,8 @@
         </p:nvSpPr>
         <p:spPr>
           <a:xfrm>
-            <a:off x="839788" y="365125"/>
-            <a:ext cx="10515600" cy="1325563"/>
+            <a:off x="1097280" y="286603"/>
+            <a:ext cx="10058400" cy="1450757"/>
           </a:xfrm>
         </p:spPr>
         <p:txBody>
@@ -1522,18 +1713,13 @@
               <a:rPr lang="en-US"/>
               <a:t>Click to edit Master title style</a:t>
             </a:r>
-          </a:p>
-        </p:txBody>
-      </p:sp>
-      <p:sp>
-        <p:nvSpPr>
-          <p:cNvPr id="3" name="Text Placeholder 2">
-            <a:extLst>
-              <a:ext uri="{FF2B5EF4-FFF2-40B4-BE49-F238E27FC236}">
-                <a16:creationId xmlns:a16="http://schemas.microsoft.com/office/drawing/2014/main" id="{915A2EB2-9292-29D8-48A4-C3B9D55CFA5D}"/>
-              </a:ext>
-            </a:extLst>
-          </p:cNvPr>
+            <a:endParaRPr lang="en-US" dirty="0"/>
+          </a:p>
+        </p:txBody>
+      </p:sp>
+      <p:sp>
+        <p:nvSpPr>
+          <p:cNvPr id="3" name="Text Placeholder 2"/>
           <p:cNvSpPr>
             <a:spLocks noGrp="1"/>
           </p:cNvSpPr>
@@ -1543,16 +1729,22 @@
         </p:nvSpPr>
         <p:spPr>
           <a:xfrm>
-            <a:off x="839788" y="1681163"/>
-            <a:ext cx="5157787" cy="823912"/>
-          </a:xfrm>
-        </p:spPr>
-        <p:txBody>
-          <a:bodyPr anchor="b"/>
+            <a:off x="1097280" y="1846052"/>
+            <a:ext cx="4937760" cy="736282"/>
+          </a:xfrm>
+        </p:spPr>
+        <p:txBody>
+          <a:bodyPr lIns="91440" rIns="91440" anchor="ctr">
+            <a:normAutofit/>
+          </a:bodyPr>
           <a:lstStyle>
             <a:lvl1pPr marL="0" indent="0">
               <a:buNone/>
-              <a:defRPr sz="2400" b="1"/>
+              <a:defRPr sz="2000" b="0" cap="all" baseline="0">
+                <a:solidFill>
+                  <a:schemeClr val="tx2"/>
+                </a:solidFill>
+              </a:defRPr>
             </a:lvl1pPr>
             <a:lvl2pPr marL="457200" indent="0">
               <a:buNone/>
@@ -1598,13 +1790,7 @@
       </p:sp>
       <p:sp>
         <p:nvSpPr>
-          <p:cNvPr id="4" name="Content Placeholder 3">
-            <a:extLst>
-              <a:ext uri="{FF2B5EF4-FFF2-40B4-BE49-F238E27FC236}">
-                <a16:creationId xmlns:a16="http://schemas.microsoft.com/office/drawing/2014/main" id="{B891122F-A65B-7B90-5AE7-9DA630944377}"/>
-              </a:ext>
-            </a:extLst>
-          </p:cNvPr>
+          <p:cNvPr id="4" name="Content Placeholder 3"/>
           <p:cNvSpPr>
             <a:spLocks noGrp="1"/>
           </p:cNvSpPr>
@@ -1614,8 +1800,8 @@
         </p:nvSpPr>
         <p:spPr>
           <a:xfrm>
-            <a:off x="839788" y="2505075"/>
-            <a:ext cx="5157787" cy="3684588"/>
+            <a:off x="1097280" y="2582334"/>
+            <a:ext cx="4937760" cy="3378200"/>
           </a:xfrm>
         </p:spPr>
         <p:txBody>
@@ -1655,18 +1841,13 @@
               <a:rPr lang="en-US"/>
               <a:t>Fifth level</a:t>
             </a:r>
-          </a:p>
-        </p:txBody>
-      </p:sp>
-      <p:sp>
-        <p:nvSpPr>
-          <p:cNvPr id="5" name="Text Placeholder 4">
-            <a:extLst>
-              <a:ext uri="{FF2B5EF4-FFF2-40B4-BE49-F238E27FC236}">
-                <a16:creationId xmlns:a16="http://schemas.microsoft.com/office/drawing/2014/main" id="{45338565-108B-5996-5054-3EA48904A28A}"/>
-              </a:ext>
-            </a:extLst>
-          </p:cNvPr>
+            <a:endParaRPr lang="en-US" dirty="0"/>
+          </a:p>
+        </p:txBody>
+      </p:sp>
+      <p:sp>
+        <p:nvSpPr>
+          <p:cNvPr id="5" name="Text Placeholder 4"/>
           <p:cNvSpPr>
             <a:spLocks noGrp="1"/>
           </p:cNvSpPr>
@@ -1676,16 +1857,22 @@
         </p:nvSpPr>
         <p:spPr>
           <a:xfrm>
-            <a:off x="6172200" y="1681163"/>
-            <a:ext cx="5183188" cy="823912"/>
-          </a:xfrm>
-        </p:spPr>
-        <p:txBody>
-          <a:bodyPr anchor="b"/>
+            <a:off x="6217920" y="1846052"/>
+            <a:ext cx="4937760" cy="736282"/>
+          </a:xfrm>
+        </p:spPr>
+        <p:txBody>
+          <a:bodyPr lIns="91440" rIns="91440" anchor="ctr">
+            <a:normAutofit/>
+          </a:bodyPr>
           <a:lstStyle>
             <a:lvl1pPr marL="0" indent="0">
               <a:buNone/>
-              <a:defRPr sz="2400" b="1"/>
+              <a:defRPr sz="2000" b="0" cap="all" baseline="0">
+                <a:solidFill>
+                  <a:schemeClr val="tx2"/>
+                </a:solidFill>
+              </a:defRPr>
             </a:lvl1pPr>
             <a:lvl2pPr marL="457200" indent="0">
               <a:buNone/>
@@ -1731,13 +1918,7 @@
       </p:sp>
       <p:sp>
         <p:nvSpPr>
-          <p:cNvPr id="6" name="Content Placeholder 5">
-            <a:extLst>
-              <a:ext uri="{FF2B5EF4-FFF2-40B4-BE49-F238E27FC236}">
-                <a16:creationId xmlns:a16="http://schemas.microsoft.com/office/drawing/2014/main" id="{6D93DC61-D5DE-0719-CA8D-7E67E477A6D4}"/>
-              </a:ext>
-            </a:extLst>
-          </p:cNvPr>
+          <p:cNvPr id="6" name="Content Placeholder 5"/>
           <p:cNvSpPr>
             <a:spLocks noGrp="1"/>
           </p:cNvSpPr>
@@ -1747,8 +1928,8 @@
         </p:nvSpPr>
         <p:spPr>
           <a:xfrm>
-            <a:off x="6172200" y="2505075"/>
-            <a:ext cx="5183188" cy="3684588"/>
+            <a:off x="6217920" y="2582334"/>
+            <a:ext cx="4937760" cy="3378200"/>
           </a:xfrm>
         </p:spPr>
         <p:txBody>
@@ -1788,18 +1969,13 @@
               <a:rPr lang="en-US"/>
               <a:t>Fifth level</a:t>
             </a:r>
-          </a:p>
-        </p:txBody>
-      </p:sp>
-      <p:sp>
-        <p:nvSpPr>
-          <p:cNvPr id="7" name="Date Placeholder 6">
-            <a:extLst>
-              <a:ext uri="{FF2B5EF4-FFF2-40B4-BE49-F238E27FC236}">
-                <a16:creationId xmlns:a16="http://schemas.microsoft.com/office/drawing/2014/main" id="{0C09930B-5E2F-BF41-F980-3733B7D82ECE}"/>
-              </a:ext>
-            </a:extLst>
-          </p:cNvPr>
+            <a:endParaRPr lang="en-US" dirty="0"/>
+          </a:p>
+        </p:txBody>
+      </p:sp>
+      <p:sp>
+        <p:nvSpPr>
+          <p:cNvPr id="7" name="Date Placeholder 6"/>
           <p:cNvSpPr>
             <a:spLocks noGrp="1"/>
           </p:cNvSpPr>
@@ -1822,13 +1998,7 @@
       </p:sp>
       <p:sp>
         <p:nvSpPr>
-          <p:cNvPr id="8" name="Footer Placeholder 7">
-            <a:extLst>
-              <a:ext uri="{FF2B5EF4-FFF2-40B4-BE49-F238E27FC236}">
-                <a16:creationId xmlns:a16="http://schemas.microsoft.com/office/drawing/2014/main" id="{381D2044-EEBF-F64C-831C-24DA33E990F7}"/>
-              </a:ext>
-            </a:extLst>
-          </p:cNvPr>
+          <p:cNvPr id="8" name="Footer Placeholder 7"/>
           <p:cNvSpPr>
             <a:spLocks noGrp="1"/>
           </p:cNvSpPr>
@@ -1847,13 +2017,7 @@
       </p:sp>
       <p:sp>
         <p:nvSpPr>
-          <p:cNvPr id="9" name="Slide Number Placeholder 8">
-            <a:extLst>
-              <a:ext uri="{FF2B5EF4-FFF2-40B4-BE49-F238E27FC236}">
-                <a16:creationId xmlns:a16="http://schemas.microsoft.com/office/drawing/2014/main" id="{905ECAAE-6D7A-B21D-185B-511AAE225A86}"/>
-              </a:ext>
-            </a:extLst>
-          </p:cNvPr>
+          <p:cNvPr id="9" name="Slide Number Placeholder 8"/>
           <p:cNvSpPr>
             <a:spLocks noGrp="1"/>
           </p:cNvSpPr>
@@ -1877,7 +2041,7 @@
     </p:spTree>
     <p:extLst>
       <p:ext uri="{BB962C8B-B14F-4D97-AF65-F5344CB8AC3E}">
-        <p14:creationId xmlns:p14="http://schemas.microsoft.com/office/powerpoint/2010/main" val="4238855198"/>
+        <p14:creationId xmlns:p14="http://schemas.microsoft.com/office/powerpoint/2010/main" val="2962005660"/>
       </p:ext>
     </p:extLst>
   </p:cSld>
@@ -1906,13 +2070,7 @@
       </p:grpSpPr>
       <p:sp>
         <p:nvSpPr>
-          <p:cNvPr id="2" name="Title 1">
-            <a:extLst>
-              <a:ext uri="{FF2B5EF4-FFF2-40B4-BE49-F238E27FC236}">
-                <a16:creationId xmlns:a16="http://schemas.microsoft.com/office/drawing/2014/main" id="{A3311572-601C-2FE1-8BF8-AB4AC903F4D7}"/>
-              </a:ext>
-            </a:extLst>
-          </p:cNvPr>
+          <p:cNvPr id="2" name="Title 1"/>
           <p:cNvSpPr>
             <a:spLocks noGrp="1"/>
           </p:cNvSpPr>
@@ -1929,18 +2087,13 @@
               <a:rPr lang="en-US"/>
               <a:t>Click to edit Master title style</a:t>
             </a:r>
-          </a:p>
-        </p:txBody>
-      </p:sp>
-      <p:sp>
-        <p:nvSpPr>
-          <p:cNvPr id="3" name="Date Placeholder 2">
-            <a:extLst>
-              <a:ext uri="{FF2B5EF4-FFF2-40B4-BE49-F238E27FC236}">
-                <a16:creationId xmlns:a16="http://schemas.microsoft.com/office/drawing/2014/main" id="{E4BD4CA0-46FF-B68C-9EDA-FAEB51071589}"/>
-              </a:ext>
-            </a:extLst>
-          </p:cNvPr>
+            <a:endParaRPr lang="en-US" dirty="0"/>
+          </a:p>
+        </p:txBody>
+      </p:sp>
+      <p:sp>
+        <p:nvSpPr>
+          <p:cNvPr id="3" name="Date Placeholder 2"/>
           <p:cNvSpPr>
             <a:spLocks noGrp="1"/>
           </p:cNvSpPr>
@@ -1963,13 +2116,7 @@
       </p:sp>
       <p:sp>
         <p:nvSpPr>
-          <p:cNvPr id="4" name="Footer Placeholder 3">
-            <a:extLst>
-              <a:ext uri="{FF2B5EF4-FFF2-40B4-BE49-F238E27FC236}">
-                <a16:creationId xmlns:a16="http://schemas.microsoft.com/office/drawing/2014/main" id="{3B56ECBC-52F9-3DDD-AB98-3C72CC2F890E}"/>
-              </a:ext>
-            </a:extLst>
-          </p:cNvPr>
+          <p:cNvPr id="4" name="Footer Placeholder 3"/>
           <p:cNvSpPr>
             <a:spLocks noGrp="1"/>
           </p:cNvSpPr>
@@ -1988,13 +2135,7 @@
       </p:sp>
       <p:sp>
         <p:nvSpPr>
-          <p:cNvPr id="5" name="Slide Number Placeholder 4">
-            <a:extLst>
-              <a:ext uri="{FF2B5EF4-FFF2-40B4-BE49-F238E27FC236}">
-                <a16:creationId xmlns:a16="http://schemas.microsoft.com/office/drawing/2014/main" id="{B9713121-7555-41E3-D422-2FB0BA6FCDB7}"/>
-              </a:ext>
-            </a:extLst>
-          </p:cNvPr>
+          <p:cNvPr id="5" name="Slide Number Placeholder 4"/>
           <p:cNvSpPr>
             <a:spLocks noGrp="1"/>
           </p:cNvSpPr>
@@ -2018,7 +2159,7 @@
     </p:spTree>
     <p:extLst>
       <p:ext uri="{BB962C8B-B14F-4D97-AF65-F5344CB8AC3E}">
-        <p14:creationId xmlns:p14="http://schemas.microsoft.com/office/powerpoint/2010/main" val="150274978"/>
+        <p14:creationId xmlns:p14="http://schemas.microsoft.com/office/powerpoint/2010/main" val="3427994491"/>
       </p:ext>
     </p:extLst>
   </p:cSld>
@@ -2029,7 +2170,7 @@
 </file>
 
 <file path=ppt/slideLayouts/slideLayout7.xml><?xml version="1.0" encoding="utf-8"?>
-<p:sldLayout xmlns:a="http://schemas.openxmlformats.org/drawingml/2006/main" xmlns:r="http://schemas.openxmlformats.org/officeDocument/2006/relationships" xmlns:p="http://schemas.openxmlformats.org/presentationml/2006/main" type="blank" preserve="1">
+<p:sldLayout xmlns:a="http://schemas.openxmlformats.org/drawingml/2006/main" xmlns:r="http://schemas.openxmlformats.org/officeDocument/2006/relationships" xmlns:p="http://schemas.openxmlformats.org/presentationml/2006/main" showMasterSp="0" type="blank" preserve="1">
   <p:cSld name="Blank">
     <p:spTree>
       <p:nvGrpSpPr>
@@ -2047,13 +2188,83 @@
       </p:grpSpPr>
       <p:sp>
         <p:nvSpPr>
-          <p:cNvPr id="2" name="Date Placeholder 1">
-            <a:extLst>
-              <a:ext uri="{FF2B5EF4-FFF2-40B4-BE49-F238E27FC236}">
-                <a16:creationId xmlns:a16="http://schemas.microsoft.com/office/drawing/2014/main" id="{945E95CA-7E0F-5F78-7E0C-B1051FC75D30}"/>
-              </a:ext>
-            </a:extLst>
-          </p:cNvPr>
+          <p:cNvPr id="5" name="Rectangle 4"/>
+          <p:cNvSpPr/>
+          <p:nvPr/>
+        </p:nvSpPr>
+        <p:spPr>
+          <a:xfrm>
+            <a:off x="3175" y="6400800"/>
+            <a:ext cx="12188825" cy="457200"/>
+          </a:xfrm>
+          <a:prstGeom prst="rect">
+            <a:avLst/>
+          </a:prstGeom>
+          <a:solidFill>
+            <a:schemeClr val="accent2"/>
+          </a:solidFill>
+          <a:ln>
+            <a:noFill/>
+          </a:ln>
+        </p:spPr>
+        <p:style>
+          <a:lnRef idx="2">
+            <a:schemeClr val="accent1">
+              <a:shade val="50000"/>
+            </a:schemeClr>
+          </a:lnRef>
+          <a:fillRef idx="1">
+            <a:schemeClr val="accent1"/>
+          </a:fillRef>
+          <a:effectRef idx="0">
+            <a:schemeClr val="accent1"/>
+          </a:effectRef>
+          <a:fontRef idx="minor">
+            <a:schemeClr val="lt1"/>
+          </a:fontRef>
+        </p:style>
+      </p:sp>
+      <p:sp>
+        <p:nvSpPr>
+          <p:cNvPr id="6" name="Rectangle 5"/>
+          <p:cNvSpPr/>
+          <p:nvPr/>
+        </p:nvSpPr>
+        <p:spPr>
+          <a:xfrm>
+            <a:off x="15" y="6334316"/>
+            <a:ext cx="12188825" cy="64008"/>
+          </a:xfrm>
+          <a:prstGeom prst="rect">
+            <a:avLst/>
+          </a:prstGeom>
+          <a:solidFill>
+            <a:schemeClr val="accent1"/>
+          </a:solidFill>
+          <a:ln>
+            <a:noFill/>
+          </a:ln>
+        </p:spPr>
+        <p:style>
+          <a:lnRef idx="2">
+            <a:schemeClr val="accent1">
+              <a:shade val="50000"/>
+            </a:schemeClr>
+          </a:lnRef>
+          <a:fillRef idx="1">
+            <a:schemeClr val="accent1"/>
+          </a:fillRef>
+          <a:effectRef idx="0">
+            <a:schemeClr val="accent1"/>
+          </a:effectRef>
+          <a:fontRef idx="minor">
+            <a:schemeClr val="lt1"/>
+          </a:fontRef>
+        </p:style>
+      </p:sp>
+      <p:sp>
+        <p:nvSpPr>
+          <p:cNvPr id="7" name="Date Placeholder 6"/>
           <p:cNvSpPr>
             <a:spLocks noGrp="1"/>
           </p:cNvSpPr>
@@ -2076,13 +2287,7 @@
       </p:sp>
       <p:sp>
         <p:nvSpPr>
-          <p:cNvPr id="3" name="Footer Placeholder 2">
-            <a:extLst>
-              <a:ext uri="{FF2B5EF4-FFF2-40B4-BE49-F238E27FC236}">
-                <a16:creationId xmlns:a16="http://schemas.microsoft.com/office/drawing/2014/main" id="{AB7664CB-3F14-9722-C9BD-493C2C53A099}"/>
-              </a:ext>
-            </a:extLst>
-          </p:cNvPr>
+          <p:cNvPr id="8" name="Footer Placeholder 7"/>
           <p:cNvSpPr>
             <a:spLocks noGrp="1"/>
           </p:cNvSpPr>
@@ -2093,7 +2298,15 @@
         <p:spPr/>
         <p:txBody>
           <a:bodyPr/>
-          <a:lstStyle/>
+          <a:lstStyle>
+            <a:lvl1pPr>
+              <a:defRPr>
+                <a:solidFill>
+                  <a:srgbClr val="FFFFFF"/>
+                </a:solidFill>
+              </a:defRPr>
+            </a:lvl1pPr>
+          </a:lstStyle>
           <a:p>
             <a:endParaRPr lang="en-US"/>
           </a:p>
@@ -2101,13 +2314,7 @@
       </p:sp>
       <p:sp>
         <p:nvSpPr>
-          <p:cNvPr id="4" name="Slide Number Placeholder 3">
-            <a:extLst>
-              <a:ext uri="{FF2B5EF4-FFF2-40B4-BE49-F238E27FC236}">
-                <a16:creationId xmlns:a16="http://schemas.microsoft.com/office/drawing/2014/main" id="{3F6CCAE2-EB82-8B12-85CD-81FC0B88EEC4}"/>
-              </a:ext>
-            </a:extLst>
-          </p:cNvPr>
+          <p:cNvPr id="9" name="Slide Number Placeholder 8"/>
           <p:cNvSpPr>
             <a:spLocks noGrp="1"/>
           </p:cNvSpPr>
@@ -2131,7 +2338,7 @@
     </p:spTree>
     <p:extLst>
       <p:ext uri="{BB962C8B-B14F-4D97-AF65-F5344CB8AC3E}">
-        <p14:creationId xmlns:p14="http://schemas.microsoft.com/office/powerpoint/2010/main" val="2120085840"/>
+        <p14:creationId xmlns:p14="http://schemas.microsoft.com/office/powerpoint/2010/main" val="3538547562"/>
       </p:ext>
     </p:extLst>
   </p:cSld>
@@ -2142,7 +2349,7 @@
 </file>
 
 <file path=ppt/slideLayouts/slideLayout8.xml><?xml version="1.0" encoding="utf-8"?>
-<p:sldLayout xmlns:a="http://schemas.openxmlformats.org/drawingml/2006/main" xmlns:r="http://schemas.openxmlformats.org/officeDocument/2006/relationships" xmlns:p="http://schemas.openxmlformats.org/presentationml/2006/main" type="objTx" preserve="1">
+<p:sldLayout xmlns:a="http://schemas.openxmlformats.org/drawingml/2006/main" xmlns:r="http://schemas.openxmlformats.org/officeDocument/2006/relationships" xmlns:p="http://schemas.openxmlformats.org/presentationml/2006/main" showMasterSp="0" type="objTx" preserve="1">
   <p:cSld name="Content with Caption">
     <p:spTree>
       <p:nvGrpSpPr>
@@ -2160,13 +2367,83 @@
       </p:grpSpPr>
       <p:sp>
         <p:nvSpPr>
-          <p:cNvPr id="2" name="Title 1">
-            <a:extLst>
-              <a:ext uri="{FF2B5EF4-FFF2-40B4-BE49-F238E27FC236}">
-                <a16:creationId xmlns:a16="http://schemas.microsoft.com/office/drawing/2014/main" id="{7ABBE5FA-376F-ECDB-0D5F-A92A5AA22B8E}"/>
-              </a:ext>
-            </a:extLst>
-          </p:cNvPr>
+          <p:cNvPr id="8" name="Rectangle 7"/>
+          <p:cNvSpPr/>
+          <p:nvPr/>
+        </p:nvSpPr>
+        <p:spPr>
+          <a:xfrm>
+            <a:off x="16" y="0"/>
+            <a:ext cx="4050791" cy="6858000"/>
+          </a:xfrm>
+          <a:prstGeom prst="rect">
+            <a:avLst/>
+          </a:prstGeom>
+          <a:solidFill>
+            <a:schemeClr val="accent2"/>
+          </a:solidFill>
+          <a:ln>
+            <a:noFill/>
+          </a:ln>
+        </p:spPr>
+        <p:style>
+          <a:lnRef idx="2">
+            <a:schemeClr val="accent1">
+              <a:shade val="50000"/>
+            </a:schemeClr>
+          </a:lnRef>
+          <a:fillRef idx="1">
+            <a:schemeClr val="accent1"/>
+          </a:fillRef>
+          <a:effectRef idx="0">
+            <a:schemeClr val="accent1"/>
+          </a:effectRef>
+          <a:fontRef idx="minor">
+            <a:schemeClr val="lt1"/>
+          </a:fontRef>
+        </p:style>
+      </p:sp>
+      <p:sp>
+        <p:nvSpPr>
+          <p:cNvPr id="9" name="Rectangle 8"/>
+          <p:cNvSpPr/>
+          <p:nvPr/>
+        </p:nvSpPr>
+        <p:spPr>
+          <a:xfrm>
+            <a:off x="4040071" y="0"/>
+            <a:ext cx="64008" cy="6858000"/>
+          </a:xfrm>
+          <a:prstGeom prst="rect">
+            <a:avLst/>
+          </a:prstGeom>
+          <a:solidFill>
+            <a:schemeClr val="accent1"/>
+          </a:solidFill>
+          <a:ln>
+            <a:noFill/>
+          </a:ln>
+        </p:spPr>
+        <p:style>
+          <a:lnRef idx="2">
+            <a:schemeClr val="accent1">
+              <a:shade val="50000"/>
+            </a:schemeClr>
+          </a:lnRef>
+          <a:fillRef idx="1">
+            <a:schemeClr val="accent1"/>
+          </a:fillRef>
+          <a:effectRef idx="0">
+            <a:schemeClr val="accent1"/>
+          </a:effectRef>
+          <a:fontRef idx="minor">
+            <a:schemeClr val="lt1"/>
+          </a:fontRef>
+        </p:style>
+      </p:sp>
+      <p:sp>
+        <p:nvSpPr>
+          <p:cNvPr id="2" name="Title 1"/>
           <p:cNvSpPr>
             <a:spLocks noGrp="1"/>
           </p:cNvSpPr>
@@ -2176,15 +2453,21 @@
         </p:nvSpPr>
         <p:spPr>
           <a:xfrm>
-            <a:off x="839788" y="457200"/>
-            <a:ext cx="3932237" cy="1600200"/>
-          </a:xfrm>
-        </p:spPr>
-        <p:txBody>
-          <a:bodyPr anchor="b"/>
+            <a:off x="457200" y="594359"/>
+            <a:ext cx="3200400" cy="2286000"/>
+          </a:xfrm>
+        </p:spPr>
+        <p:txBody>
+          <a:bodyPr anchor="b">
+            <a:normAutofit/>
+          </a:bodyPr>
           <a:lstStyle>
             <a:lvl1pPr>
-              <a:defRPr sz="3200"/>
+              <a:defRPr sz="3600" b="0">
+                <a:solidFill>
+                  <a:srgbClr val="FFFFFF"/>
+                </a:solidFill>
+              </a:defRPr>
             </a:lvl1pPr>
           </a:lstStyle>
           <a:p>
@@ -2192,18 +2475,13 @@
               <a:rPr lang="en-US"/>
               <a:t>Click to edit Master title style</a:t>
             </a:r>
-          </a:p>
-        </p:txBody>
-      </p:sp>
-      <p:sp>
-        <p:nvSpPr>
-          <p:cNvPr id="3" name="Content Placeholder 2">
-            <a:extLst>
-              <a:ext uri="{FF2B5EF4-FFF2-40B4-BE49-F238E27FC236}">
-                <a16:creationId xmlns:a16="http://schemas.microsoft.com/office/drawing/2014/main" id="{5AA313F7-B790-F082-4AC5-E3D7B068C956}"/>
-              </a:ext>
-            </a:extLst>
-          </p:cNvPr>
+            <a:endParaRPr lang="en-US" dirty="0"/>
+          </a:p>
+        </p:txBody>
+      </p:sp>
+      <p:sp>
+        <p:nvSpPr>
+          <p:cNvPr id="3" name="Content Placeholder 2"/>
           <p:cNvSpPr>
             <a:spLocks noGrp="1"/>
           </p:cNvSpPr>
@@ -2213,41 +2491,13 @@
         </p:nvSpPr>
         <p:spPr>
           <a:xfrm>
-            <a:off x="5183188" y="987425"/>
-            <a:ext cx="6172200" cy="4873625"/>
+            <a:off x="4800600" y="731520"/>
+            <a:ext cx="6492240" cy="5257800"/>
           </a:xfrm>
         </p:spPr>
         <p:txBody>
           <a:bodyPr/>
-          <a:lstStyle>
-            <a:lvl1pPr>
-              <a:defRPr sz="3200"/>
-            </a:lvl1pPr>
-            <a:lvl2pPr>
-              <a:defRPr sz="2800"/>
-            </a:lvl2pPr>
-            <a:lvl3pPr>
-              <a:defRPr sz="2400"/>
-            </a:lvl3pPr>
-            <a:lvl4pPr>
-              <a:defRPr sz="2000"/>
-            </a:lvl4pPr>
-            <a:lvl5pPr>
-              <a:defRPr sz="2000"/>
-            </a:lvl5pPr>
-            <a:lvl6pPr>
-              <a:defRPr sz="2000"/>
-            </a:lvl6pPr>
-            <a:lvl7pPr>
-              <a:defRPr sz="2000"/>
-            </a:lvl7pPr>
-            <a:lvl8pPr>
-              <a:defRPr sz="2000"/>
-            </a:lvl8pPr>
-            <a:lvl9pPr>
-              <a:defRPr sz="2000"/>
-            </a:lvl9pPr>
-          </a:lstStyle>
+          <a:lstStyle/>
           <a:p>
             <a:pPr lvl="0"/>
             <a:r>
@@ -2282,18 +2532,13 @@
               <a:rPr lang="en-US"/>
               <a:t>Fifth level</a:t>
             </a:r>
-          </a:p>
-        </p:txBody>
-      </p:sp>
-      <p:sp>
-        <p:nvSpPr>
-          <p:cNvPr id="4" name="Text Placeholder 3">
-            <a:extLst>
-              <a:ext uri="{FF2B5EF4-FFF2-40B4-BE49-F238E27FC236}">
-                <a16:creationId xmlns:a16="http://schemas.microsoft.com/office/drawing/2014/main" id="{5144BD07-8B4F-8366-F24F-751BA905489F}"/>
-              </a:ext>
-            </a:extLst>
-          </p:cNvPr>
+            <a:endParaRPr lang="en-US" dirty="0"/>
+          </a:p>
+        </p:txBody>
+      </p:sp>
+      <p:sp>
+        <p:nvSpPr>
+          <p:cNvPr id="4" name="Text Placeholder 3"/>
           <p:cNvSpPr>
             <a:spLocks noGrp="1"/>
           </p:cNvSpPr>
@@ -2303,48 +2548,54 @@
         </p:nvSpPr>
         <p:spPr>
           <a:xfrm>
-            <a:off x="839788" y="2057400"/>
-            <a:ext cx="3932237" cy="3811588"/>
-          </a:xfrm>
-        </p:spPr>
-        <p:txBody>
-          <a:bodyPr/>
+            <a:off x="457200" y="2926080"/>
+            <a:ext cx="3200400" cy="3379124"/>
+          </a:xfrm>
+        </p:spPr>
+        <p:txBody>
+          <a:bodyPr lIns="91440" rIns="91440">
+            <a:normAutofit/>
+          </a:bodyPr>
           <a:lstStyle>
             <a:lvl1pPr marL="0" indent="0">
               <a:buNone/>
-              <a:defRPr sz="1600"/>
+              <a:defRPr sz="1500">
+                <a:solidFill>
+                  <a:srgbClr val="FFFFFF"/>
+                </a:solidFill>
+              </a:defRPr>
             </a:lvl1pPr>
             <a:lvl2pPr marL="457200" indent="0">
               <a:buNone/>
-              <a:defRPr sz="1400"/>
+              <a:defRPr sz="1200"/>
             </a:lvl2pPr>
             <a:lvl3pPr marL="914400" indent="0">
               <a:buNone/>
-              <a:defRPr sz="1200"/>
+              <a:defRPr sz="1000"/>
             </a:lvl3pPr>
             <a:lvl4pPr marL="1371600" indent="0">
               <a:buNone/>
-              <a:defRPr sz="1000"/>
+              <a:defRPr sz="900"/>
             </a:lvl4pPr>
             <a:lvl5pPr marL="1828800" indent="0">
               <a:buNone/>
-              <a:defRPr sz="1000"/>
+              <a:defRPr sz="900"/>
             </a:lvl5pPr>
             <a:lvl6pPr marL="2286000" indent="0">
               <a:buNone/>
-              <a:defRPr sz="1000"/>
+              <a:defRPr sz="900"/>
             </a:lvl6pPr>
             <a:lvl7pPr marL="2743200" indent="0">
               <a:buNone/>
-              <a:defRPr sz="1000"/>
+              <a:defRPr sz="900"/>
             </a:lvl7pPr>
             <a:lvl8pPr marL="3200400" indent="0">
               <a:buNone/>
-              <a:defRPr sz="1000"/>
+              <a:defRPr sz="900"/>
             </a:lvl8pPr>
             <a:lvl9pPr marL="3657600" indent="0">
               <a:buNone/>
-              <a:defRPr sz="1000"/>
+              <a:defRPr sz="900"/>
             </a:lvl9pPr>
           </a:lstStyle>
           <a:p>
@@ -2358,13 +2609,7 @@
       </p:sp>
       <p:sp>
         <p:nvSpPr>
-          <p:cNvPr id="5" name="Date Placeholder 4">
-            <a:extLst>
-              <a:ext uri="{FF2B5EF4-FFF2-40B4-BE49-F238E27FC236}">
-                <a16:creationId xmlns:a16="http://schemas.microsoft.com/office/drawing/2014/main" id="{6394E58E-EEFC-A53D-E089-C89C87D6C536}"/>
-              </a:ext>
-            </a:extLst>
-          </p:cNvPr>
+          <p:cNvPr id="5" name="Date Placeholder 4"/>
           <p:cNvSpPr>
             <a:spLocks noGrp="1"/>
           </p:cNvSpPr>
@@ -2372,10 +2617,19 @@
             <p:ph type="dt" sz="half" idx="10"/>
           </p:nvPr>
         </p:nvSpPr>
-        <p:spPr/>
+        <p:spPr>
+          <a:xfrm>
+            <a:off x="465512" y="6459785"/>
+            <a:ext cx="2618510" cy="365125"/>
+          </a:xfrm>
+        </p:spPr>
         <p:txBody>
           <a:bodyPr/>
-          <a:lstStyle/>
+          <a:lstStyle>
+            <a:lvl1pPr algn="l">
+              <a:defRPr/>
+            </a:lvl1pPr>
+          </a:lstStyle>
           <a:p>
             <a:fld id="{DDE85544-3272-459C-8B5C-B5598C272BF8}" type="datetimeFigureOut">
               <a:rPr lang="en-US" smtClean="0"/>
@@ -2387,13 +2641,7 @@
       </p:sp>
       <p:sp>
         <p:nvSpPr>
-          <p:cNvPr id="6" name="Footer Placeholder 5">
-            <a:extLst>
-              <a:ext uri="{FF2B5EF4-FFF2-40B4-BE49-F238E27FC236}">
-                <a16:creationId xmlns:a16="http://schemas.microsoft.com/office/drawing/2014/main" id="{65CD7CC0-0C73-EA11-7F60-ED4E0EEBDAFB}"/>
-              </a:ext>
-            </a:extLst>
-          </p:cNvPr>
+          <p:cNvPr id="6" name="Footer Placeholder 5"/>
           <p:cNvSpPr>
             <a:spLocks noGrp="1"/>
           </p:cNvSpPr>
@@ -2401,35 +2649,50 @@
             <p:ph type="ftr" sz="quarter" idx="11"/>
           </p:nvPr>
         </p:nvSpPr>
+        <p:spPr>
+          <a:xfrm>
+            <a:off x="4800600" y="6459785"/>
+            <a:ext cx="4648200" cy="365125"/>
+          </a:xfrm>
+        </p:spPr>
+        <p:txBody>
+          <a:bodyPr/>
+          <a:lstStyle>
+            <a:lvl1pPr algn="l">
+              <a:defRPr>
+                <a:solidFill>
+                  <a:schemeClr val="tx2"/>
+                </a:solidFill>
+              </a:defRPr>
+            </a:lvl1pPr>
+          </a:lstStyle>
+          <a:p>
+            <a:endParaRPr lang="en-US"/>
+          </a:p>
+        </p:txBody>
+      </p:sp>
+      <p:sp>
+        <p:nvSpPr>
+          <p:cNvPr id="7" name="Slide Number Placeholder 6"/>
+          <p:cNvSpPr>
+            <a:spLocks noGrp="1"/>
+          </p:cNvSpPr>
+          <p:nvPr>
+            <p:ph type="sldNum" sz="quarter" idx="12"/>
+          </p:nvPr>
+        </p:nvSpPr>
         <p:spPr/>
         <p:txBody>
           <a:bodyPr/>
-          <a:lstStyle/>
-          <a:p>
-            <a:endParaRPr lang="en-US"/>
-          </a:p>
-        </p:txBody>
-      </p:sp>
-      <p:sp>
-        <p:nvSpPr>
-          <p:cNvPr id="7" name="Slide Number Placeholder 6">
-            <a:extLst>
-              <a:ext uri="{FF2B5EF4-FFF2-40B4-BE49-F238E27FC236}">
-                <a16:creationId xmlns:a16="http://schemas.microsoft.com/office/drawing/2014/main" id="{62065EB7-5760-1333-DC8A-FEEE15FC69FF}"/>
-              </a:ext>
-            </a:extLst>
-          </p:cNvPr>
-          <p:cNvSpPr>
-            <a:spLocks noGrp="1"/>
-          </p:cNvSpPr>
-          <p:nvPr>
-            <p:ph type="sldNum" sz="quarter" idx="12"/>
-          </p:nvPr>
-        </p:nvSpPr>
-        <p:spPr/>
-        <p:txBody>
-          <a:bodyPr/>
-          <a:lstStyle/>
+          <a:lstStyle>
+            <a:lvl1pPr>
+              <a:defRPr>
+                <a:solidFill>
+                  <a:schemeClr val="tx2"/>
+                </a:solidFill>
+              </a:defRPr>
+            </a:lvl1pPr>
+          </a:lstStyle>
           <a:p>
             <a:fld id="{9DACA8D9-3184-49B0-8CB2-29B88310CD44}" type="slidenum">
               <a:rPr lang="en-US" smtClean="0"/>
@@ -2442,7 +2705,7 @@
     </p:spTree>
     <p:extLst>
       <p:ext uri="{BB962C8B-B14F-4D97-AF65-F5344CB8AC3E}">
-        <p14:creationId xmlns:p14="http://schemas.microsoft.com/office/powerpoint/2010/main" val="2208743032"/>
+        <p14:creationId xmlns:p14="http://schemas.microsoft.com/office/powerpoint/2010/main" val="2212204181"/>
       </p:ext>
     </p:extLst>
   </p:cSld>
@@ -2453,7 +2716,7 @@
 </file>
 
 <file path=ppt/slideLayouts/slideLayout9.xml><?xml version="1.0" encoding="utf-8"?>
-<p:sldLayout xmlns:a="http://schemas.openxmlformats.org/drawingml/2006/main" xmlns:r="http://schemas.openxmlformats.org/officeDocument/2006/relationships" xmlns:p="http://schemas.openxmlformats.org/presentationml/2006/main" type="picTx" preserve="1">
+<p:sldLayout xmlns:a="http://schemas.openxmlformats.org/drawingml/2006/main" xmlns:r="http://schemas.openxmlformats.org/officeDocument/2006/relationships" xmlns:p="http://schemas.openxmlformats.org/presentationml/2006/main" showMasterSp="0" type="picTx" preserve="1">
   <p:cSld name="Picture with Caption">
     <p:spTree>
       <p:nvGrpSpPr>
@@ -2471,13 +2734,83 @@
       </p:grpSpPr>
       <p:sp>
         <p:nvSpPr>
-          <p:cNvPr id="2" name="Title 1">
-            <a:extLst>
-              <a:ext uri="{FF2B5EF4-FFF2-40B4-BE49-F238E27FC236}">
-                <a16:creationId xmlns:a16="http://schemas.microsoft.com/office/drawing/2014/main" id="{661E771B-D6A4-7A67-771E-79BAC7999640}"/>
-              </a:ext>
-            </a:extLst>
-          </p:cNvPr>
+          <p:cNvPr id="8" name="Rectangle 7"/>
+          <p:cNvSpPr/>
+          <p:nvPr/>
+        </p:nvSpPr>
+        <p:spPr>
+          <a:xfrm>
+            <a:off x="0" y="4953000"/>
+            <a:ext cx="12188825" cy="1905000"/>
+          </a:xfrm>
+          <a:prstGeom prst="rect">
+            <a:avLst/>
+          </a:prstGeom>
+          <a:solidFill>
+            <a:schemeClr val="accent2"/>
+          </a:solidFill>
+          <a:ln>
+            <a:noFill/>
+          </a:ln>
+        </p:spPr>
+        <p:style>
+          <a:lnRef idx="2">
+            <a:schemeClr val="accent1">
+              <a:shade val="50000"/>
+            </a:schemeClr>
+          </a:lnRef>
+          <a:fillRef idx="1">
+            <a:schemeClr val="accent1"/>
+          </a:fillRef>
+          <a:effectRef idx="0">
+            <a:schemeClr val="accent1"/>
+          </a:effectRef>
+          <a:fontRef idx="minor">
+            <a:schemeClr val="lt1"/>
+          </a:fontRef>
+        </p:style>
+      </p:sp>
+      <p:sp>
+        <p:nvSpPr>
+          <p:cNvPr id="9" name="Rectangle 8"/>
+          <p:cNvSpPr/>
+          <p:nvPr/>
+        </p:nvSpPr>
+        <p:spPr>
+          <a:xfrm>
+            <a:off x="15" y="4915076"/>
+            <a:ext cx="12188825" cy="64008"/>
+          </a:xfrm>
+          <a:prstGeom prst="rect">
+            <a:avLst/>
+          </a:prstGeom>
+          <a:solidFill>
+            <a:schemeClr val="accent1"/>
+          </a:solidFill>
+          <a:ln>
+            <a:noFill/>
+          </a:ln>
+        </p:spPr>
+        <p:style>
+          <a:lnRef idx="2">
+            <a:schemeClr val="accent1">
+              <a:shade val="50000"/>
+            </a:schemeClr>
+          </a:lnRef>
+          <a:fillRef idx="1">
+            <a:schemeClr val="accent1"/>
+          </a:fillRef>
+          <a:effectRef idx="0">
+            <a:schemeClr val="accent1"/>
+          </a:effectRef>
+          <a:fontRef idx="minor">
+            <a:schemeClr val="lt1"/>
+          </a:fontRef>
+        </p:style>
+      </p:sp>
+      <p:sp>
+        <p:nvSpPr>
+          <p:cNvPr id="2" name="Title 1"/>
           <p:cNvSpPr>
             <a:spLocks noGrp="1"/>
           </p:cNvSpPr>
@@ -2487,15 +2820,21 @@
         </p:nvSpPr>
         <p:spPr>
           <a:xfrm>
-            <a:off x="839788" y="457200"/>
-            <a:ext cx="3932237" cy="1600200"/>
-          </a:xfrm>
-        </p:spPr>
-        <p:txBody>
-          <a:bodyPr anchor="b"/>
+            <a:off x="1097280" y="5074920"/>
+            <a:ext cx="10113264" cy="822960"/>
+          </a:xfrm>
+        </p:spPr>
+        <p:txBody>
+          <a:bodyPr lIns="91440" tIns="0" rIns="91440" bIns="0" anchor="b">
+            <a:noAutofit/>
+          </a:bodyPr>
           <a:lstStyle>
             <a:lvl1pPr>
-              <a:defRPr sz="3200"/>
+              <a:defRPr sz="3600" b="0">
+                <a:solidFill>
+                  <a:srgbClr val="FFFFFF"/>
+                </a:solidFill>
+              </a:defRPr>
             </a:lvl1pPr>
           </a:lstStyle>
           <a:p>
@@ -2503,20 +2842,15 @@
               <a:rPr lang="en-US"/>
               <a:t>Click to edit Master title style</a:t>
             </a:r>
-          </a:p>
-        </p:txBody>
-      </p:sp>
-      <p:sp>
-        <p:nvSpPr>
-          <p:cNvPr id="3" name="Picture Placeholder 2">
-            <a:extLst>
-              <a:ext uri="{FF2B5EF4-FFF2-40B4-BE49-F238E27FC236}">
-                <a16:creationId xmlns:a16="http://schemas.microsoft.com/office/drawing/2014/main" id="{F645A8F9-3EA1-702A-1B9F-7C9E9B374CA5}"/>
-              </a:ext>
-            </a:extLst>
-          </p:cNvPr>
-          <p:cNvSpPr>
-            <a:spLocks noGrp="1"/>
+            <a:endParaRPr lang="en-US" dirty="0"/>
+          </a:p>
+        </p:txBody>
+      </p:sp>
+      <p:sp>
+        <p:nvSpPr>
+          <p:cNvPr id="3" name="Picture Placeholder 2"/>
+          <p:cNvSpPr>
+            <a:spLocks noGrp="1" noChangeAspect="1"/>
           </p:cNvSpPr>
           <p:nvPr>
             <p:ph type="pic" idx="1"/>
@@ -2524,16 +2858,26 @@
         </p:nvSpPr>
         <p:spPr>
           <a:xfrm>
-            <a:off x="5183188" y="987425"/>
-            <a:ext cx="6172200" cy="4873625"/>
-          </a:xfrm>
-        </p:spPr>
-        <p:txBody>
-          <a:bodyPr/>
+            <a:off x="15" y="0"/>
+            <a:ext cx="12191985" cy="4915076"/>
+          </a:xfrm>
+          <a:blipFill>
+            <a:blip r:embed="rId2"/>
+            <a:stretch>
+              <a:fillRect/>
+            </a:stretch>
+          </a:blipFill>
+        </p:spPr>
+        <p:txBody>
+          <a:bodyPr lIns="457200" tIns="457200" anchor="t"/>
           <a:lstStyle>
             <a:lvl1pPr marL="0" indent="0">
               <a:buNone/>
-              <a:defRPr sz="3200"/>
+              <a:defRPr sz="3200">
+                <a:solidFill>
+                  <a:schemeClr val="bg1"/>
+                </a:solidFill>
+              </a:defRPr>
             </a:lvl1pPr>
             <a:lvl2pPr marL="457200" indent="0">
               <a:buNone/>
@@ -2569,19 +2913,17 @@
             </a:lvl9pPr>
           </a:lstStyle>
           <a:p>
-            <a:endParaRPr lang="en-US"/>
-          </a:p>
-        </p:txBody>
-      </p:sp>
-      <p:sp>
-        <p:nvSpPr>
-          <p:cNvPr id="4" name="Text Placeholder 3">
-            <a:extLst>
-              <a:ext uri="{FF2B5EF4-FFF2-40B4-BE49-F238E27FC236}">
-                <a16:creationId xmlns:a16="http://schemas.microsoft.com/office/drawing/2014/main" id="{21793610-C382-1BAB-847A-3122D5EDFEA2}"/>
-              </a:ext>
-            </a:extLst>
-          </p:cNvPr>
+            <a:r>
+              <a:rPr lang="en-US"/>
+              <a:t>Click icon to add picture</a:t>
+            </a:r>
+            <a:endParaRPr lang="en-US" dirty="0"/>
+          </a:p>
+        </p:txBody>
+      </p:sp>
+      <p:sp>
+        <p:nvSpPr>
+          <p:cNvPr id="4" name="Text Placeholder 3"/>
           <p:cNvSpPr>
             <a:spLocks noGrp="1"/>
           </p:cNvSpPr>
@@ -2591,48 +2933,60 @@
         </p:nvSpPr>
         <p:spPr>
           <a:xfrm>
-            <a:off x="839788" y="2057400"/>
-            <a:ext cx="3932237" cy="3811588"/>
-          </a:xfrm>
-        </p:spPr>
-        <p:txBody>
-          <a:bodyPr/>
+            <a:off x="1097280" y="5907023"/>
+            <a:ext cx="10113264" cy="594360"/>
+          </a:xfrm>
+        </p:spPr>
+        <p:txBody>
+          <a:bodyPr lIns="91440" tIns="0" rIns="91440" bIns="0">
+            <a:normAutofit/>
+          </a:bodyPr>
           <a:lstStyle>
             <a:lvl1pPr marL="0" indent="0">
+              <a:spcBef>
+                <a:spcPts val="0"/>
+              </a:spcBef>
+              <a:spcAft>
+                <a:spcPts val="600"/>
+              </a:spcAft>
               <a:buNone/>
-              <a:defRPr sz="1600"/>
+              <a:defRPr sz="1500">
+                <a:solidFill>
+                  <a:srgbClr val="FFFFFF"/>
+                </a:solidFill>
+              </a:defRPr>
             </a:lvl1pPr>
             <a:lvl2pPr marL="457200" indent="0">
               <a:buNone/>
-              <a:defRPr sz="1400"/>
+              <a:defRPr sz="1200"/>
             </a:lvl2pPr>
             <a:lvl3pPr marL="914400" indent="0">
               <a:buNone/>
-              <a:defRPr sz="1200"/>
+              <a:defRPr sz="1000"/>
             </a:lvl3pPr>
             <a:lvl4pPr marL="1371600" indent="0">
               <a:buNone/>
-              <a:defRPr sz="1000"/>
+              <a:defRPr sz="900"/>
             </a:lvl4pPr>
             <a:lvl5pPr marL="1828800" indent="0">
               <a:buNone/>
-              <a:defRPr sz="1000"/>
+              <a:defRPr sz="900"/>
             </a:lvl5pPr>
             <a:lvl6pPr marL="2286000" indent="0">
               <a:buNone/>
-              <a:defRPr sz="1000"/>
+              <a:defRPr sz="900"/>
             </a:lvl6pPr>
             <a:lvl7pPr marL="2743200" indent="0">
               <a:buNone/>
-              <a:defRPr sz="1000"/>
+              <a:defRPr sz="900"/>
             </a:lvl7pPr>
             <a:lvl8pPr marL="3200400" indent="0">
               <a:buNone/>
-              <a:defRPr sz="1000"/>
+              <a:defRPr sz="900"/>
             </a:lvl8pPr>
             <a:lvl9pPr marL="3657600" indent="0">
               <a:buNone/>
-              <a:defRPr sz="1000"/>
+              <a:defRPr sz="900"/>
             </a:lvl9pPr>
           </a:lstStyle>
           <a:p>
@@ -2646,13 +3000,7 @@
       </p:sp>
       <p:sp>
         <p:nvSpPr>
-          <p:cNvPr id="5" name="Date Placeholder 4">
-            <a:extLst>
-              <a:ext uri="{FF2B5EF4-FFF2-40B4-BE49-F238E27FC236}">
-                <a16:creationId xmlns:a16="http://schemas.microsoft.com/office/drawing/2014/main" id="{FD420A08-80B2-D143-6B3E-76119D47202F}"/>
-              </a:ext>
-            </a:extLst>
-          </p:cNvPr>
+          <p:cNvPr id="5" name="Date Placeholder 4"/>
           <p:cNvSpPr>
             <a:spLocks noGrp="1"/>
           </p:cNvSpPr>
@@ -2675,13 +3023,7 @@
       </p:sp>
       <p:sp>
         <p:nvSpPr>
-          <p:cNvPr id="6" name="Footer Placeholder 5">
-            <a:extLst>
-              <a:ext uri="{FF2B5EF4-FFF2-40B4-BE49-F238E27FC236}">
-                <a16:creationId xmlns:a16="http://schemas.microsoft.com/office/drawing/2014/main" id="{79B13CEA-2590-FBAA-A57A-0672997124BC}"/>
-              </a:ext>
-            </a:extLst>
-          </p:cNvPr>
+          <p:cNvPr id="6" name="Footer Placeholder 5"/>
           <p:cNvSpPr>
             <a:spLocks noGrp="1"/>
           </p:cNvSpPr>
@@ -2700,13 +3042,7 @@
       </p:sp>
       <p:sp>
         <p:nvSpPr>
-          <p:cNvPr id="7" name="Slide Number Placeholder 6">
-            <a:extLst>
-              <a:ext uri="{FF2B5EF4-FFF2-40B4-BE49-F238E27FC236}">
-                <a16:creationId xmlns:a16="http://schemas.microsoft.com/office/drawing/2014/main" id="{DF8992A3-C049-FF51-821C-15D68C8D3285}"/>
-              </a:ext>
-            </a:extLst>
-          </p:cNvPr>
+          <p:cNvPr id="7" name="Slide Number Placeholder 6"/>
           <p:cNvSpPr>
             <a:spLocks noGrp="1"/>
           </p:cNvSpPr>
@@ -2730,7 +3066,7 @@
     </p:spTree>
     <p:extLst>
       <p:ext uri="{BB962C8B-B14F-4D97-AF65-F5344CB8AC3E}">
-        <p14:creationId xmlns:p14="http://schemas.microsoft.com/office/powerpoint/2010/main" val="2951017491"/>
+        <p14:creationId xmlns:p14="http://schemas.microsoft.com/office/powerpoint/2010/main" val="167064209"/>
       </p:ext>
     </p:extLst>
   </p:cSld>
@@ -2764,143 +3100,201 @@
       </p:grpSpPr>
       <p:sp>
         <p:nvSpPr>
-          <p:cNvPr id="2" name="Title Placeholder 1">
-            <a:extLst>
-              <a:ext uri="{FF2B5EF4-FFF2-40B4-BE49-F238E27FC236}">
-                <a16:creationId xmlns:a16="http://schemas.microsoft.com/office/drawing/2014/main" id="{040942A4-2B4D-E458-28AA-61159C759D70}"/>
-              </a:ext>
-            </a:extLst>
-          </p:cNvPr>
-          <p:cNvSpPr>
-            <a:spLocks noGrp="1"/>
-          </p:cNvSpPr>
-          <p:nvPr>
-            <p:ph type="title"/>
-          </p:nvPr>
-        </p:nvSpPr>
-        <p:spPr>
-          <a:xfrm>
-            <a:off x="838200" y="365125"/>
-            <a:ext cx="10515600" cy="1325563"/>
+          <p:cNvPr id="7" name="Rectangle 6"/>
+          <p:cNvSpPr/>
+          <p:nvPr/>
+        </p:nvSpPr>
+        <p:spPr>
+          <a:xfrm>
+            <a:off x="1" y="6400800"/>
+            <a:ext cx="12192000" cy="457200"/>
           </a:xfrm>
           <a:prstGeom prst="rect">
             <a:avLst/>
           </a:prstGeom>
-        </p:spPr>
-        <p:txBody>
-          <a:bodyPr vert="horz" lIns="91440" tIns="45720" rIns="91440" bIns="45720" rtlCol="0" anchor="ctr">
-            <a:normAutofit/>
-          </a:bodyPr>
-          <a:lstStyle/>
-          <a:p>
-            <a:r>
-              <a:rPr lang="en-US"/>
-              <a:t>Click to edit Master title style</a:t>
-            </a:r>
-          </a:p>
-        </p:txBody>
-      </p:sp>
-      <p:sp>
-        <p:nvSpPr>
-          <p:cNvPr id="3" name="Text Placeholder 2">
-            <a:extLst>
-              <a:ext uri="{FF2B5EF4-FFF2-40B4-BE49-F238E27FC236}">
-                <a16:creationId xmlns:a16="http://schemas.microsoft.com/office/drawing/2014/main" id="{C524C739-E30F-BEBE-E01F-595A5CB272DA}"/>
-              </a:ext>
-            </a:extLst>
-          </p:cNvPr>
-          <p:cNvSpPr>
-            <a:spLocks noGrp="1"/>
-          </p:cNvSpPr>
-          <p:nvPr>
-            <p:ph type="body" idx="1"/>
-          </p:nvPr>
-        </p:nvSpPr>
-        <p:spPr>
-          <a:xfrm>
-            <a:off x="838200" y="1825625"/>
-            <a:ext cx="10515600" cy="4351338"/>
+          <a:solidFill>
+            <a:schemeClr val="accent2"/>
+          </a:solidFill>
+          <a:ln>
+            <a:noFill/>
+          </a:ln>
+        </p:spPr>
+        <p:style>
+          <a:lnRef idx="2">
+            <a:schemeClr val="accent1">
+              <a:shade val="50000"/>
+            </a:schemeClr>
+          </a:lnRef>
+          <a:fillRef idx="1">
+            <a:schemeClr val="accent1"/>
+          </a:fillRef>
+          <a:effectRef idx="0">
+            <a:schemeClr val="accent1"/>
+          </a:effectRef>
+          <a:fontRef idx="minor">
+            <a:schemeClr val="lt1"/>
+          </a:fontRef>
+        </p:style>
+      </p:sp>
+      <p:sp>
+        <p:nvSpPr>
+          <p:cNvPr id="9" name="Rectangle 8"/>
+          <p:cNvSpPr/>
+          <p:nvPr/>
+        </p:nvSpPr>
+        <p:spPr>
+          <a:xfrm>
+            <a:off x="0" y="6334316"/>
+            <a:ext cx="12192001" cy="65998"/>
           </a:xfrm>
           <a:prstGeom prst="rect">
             <a:avLst/>
           </a:prstGeom>
-        </p:spPr>
-        <p:txBody>
-          <a:bodyPr vert="horz" lIns="91440" tIns="45720" rIns="91440" bIns="45720" rtlCol="0">
-            <a:normAutofit/>
-          </a:bodyPr>
-          <a:lstStyle/>
-          <a:p>
-            <a:pPr lvl="0"/>
-            <a:r>
-              <a:rPr lang="en-US"/>
-              <a:t>Click to edit Master text styles</a:t>
-            </a:r>
-          </a:p>
-          <a:p>
-            <a:pPr lvl="1"/>
-            <a:r>
-              <a:rPr lang="en-US"/>
-              <a:t>Second level</a:t>
-            </a:r>
-          </a:p>
-          <a:p>
-            <a:pPr lvl="2"/>
-            <a:r>
-              <a:rPr lang="en-US"/>
-              <a:t>Third level</a:t>
-            </a:r>
-          </a:p>
-          <a:p>
-            <a:pPr lvl="3"/>
-            <a:r>
-              <a:rPr lang="en-US"/>
-              <a:t>Fourth level</a:t>
-            </a:r>
-          </a:p>
-          <a:p>
-            <a:pPr lvl="4"/>
-            <a:r>
-              <a:rPr lang="en-US"/>
-              <a:t>Fifth level</a:t>
-            </a:r>
-          </a:p>
-        </p:txBody>
-      </p:sp>
-      <p:sp>
-        <p:nvSpPr>
-          <p:cNvPr id="4" name="Date Placeholder 3">
-            <a:extLst>
-              <a:ext uri="{FF2B5EF4-FFF2-40B4-BE49-F238E27FC236}">
-                <a16:creationId xmlns:a16="http://schemas.microsoft.com/office/drawing/2014/main" id="{6D6C2A35-3793-66A3-CE3C-7E5F00F0356C}"/>
-              </a:ext>
-            </a:extLst>
-          </p:cNvPr>
-          <p:cNvSpPr>
-            <a:spLocks noGrp="1"/>
-          </p:cNvSpPr>
-          <p:nvPr>
-            <p:ph type="dt" sz="half" idx="2"/>
-          </p:nvPr>
-        </p:nvSpPr>
-        <p:spPr>
-          <a:xfrm>
-            <a:off x="838200" y="6356350"/>
-            <a:ext cx="2743200" cy="365125"/>
+          <a:solidFill>
+            <a:schemeClr val="accent1"/>
+          </a:solidFill>
+          <a:ln>
+            <a:noFill/>
+          </a:ln>
+        </p:spPr>
+        <p:style>
+          <a:lnRef idx="2">
+            <a:schemeClr val="accent1">
+              <a:shade val="50000"/>
+            </a:schemeClr>
+          </a:lnRef>
+          <a:fillRef idx="1">
+            <a:schemeClr val="accent1"/>
+          </a:fillRef>
+          <a:effectRef idx="0">
+            <a:schemeClr val="accent1"/>
+          </a:effectRef>
+          <a:fontRef idx="minor">
+            <a:schemeClr val="lt1"/>
+          </a:fontRef>
+        </p:style>
+      </p:sp>
+      <p:sp>
+        <p:nvSpPr>
+          <p:cNvPr id="2" name="Title Placeholder 1"/>
+          <p:cNvSpPr>
+            <a:spLocks noGrp="1"/>
+          </p:cNvSpPr>
+          <p:nvPr>
+            <p:ph type="title"/>
+          </p:nvPr>
+        </p:nvSpPr>
+        <p:spPr>
+          <a:xfrm>
+            <a:off x="1097280" y="286603"/>
+            <a:ext cx="10058400" cy="1450757"/>
           </a:xfrm>
           <a:prstGeom prst="rect">
             <a:avLst/>
           </a:prstGeom>
         </p:spPr>
         <p:txBody>
+          <a:bodyPr vert="horz" lIns="91440" tIns="45720" rIns="91440" bIns="45720" rtlCol="0" anchor="b">
+            <a:normAutofit/>
+          </a:bodyPr>
+          <a:lstStyle/>
+          <a:p>
+            <a:r>
+              <a:rPr lang="en-US"/>
+              <a:t>Click to edit Master title style</a:t>
+            </a:r>
+            <a:endParaRPr lang="en-US" dirty="0"/>
+          </a:p>
+        </p:txBody>
+      </p:sp>
+      <p:sp>
+        <p:nvSpPr>
+          <p:cNvPr id="3" name="Text Placeholder 2"/>
+          <p:cNvSpPr>
+            <a:spLocks noGrp="1"/>
+          </p:cNvSpPr>
+          <p:nvPr>
+            <p:ph type="body" idx="1"/>
+          </p:nvPr>
+        </p:nvSpPr>
+        <p:spPr>
+          <a:xfrm>
+            <a:off x="1097280" y="1845734"/>
+            <a:ext cx="10058400" cy="4023360"/>
+          </a:xfrm>
+          <a:prstGeom prst="rect">
+            <a:avLst/>
+          </a:prstGeom>
+        </p:spPr>
+        <p:txBody>
+          <a:bodyPr vert="horz" lIns="0" tIns="45720" rIns="0" bIns="45720" rtlCol="0">
+            <a:normAutofit/>
+          </a:bodyPr>
+          <a:lstStyle/>
+          <a:p>
+            <a:pPr lvl="0"/>
+            <a:r>
+              <a:rPr lang="en-US"/>
+              <a:t>Click to edit Master text styles</a:t>
+            </a:r>
+          </a:p>
+          <a:p>
+            <a:pPr lvl="1"/>
+            <a:r>
+              <a:rPr lang="en-US"/>
+              <a:t>Second level</a:t>
+            </a:r>
+          </a:p>
+          <a:p>
+            <a:pPr lvl="2"/>
+            <a:r>
+              <a:rPr lang="en-US"/>
+              <a:t>Third level</a:t>
+            </a:r>
+          </a:p>
+          <a:p>
+            <a:pPr lvl="3"/>
+            <a:r>
+              <a:rPr lang="en-US"/>
+              <a:t>Fourth level</a:t>
+            </a:r>
+          </a:p>
+          <a:p>
+            <a:pPr lvl="4"/>
+            <a:r>
+              <a:rPr lang="en-US"/>
+              <a:t>Fifth level</a:t>
+            </a:r>
+            <a:endParaRPr lang="en-US" dirty="0"/>
+          </a:p>
+        </p:txBody>
+      </p:sp>
+      <p:sp>
+        <p:nvSpPr>
+          <p:cNvPr id="4" name="Date Placeholder 3"/>
+          <p:cNvSpPr>
+            <a:spLocks noGrp="1"/>
+          </p:cNvSpPr>
+          <p:nvPr>
+            <p:ph type="dt" sz="half" idx="2"/>
+          </p:nvPr>
+        </p:nvSpPr>
+        <p:spPr>
+          <a:xfrm>
+            <a:off x="1097280" y="6459785"/>
+            <a:ext cx="2472271" cy="365125"/>
+          </a:xfrm>
+          <a:prstGeom prst="rect">
+            <a:avLst/>
+          </a:prstGeom>
+        </p:spPr>
+        <p:txBody>
           <a:bodyPr vert="horz" lIns="91440" tIns="45720" rIns="91440" bIns="45720" rtlCol="0" anchor="ctr"/>
           <a:lstStyle>
             <a:lvl1pPr algn="l">
-              <a:defRPr sz="1200">
-                <a:solidFill>
-                  <a:schemeClr val="tx1">
-                    <a:tint val="82000"/>
-                  </a:schemeClr>
+              <a:defRPr sz="900">
+                <a:solidFill>
+                  <a:srgbClr val="FFFFFF"/>
                 </a:solidFill>
               </a:defRPr>
             </a:lvl1pPr>
@@ -2916,13 +3310,7 @@
       </p:sp>
       <p:sp>
         <p:nvSpPr>
-          <p:cNvPr id="5" name="Footer Placeholder 4">
-            <a:extLst>
-              <a:ext uri="{FF2B5EF4-FFF2-40B4-BE49-F238E27FC236}">
-                <a16:creationId xmlns:a16="http://schemas.microsoft.com/office/drawing/2014/main" id="{A8D0B525-058F-DFEA-6202-6F867454D14C}"/>
-              </a:ext>
-            </a:extLst>
-          </p:cNvPr>
+          <p:cNvPr id="5" name="Footer Placeholder 4"/>
           <p:cNvSpPr>
             <a:spLocks noGrp="1"/>
           </p:cNvSpPr>
@@ -2932,8 +3320,8 @@
         </p:nvSpPr>
         <p:spPr>
           <a:xfrm>
-            <a:off x="4038600" y="6356350"/>
-            <a:ext cx="4114800" cy="365125"/>
+            <a:off x="3686185" y="6459785"/>
+            <a:ext cx="4822804" cy="365125"/>
           </a:xfrm>
           <a:prstGeom prst="rect">
             <a:avLst/>
@@ -2943,11 +3331,9 @@
           <a:bodyPr vert="horz" lIns="91440" tIns="45720" rIns="91440" bIns="45720" rtlCol="0" anchor="ctr"/>
           <a:lstStyle>
             <a:lvl1pPr algn="ctr">
-              <a:defRPr sz="1200">
-                <a:solidFill>
-                  <a:schemeClr val="tx1">
-                    <a:tint val="82000"/>
-                  </a:schemeClr>
+              <a:defRPr sz="900" cap="all" baseline="0">
+                <a:solidFill>
+                  <a:srgbClr val="FFFFFF"/>
                 </a:solidFill>
               </a:defRPr>
             </a:lvl1pPr>
@@ -2959,13 +3345,7 @@
       </p:sp>
       <p:sp>
         <p:nvSpPr>
-          <p:cNvPr id="6" name="Slide Number Placeholder 5">
-            <a:extLst>
-              <a:ext uri="{FF2B5EF4-FFF2-40B4-BE49-F238E27FC236}">
-                <a16:creationId xmlns:a16="http://schemas.microsoft.com/office/drawing/2014/main" id="{D051FA10-4626-8320-B15D-33760A7576E5}"/>
-              </a:ext>
-            </a:extLst>
-          </p:cNvPr>
+          <p:cNvPr id="6" name="Slide Number Placeholder 5"/>
           <p:cNvSpPr>
             <a:spLocks noGrp="1"/>
           </p:cNvSpPr>
@@ -2975,8 +3355,8 @@
         </p:nvSpPr>
         <p:spPr>
           <a:xfrm>
-            <a:off x="8610600" y="6356350"/>
-            <a:ext cx="2743200" cy="365125"/>
+            <a:off x="9900458" y="6459785"/>
+            <a:ext cx="1312025" cy="365125"/>
           </a:xfrm>
           <a:prstGeom prst="rect">
             <a:avLst/>
@@ -2986,11 +3366,9 @@
           <a:bodyPr vert="horz" lIns="91440" tIns="45720" rIns="91440" bIns="45720" rtlCol="0" anchor="ctr"/>
           <a:lstStyle>
             <a:lvl1pPr algn="r">
-              <a:defRPr sz="1200">
-                <a:solidFill>
-                  <a:schemeClr val="tx1">
-                    <a:tint val="82000"/>
-                  </a:schemeClr>
+              <a:defRPr sz="1050">
+                <a:solidFill>
+                  <a:srgbClr val="FFFFFF"/>
                 </a:solidFill>
               </a:defRPr>
             </a:lvl1pPr>
@@ -3004,40 +3382,81 @@
           </a:p>
         </p:txBody>
       </p:sp>
+      <p:cxnSp>
+        <p:nvCxnSpPr>
+          <p:cNvPr id="10" name="Straight Connector 9"/>
+          <p:cNvCxnSpPr/>
+          <p:nvPr/>
+        </p:nvCxnSpPr>
+        <p:spPr>
+          <a:xfrm>
+            <a:off x="1193532" y="1737845"/>
+            <a:ext cx="9966960" cy="0"/>
+          </a:xfrm>
+          <a:prstGeom prst="line">
+            <a:avLst/>
+          </a:prstGeom>
+          <a:ln w="6350">
+            <a:solidFill>
+              <a:schemeClr val="tx1">
+                <a:lumMod val="50000"/>
+                <a:lumOff val="50000"/>
+              </a:schemeClr>
+            </a:solidFill>
+          </a:ln>
+        </p:spPr>
+        <p:style>
+          <a:lnRef idx="1">
+            <a:schemeClr val="accent1"/>
+          </a:lnRef>
+          <a:fillRef idx="0">
+            <a:schemeClr val="accent1"/>
+          </a:fillRef>
+          <a:effectRef idx="0">
+            <a:schemeClr val="accent1"/>
+          </a:effectRef>
+          <a:fontRef idx="minor">
+            <a:schemeClr val="tx1"/>
+          </a:fontRef>
+        </p:style>
+      </p:cxnSp>
     </p:spTree>
     <p:extLst>
       <p:ext uri="{BB962C8B-B14F-4D97-AF65-F5344CB8AC3E}">
-        <p14:creationId xmlns:p14="http://schemas.microsoft.com/office/powerpoint/2010/main" val="3851044323"/>
+        <p14:creationId xmlns:p14="http://schemas.microsoft.com/office/powerpoint/2010/main" val="1859008488"/>
       </p:ext>
     </p:extLst>
   </p:cSld>
   <p:clrMap bg1="lt1" tx1="dk1" bg2="lt2" tx2="dk2" accent1="accent1" accent2="accent2" accent3="accent3" accent4="accent4" accent5="accent5" accent6="accent6" hlink="hlink" folHlink="folHlink"/>
   <p:sldLayoutIdLst>
-    <p:sldLayoutId id="2147483649" r:id="rId1"/>
-    <p:sldLayoutId id="2147483650" r:id="rId2"/>
-    <p:sldLayoutId id="2147483651" r:id="rId3"/>
-    <p:sldLayoutId id="2147483652" r:id="rId4"/>
-    <p:sldLayoutId id="2147483653" r:id="rId5"/>
-    <p:sldLayoutId id="2147483654" r:id="rId6"/>
-    <p:sldLayoutId id="2147483655" r:id="rId7"/>
-    <p:sldLayoutId id="2147483656" r:id="rId8"/>
-    <p:sldLayoutId id="2147483657" r:id="rId9"/>
-    <p:sldLayoutId id="2147483658" r:id="rId10"/>
-    <p:sldLayoutId id="2147483659" r:id="rId11"/>
+    <p:sldLayoutId id="2147483661" r:id="rId1"/>
+    <p:sldLayoutId id="2147483662" r:id="rId2"/>
+    <p:sldLayoutId id="2147483663" r:id="rId3"/>
+    <p:sldLayoutId id="2147483664" r:id="rId4"/>
+    <p:sldLayoutId id="2147483665" r:id="rId5"/>
+    <p:sldLayoutId id="2147483666" r:id="rId6"/>
+    <p:sldLayoutId id="2147483667" r:id="rId7"/>
+    <p:sldLayoutId id="2147483668" r:id="rId8"/>
+    <p:sldLayoutId id="2147483669" r:id="rId9"/>
+    <p:sldLayoutId id="2147483670" r:id="rId10"/>
+    <p:sldLayoutId id="2147483671" r:id="rId11"/>
   </p:sldLayoutIdLst>
   <p:txStyles>
     <p:titleStyle>
       <a:lvl1pPr algn="l" defTabSz="914400" rtl="0" eaLnBrk="1" latinLnBrk="0" hangingPunct="1">
         <a:lnSpc>
-          <a:spcPct val="90000"/>
+          <a:spcPct val="85000"/>
         </a:lnSpc>
         <a:spcBef>
           <a:spcPct val="0"/>
         </a:spcBef>
         <a:buNone/>
-        <a:defRPr sz="4400" kern="1200">
+        <a:defRPr sz="4800" kern="1200" spc="-50" baseline="0">
           <a:solidFill>
-            <a:schemeClr val="tx1"/>
+            <a:schemeClr val="tx1">
+              <a:lumMod val="75000"/>
+              <a:lumOff val="25000"/>
+            </a:schemeClr>
           </a:solidFill>
           <a:latin typeface="+mj-lt"/>
           <a:ea typeface="+mj-ea"/>
@@ -3046,162 +3465,244 @@
       </a:lvl1pPr>
     </p:titleStyle>
     <p:bodyStyle>
-      <a:lvl1pPr marL="228600" indent="-228600" algn="l" defTabSz="914400" rtl="0" eaLnBrk="1" latinLnBrk="0" hangingPunct="1">
+      <a:lvl1pPr marL="91440" indent="-91440" algn="l" defTabSz="914400" rtl="0" eaLnBrk="1" latinLnBrk="0" hangingPunct="1">
         <a:lnSpc>
           <a:spcPct val="90000"/>
         </a:lnSpc>
         <a:spcBef>
-          <a:spcPts val="1000"/>
+          <a:spcPts val="1200"/>
         </a:spcBef>
-        <a:buFont typeface="Arial" panose="020B0604020202020204" pitchFamily="34" charset="0"/>
-        <a:buChar char="•"/>
-        <a:defRPr sz="2800" kern="1200">
+        <a:spcAft>
+          <a:spcPts val="200"/>
+        </a:spcAft>
+        <a:buClr>
+          <a:schemeClr val="accent1"/>
+        </a:buClr>
+        <a:buSzPct val="100000"/>
+        <a:buFont typeface="Calibri" panose="020F0502020204030204" pitchFamily="34" charset="0"/>
+        <a:buChar char=" "/>
+        <a:defRPr sz="2000" kern="1200">
           <a:solidFill>
-            <a:schemeClr val="tx1"/>
+            <a:schemeClr val="tx1">
+              <a:lumMod val="75000"/>
+              <a:lumOff val="25000"/>
+            </a:schemeClr>
           </a:solidFill>
           <a:latin typeface="+mn-lt"/>
           <a:ea typeface="+mn-ea"/>
           <a:cs typeface="+mn-cs"/>
         </a:defRPr>
       </a:lvl1pPr>
-      <a:lvl2pPr marL="685800" indent="-228600" algn="l" defTabSz="914400" rtl="0" eaLnBrk="1" latinLnBrk="0" hangingPunct="1">
+      <a:lvl2pPr marL="384048" indent="-182880" algn="l" defTabSz="914400" rtl="0" eaLnBrk="1" latinLnBrk="0" hangingPunct="1">
         <a:lnSpc>
           <a:spcPct val="90000"/>
         </a:lnSpc>
         <a:spcBef>
-          <a:spcPts val="500"/>
+          <a:spcPts val="200"/>
         </a:spcBef>
-        <a:buFont typeface="Arial" panose="020B0604020202020204" pitchFamily="34" charset="0"/>
-        <a:buChar char="•"/>
-        <a:defRPr sz="2400" kern="1200">
+        <a:spcAft>
+          <a:spcPts val="400"/>
+        </a:spcAft>
+        <a:buClr>
+          <a:schemeClr val="accent1"/>
+        </a:buClr>
+        <a:buFont typeface="Calibri" pitchFamily="34" charset="0"/>
+        <a:buChar char="◦"/>
+        <a:defRPr sz="1800" kern="1200">
           <a:solidFill>
-            <a:schemeClr val="tx1"/>
+            <a:schemeClr val="tx1">
+              <a:lumMod val="75000"/>
+              <a:lumOff val="25000"/>
+            </a:schemeClr>
           </a:solidFill>
           <a:latin typeface="+mn-lt"/>
           <a:ea typeface="+mn-ea"/>
           <a:cs typeface="+mn-cs"/>
         </a:defRPr>
       </a:lvl2pPr>
-      <a:lvl3pPr marL="1143000" indent="-228600" algn="l" defTabSz="914400" rtl="0" eaLnBrk="1" latinLnBrk="0" hangingPunct="1">
+      <a:lvl3pPr marL="566928" indent="-182880" algn="l" defTabSz="914400" rtl="0" eaLnBrk="1" latinLnBrk="0" hangingPunct="1">
         <a:lnSpc>
           <a:spcPct val="90000"/>
         </a:lnSpc>
         <a:spcBef>
-          <a:spcPts val="500"/>
+          <a:spcPts val="200"/>
         </a:spcBef>
-        <a:buFont typeface="Arial" panose="020B0604020202020204" pitchFamily="34" charset="0"/>
-        <a:buChar char="•"/>
-        <a:defRPr sz="2000" kern="1200">
+        <a:spcAft>
+          <a:spcPts val="400"/>
+        </a:spcAft>
+        <a:buClr>
+          <a:schemeClr val="accent1"/>
+        </a:buClr>
+        <a:buFont typeface="Calibri" pitchFamily="34" charset="0"/>
+        <a:buChar char="◦"/>
+        <a:defRPr sz="1400" kern="1200">
           <a:solidFill>
-            <a:schemeClr val="tx1"/>
+            <a:schemeClr val="tx1">
+              <a:lumMod val="75000"/>
+              <a:lumOff val="25000"/>
+            </a:schemeClr>
           </a:solidFill>
           <a:latin typeface="+mn-lt"/>
           <a:ea typeface="+mn-ea"/>
           <a:cs typeface="+mn-cs"/>
         </a:defRPr>
       </a:lvl3pPr>
-      <a:lvl4pPr marL="1600200" indent="-228600" algn="l" defTabSz="914400" rtl="0" eaLnBrk="1" latinLnBrk="0" hangingPunct="1">
+      <a:lvl4pPr marL="749808" indent="-182880" algn="l" defTabSz="914400" rtl="0" eaLnBrk="1" latinLnBrk="0" hangingPunct="1">
         <a:lnSpc>
           <a:spcPct val="90000"/>
         </a:lnSpc>
         <a:spcBef>
-          <a:spcPts val="500"/>
+          <a:spcPts val="200"/>
         </a:spcBef>
-        <a:buFont typeface="Arial" panose="020B0604020202020204" pitchFamily="34" charset="0"/>
-        <a:buChar char="•"/>
-        <a:defRPr sz="1800" kern="1200">
+        <a:spcAft>
+          <a:spcPts val="400"/>
+        </a:spcAft>
+        <a:buClr>
+          <a:schemeClr val="accent1"/>
+        </a:buClr>
+        <a:buFont typeface="Calibri" pitchFamily="34" charset="0"/>
+        <a:buChar char="◦"/>
+        <a:defRPr sz="1400" kern="1200">
           <a:solidFill>
-            <a:schemeClr val="tx1"/>
+            <a:schemeClr val="tx1">
+              <a:lumMod val="75000"/>
+              <a:lumOff val="25000"/>
+            </a:schemeClr>
           </a:solidFill>
           <a:latin typeface="+mn-lt"/>
           <a:ea typeface="+mn-ea"/>
           <a:cs typeface="+mn-cs"/>
         </a:defRPr>
       </a:lvl4pPr>
-      <a:lvl5pPr marL="2057400" indent="-228600" algn="l" defTabSz="914400" rtl="0" eaLnBrk="1" latinLnBrk="0" hangingPunct="1">
+      <a:lvl5pPr marL="932688" indent="-182880" algn="l" defTabSz="914400" rtl="0" eaLnBrk="1" latinLnBrk="0" hangingPunct="1">
         <a:lnSpc>
           <a:spcPct val="90000"/>
         </a:lnSpc>
         <a:spcBef>
-          <a:spcPts val="500"/>
+          <a:spcPts val="200"/>
         </a:spcBef>
-        <a:buFont typeface="Arial" panose="020B0604020202020204" pitchFamily="34" charset="0"/>
-        <a:buChar char="•"/>
-        <a:defRPr sz="1800" kern="1200">
+        <a:spcAft>
+          <a:spcPts val="400"/>
+        </a:spcAft>
+        <a:buClr>
+          <a:schemeClr val="accent1"/>
+        </a:buClr>
+        <a:buFont typeface="Calibri" pitchFamily="34" charset="0"/>
+        <a:buChar char="◦"/>
+        <a:defRPr sz="1400" kern="1200">
           <a:solidFill>
-            <a:schemeClr val="tx1"/>
+            <a:schemeClr val="tx1">
+              <a:lumMod val="75000"/>
+              <a:lumOff val="25000"/>
+            </a:schemeClr>
           </a:solidFill>
           <a:latin typeface="+mn-lt"/>
           <a:ea typeface="+mn-ea"/>
           <a:cs typeface="+mn-cs"/>
         </a:defRPr>
       </a:lvl5pPr>
-      <a:lvl6pPr marL="2514600" indent="-228600" algn="l" defTabSz="914400" rtl="0" eaLnBrk="1" latinLnBrk="0" hangingPunct="1">
+      <a:lvl6pPr marL="1100000" indent="-228600" algn="l" defTabSz="914400" rtl="0" eaLnBrk="1" latinLnBrk="0" hangingPunct="1">
         <a:lnSpc>
           <a:spcPct val="90000"/>
         </a:lnSpc>
         <a:spcBef>
-          <a:spcPts val="500"/>
+          <a:spcPts val="200"/>
         </a:spcBef>
-        <a:buFont typeface="Arial" panose="020B0604020202020204" pitchFamily="34" charset="0"/>
-        <a:buChar char="•"/>
-        <a:defRPr sz="1800" kern="1200">
+        <a:spcAft>
+          <a:spcPts val="400"/>
+        </a:spcAft>
+        <a:buClr>
+          <a:schemeClr val="accent1"/>
+        </a:buClr>
+        <a:buFont typeface="Calibri" pitchFamily="34" charset="0"/>
+        <a:buChar char="◦"/>
+        <a:defRPr sz="1400" kern="1200">
           <a:solidFill>
-            <a:schemeClr val="tx1"/>
+            <a:schemeClr val="tx1">
+              <a:lumMod val="75000"/>
+              <a:lumOff val="25000"/>
+            </a:schemeClr>
           </a:solidFill>
           <a:latin typeface="+mn-lt"/>
           <a:ea typeface="+mn-ea"/>
           <a:cs typeface="+mn-cs"/>
         </a:defRPr>
       </a:lvl6pPr>
-      <a:lvl7pPr marL="2971800" indent="-228600" algn="l" defTabSz="914400" rtl="0" eaLnBrk="1" latinLnBrk="0" hangingPunct="1">
+      <a:lvl7pPr marL="1300000" indent="-228600" algn="l" defTabSz="914400" rtl="0" eaLnBrk="1" latinLnBrk="0" hangingPunct="1">
         <a:lnSpc>
           <a:spcPct val="90000"/>
         </a:lnSpc>
         <a:spcBef>
-          <a:spcPts val="500"/>
+          <a:spcPts val="200"/>
         </a:spcBef>
-        <a:buFont typeface="Arial" panose="020B0604020202020204" pitchFamily="34" charset="0"/>
-        <a:buChar char="•"/>
-        <a:defRPr sz="1800" kern="1200">
+        <a:spcAft>
+          <a:spcPts val="400"/>
+        </a:spcAft>
+        <a:buClr>
+          <a:schemeClr val="accent1"/>
+        </a:buClr>
+        <a:buFont typeface="Calibri" pitchFamily="34" charset="0"/>
+        <a:buChar char="◦"/>
+        <a:defRPr sz="1400" kern="1200">
           <a:solidFill>
-            <a:schemeClr val="tx1"/>
+            <a:schemeClr val="tx1">
+              <a:lumMod val="75000"/>
+              <a:lumOff val="25000"/>
+            </a:schemeClr>
           </a:solidFill>
           <a:latin typeface="+mn-lt"/>
           <a:ea typeface="+mn-ea"/>
           <a:cs typeface="+mn-cs"/>
         </a:defRPr>
       </a:lvl7pPr>
-      <a:lvl8pPr marL="3429000" indent="-228600" algn="l" defTabSz="914400" rtl="0" eaLnBrk="1" latinLnBrk="0" hangingPunct="1">
+      <a:lvl8pPr marL="1500000" indent="-228600" algn="l" defTabSz="914400" rtl="0" eaLnBrk="1" latinLnBrk="0" hangingPunct="1">
         <a:lnSpc>
           <a:spcPct val="90000"/>
         </a:lnSpc>
         <a:spcBef>
-          <a:spcPts val="500"/>
+          <a:spcPts val="200"/>
         </a:spcBef>
-        <a:buFont typeface="Arial" panose="020B0604020202020204" pitchFamily="34" charset="0"/>
-        <a:buChar char="•"/>
-        <a:defRPr sz="1800" kern="1200">
+        <a:spcAft>
+          <a:spcPts val="400"/>
+        </a:spcAft>
+        <a:buClr>
+          <a:schemeClr val="accent1"/>
+        </a:buClr>
+        <a:buFont typeface="Calibri" pitchFamily="34" charset="0"/>
+        <a:buChar char="◦"/>
+        <a:defRPr sz="1400" kern="1200">
           <a:solidFill>
-            <a:schemeClr val="tx1"/>
+            <a:schemeClr val="tx1">
+              <a:lumMod val="75000"/>
+              <a:lumOff val="25000"/>
+            </a:schemeClr>
           </a:solidFill>
           <a:latin typeface="+mn-lt"/>
           <a:ea typeface="+mn-ea"/>
           <a:cs typeface="+mn-cs"/>
         </a:defRPr>
       </a:lvl8pPr>
-      <a:lvl9pPr marL="3886200" indent="-228600" algn="l" defTabSz="914400" rtl="0" eaLnBrk="1" latinLnBrk="0" hangingPunct="1">
+      <a:lvl9pPr marL="1700000" indent="-228600" algn="l" defTabSz="914400" rtl="0" eaLnBrk="1" latinLnBrk="0" hangingPunct="1">
         <a:lnSpc>
           <a:spcPct val="90000"/>
         </a:lnSpc>
         <a:spcBef>
-          <a:spcPts val="500"/>
+          <a:spcPts val="200"/>
         </a:spcBef>
-        <a:buFont typeface="Arial" panose="020B0604020202020204" pitchFamily="34" charset="0"/>
-        <a:buChar char="•"/>
-        <a:defRPr sz="1800" kern="1200">
+        <a:spcAft>
+          <a:spcPts val="400"/>
+        </a:spcAft>
+        <a:buClr>
+          <a:schemeClr val="accent1"/>
+        </a:buClr>
+        <a:buFont typeface="Calibri" pitchFamily="34" charset="0"/>
+        <a:buChar char="◦"/>
+        <a:defRPr sz="1400" kern="1200">
           <a:solidFill>
-            <a:schemeClr val="tx1"/>
+            <a:schemeClr val="tx1">
+              <a:lumMod val="75000"/>
+              <a:lumOff val="25000"/>
+            </a:schemeClr>
           </a:solidFill>
           <a:latin typeface="+mn-lt"/>
           <a:ea typeface="+mn-ea"/>
@@ -3341,12 +3842,22 @@
             <p:ph type="ctrTitle"/>
           </p:nvPr>
         </p:nvSpPr>
-        <p:spPr/>
-        <p:txBody>
-          <a:bodyPr/>
-          <a:lstStyle/>
-          <a:p>
-            <a:endParaRPr lang="en-US"/>
+        <p:spPr>
+          <a:xfrm>
+            <a:off x="1384479" y="1135241"/>
+            <a:ext cx="9423042" cy="2387600"/>
+          </a:xfrm>
+        </p:spPr>
+        <p:txBody>
+          <a:bodyPr>
+            <a:normAutofit/>
+          </a:bodyPr>
+          <a:lstStyle/>
+          <a:p>
+            <a:r>
+              <a:rPr lang="en-US" sz="6000" dirty="0"/>
+              <a:t>Tennessee Opioid Use Trends</a:t>
+            </a:r>
           </a:p>
         </p:txBody>
       </p:sp>
@@ -3371,7 +3882,10 @@
           <a:bodyPr/>
           <a:lstStyle/>
           <a:p>
-            <a:endParaRPr lang="en-US"/>
+            <a:r>
+              <a:rPr lang="en-US" dirty="0"/>
+              <a:t>Team Atlantis</a:t>
+            </a:r>
           </a:p>
         </p:txBody>
       </p:sp>
@@ -3388,7 +3902,576 @@
 </p:sld>
 </file>
 
-<file path=ppt/slides/slide2.xml><?xml version="1.0" encoding="utf-8"?>
+<file path=ppt/slides/slide10.xml><?xml version="1.0" encoding="utf-8"?>
+<p:sld xmlns:a="http://schemas.openxmlformats.org/drawingml/2006/main" xmlns:r="http://schemas.openxmlformats.org/officeDocument/2006/relationships" xmlns:p="http://schemas.openxmlformats.org/presentationml/2006/main">
+  <p:cSld>
+    <p:spTree>
+      <p:nvGrpSpPr>
+        <p:cNvPr id="1" name=""/>
+        <p:cNvGrpSpPr/>
+        <p:nvPr/>
+      </p:nvGrpSpPr>
+      <p:grpSpPr>
+        <a:xfrm>
+          <a:off x="0" y="0"/>
+          <a:ext cx="0" cy="0"/>
+          <a:chOff x="0" y="0"/>
+          <a:chExt cx="0" cy="0"/>
+        </a:xfrm>
+      </p:grpSpPr>
+      <p:sp>
+        <p:nvSpPr>
+          <p:cNvPr id="2" name="Title 1">
+            <a:extLst>
+              <a:ext uri="{FF2B5EF4-FFF2-40B4-BE49-F238E27FC236}">
+                <a16:creationId xmlns:a16="http://schemas.microsoft.com/office/drawing/2014/main" id="{615AE09E-C940-2027-0667-0976FDF15CF2}"/>
+              </a:ext>
+            </a:extLst>
+          </p:cNvPr>
+          <p:cNvSpPr>
+            <a:spLocks noGrp="1"/>
+          </p:cNvSpPr>
+          <p:nvPr>
+            <p:ph type="title"/>
+          </p:nvPr>
+        </p:nvSpPr>
+        <p:spPr/>
+        <p:txBody>
+          <a:bodyPr/>
+          <a:lstStyle/>
+          <a:p>
+            <a:r>
+              <a:rPr lang="en-US" dirty="0"/>
+              <a:t>Spending Overall Per Capita</a:t>
+            </a:r>
+          </a:p>
+        </p:txBody>
+      </p:sp>
+      <p:pic>
+        <p:nvPicPr>
+          <p:cNvPr id="4" name="Picture 3">
+            <a:extLst>
+              <a:ext uri="{FF2B5EF4-FFF2-40B4-BE49-F238E27FC236}">
+                <a16:creationId xmlns:a16="http://schemas.microsoft.com/office/drawing/2014/main" id="{8D75F5B1-00C7-7CCF-CA62-166EF198F83A}"/>
+              </a:ext>
+            </a:extLst>
+          </p:cNvPr>
+          <p:cNvPicPr>
+            <a:picLocks noChangeAspect="1"/>
+          </p:cNvPicPr>
+          <p:nvPr/>
+        </p:nvPicPr>
+        <p:blipFill>
+          <a:blip r:embed="rId2"/>
+          <a:srcRect t="7910"/>
+          <a:stretch>
+            <a:fillRect/>
+          </a:stretch>
+        </p:blipFill>
+        <p:spPr>
+          <a:xfrm>
+            <a:off x="5289583" y="2971865"/>
+            <a:ext cx="6253017" cy="3287267"/>
+          </a:xfrm>
+          <a:prstGeom prst="rect">
+            <a:avLst/>
+          </a:prstGeom>
+        </p:spPr>
+      </p:pic>
+      <p:sp>
+        <p:nvSpPr>
+          <p:cNvPr id="5" name="TextBox 4">
+            <a:extLst>
+              <a:ext uri="{FF2B5EF4-FFF2-40B4-BE49-F238E27FC236}">
+                <a16:creationId xmlns:a16="http://schemas.microsoft.com/office/drawing/2014/main" id="{D9D62737-832F-A45E-78D7-540C8F2156E6}"/>
+              </a:ext>
+            </a:extLst>
+          </p:cNvPr>
+          <p:cNvSpPr txBox="1"/>
+          <p:nvPr/>
+        </p:nvSpPr>
+        <p:spPr>
+          <a:xfrm>
+            <a:off x="975198" y="1800614"/>
+            <a:ext cx="8756140" cy="1107996"/>
+          </a:xfrm>
+          <a:prstGeom prst="rect">
+            <a:avLst/>
+          </a:prstGeom>
+          <a:noFill/>
+        </p:spPr>
+        <p:txBody>
+          <a:bodyPr wrap="square">
+            <a:spAutoFit/>
+          </a:bodyPr>
+          <a:lstStyle>
+            <a:defPPr>
+              <a:defRPr lang="en-US"/>
+            </a:defPPr>
+            <a:lvl1pPr marL="0" algn="l" defTabSz="457200" rtl="0" eaLnBrk="1" latinLnBrk="0" hangingPunct="1">
+              <a:defRPr sz="1800" kern="1200">
+                <a:solidFill>
+                  <a:schemeClr val="tx1"/>
+                </a:solidFill>
+                <a:latin typeface="+mn-lt"/>
+                <a:ea typeface="+mn-ea"/>
+                <a:cs typeface="+mn-cs"/>
+              </a:defRPr>
+            </a:lvl1pPr>
+            <a:lvl2pPr marL="457200" algn="l" defTabSz="457200" rtl="0" eaLnBrk="1" latinLnBrk="0" hangingPunct="1">
+              <a:defRPr sz="1800" kern="1200">
+                <a:solidFill>
+                  <a:schemeClr val="tx1"/>
+                </a:solidFill>
+                <a:latin typeface="+mn-lt"/>
+                <a:ea typeface="+mn-ea"/>
+                <a:cs typeface="+mn-cs"/>
+              </a:defRPr>
+            </a:lvl2pPr>
+            <a:lvl3pPr marL="914400" algn="l" defTabSz="457200" rtl="0" eaLnBrk="1" latinLnBrk="0" hangingPunct="1">
+              <a:defRPr sz="1800" kern="1200">
+                <a:solidFill>
+                  <a:schemeClr val="tx1"/>
+                </a:solidFill>
+                <a:latin typeface="+mn-lt"/>
+                <a:ea typeface="+mn-ea"/>
+                <a:cs typeface="+mn-cs"/>
+              </a:defRPr>
+            </a:lvl3pPr>
+            <a:lvl4pPr marL="1371600" algn="l" defTabSz="457200" rtl="0" eaLnBrk="1" latinLnBrk="0" hangingPunct="1">
+              <a:defRPr sz="1800" kern="1200">
+                <a:solidFill>
+                  <a:schemeClr val="tx1"/>
+                </a:solidFill>
+                <a:latin typeface="+mn-lt"/>
+                <a:ea typeface="+mn-ea"/>
+                <a:cs typeface="+mn-cs"/>
+              </a:defRPr>
+            </a:lvl4pPr>
+            <a:lvl5pPr marL="1828800" algn="l" defTabSz="457200" rtl="0" eaLnBrk="1" latinLnBrk="0" hangingPunct="1">
+              <a:defRPr sz="1800" kern="1200">
+                <a:solidFill>
+                  <a:schemeClr val="tx1"/>
+                </a:solidFill>
+                <a:latin typeface="+mn-lt"/>
+                <a:ea typeface="+mn-ea"/>
+                <a:cs typeface="+mn-cs"/>
+              </a:defRPr>
+            </a:lvl5pPr>
+            <a:lvl6pPr marL="2286000" algn="l" defTabSz="457200" rtl="0" eaLnBrk="1" latinLnBrk="0" hangingPunct="1">
+              <a:defRPr sz="1800" kern="1200">
+                <a:solidFill>
+                  <a:schemeClr val="tx1"/>
+                </a:solidFill>
+                <a:latin typeface="+mn-lt"/>
+                <a:ea typeface="+mn-ea"/>
+                <a:cs typeface="+mn-cs"/>
+              </a:defRPr>
+            </a:lvl6pPr>
+            <a:lvl7pPr marL="2743200" algn="l" defTabSz="457200" rtl="0" eaLnBrk="1" latinLnBrk="0" hangingPunct="1">
+              <a:defRPr sz="1800" kern="1200">
+                <a:solidFill>
+                  <a:schemeClr val="tx1"/>
+                </a:solidFill>
+                <a:latin typeface="+mn-lt"/>
+                <a:ea typeface="+mn-ea"/>
+                <a:cs typeface="+mn-cs"/>
+              </a:defRPr>
+            </a:lvl7pPr>
+            <a:lvl8pPr marL="3200400" algn="l" defTabSz="457200" rtl="0" eaLnBrk="1" latinLnBrk="0" hangingPunct="1">
+              <a:defRPr sz="1800" kern="1200">
+                <a:solidFill>
+                  <a:schemeClr val="tx1"/>
+                </a:solidFill>
+                <a:latin typeface="+mn-lt"/>
+                <a:ea typeface="+mn-ea"/>
+                <a:cs typeface="+mn-cs"/>
+              </a:defRPr>
+            </a:lvl8pPr>
+            <a:lvl9pPr marL="3657600" algn="l" defTabSz="457200" rtl="0" eaLnBrk="1" latinLnBrk="0" hangingPunct="1">
+              <a:defRPr sz="1800" kern="1200">
+                <a:solidFill>
+                  <a:schemeClr val="tx1"/>
+                </a:solidFill>
+                <a:latin typeface="+mn-lt"/>
+                <a:ea typeface="+mn-ea"/>
+                <a:cs typeface="+mn-cs"/>
+              </a:defRPr>
+            </a:lvl9pPr>
+          </a:lstStyle>
+          <a:p>
+            <a:pPr marL="342900" indent="-342900">
+              <a:buFont typeface="Arial" panose="020B0604020202020204" pitchFamily="34" charset="0"/>
+              <a:buChar char="•"/>
+              <a:defRPr sz="2200"/>
+            </a:pPr>
+            <a:r>
+              <a:rPr lang="en-US" b="1" dirty="0"/>
+              <a:t>Moore</a:t>
+            </a:r>
+            <a:r>
+              <a:rPr lang="en-US" dirty="0"/>
+              <a:t> leads with $6,488 per person in drug spending.</a:t>
+            </a:r>
+          </a:p>
+          <a:p>
+            <a:pPr marL="342900" indent="-342900">
+              <a:buFont typeface="Arial" panose="020B0604020202020204" pitchFamily="34" charset="0"/>
+              <a:buChar char="•"/>
+              <a:defRPr sz="2200"/>
+            </a:pPr>
+            <a:r>
+              <a:rPr lang="en-US" dirty="0"/>
+              <a:t>High spending concentrated more in small rural counties.</a:t>
+            </a:r>
+          </a:p>
+          <a:p>
+            <a:pPr marL="342900" indent="-342900">
+              <a:buFont typeface="Arial" panose="020B0604020202020204" pitchFamily="34" charset="0"/>
+              <a:buChar char="•"/>
+              <a:defRPr sz="2200"/>
+            </a:pPr>
+            <a:r>
+              <a:rPr lang="en-US" dirty="0"/>
+              <a:t>Spending does not correlate with population size.</a:t>
+            </a:r>
+          </a:p>
+        </p:txBody>
+      </p:sp>
+      <p:pic>
+        <p:nvPicPr>
+          <p:cNvPr id="6" name="table">
+            <a:extLst>
+              <a:ext uri="{FF2B5EF4-FFF2-40B4-BE49-F238E27FC236}">
+                <a16:creationId xmlns:a16="http://schemas.microsoft.com/office/drawing/2014/main" id="{149ED679-A43E-34C4-010A-76E3820BB4F4}"/>
+              </a:ext>
+            </a:extLst>
+          </p:cNvPr>
+          <p:cNvPicPr>
+            <a:picLocks noChangeAspect="1"/>
+          </p:cNvPicPr>
+          <p:nvPr/>
+        </p:nvPicPr>
+        <p:blipFill>
+          <a:blip r:embed="rId3"/>
+          <a:stretch>
+            <a:fillRect/>
+          </a:stretch>
+        </p:blipFill>
+        <p:spPr>
+          <a:xfrm>
+            <a:off x="810787" y="3338913"/>
+            <a:ext cx="3519054" cy="2255097"/>
+          </a:xfrm>
+          <a:prstGeom prst="rect">
+            <a:avLst/>
+          </a:prstGeom>
+        </p:spPr>
+      </p:pic>
+    </p:spTree>
+    <p:extLst>
+      <p:ext uri="{BB962C8B-B14F-4D97-AF65-F5344CB8AC3E}">
+        <p14:creationId xmlns:p14="http://schemas.microsoft.com/office/powerpoint/2010/main" val="2778700667"/>
+      </p:ext>
+    </p:extLst>
+  </p:cSld>
+  <p:clrMapOvr>
+    <a:masterClrMapping/>
+  </p:clrMapOvr>
+</p:sld>
+</file>
+
+<file path=ppt/slides/slide11.xml><?xml version="1.0" encoding="utf-8"?>
+<p:sld xmlns:a="http://schemas.openxmlformats.org/drawingml/2006/main" xmlns:r="http://schemas.openxmlformats.org/officeDocument/2006/relationships" xmlns:p="http://schemas.openxmlformats.org/presentationml/2006/main">
+  <p:cSld>
+    <p:spTree>
+      <p:nvGrpSpPr>
+        <p:cNvPr id="1" name=""/>
+        <p:cNvGrpSpPr/>
+        <p:nvPr/>
+      </p:nvGrpSpPr>
+      <p:grpSpPr>
+        <a:xfrm>
+          <a:off x="0" y="0"/>
+          <a:ext cx="0" cy="0"/>
+          <a:chOff x="0" y="0"/>
+          <a:chExt cx="0" cy="0"/>
+        </a:xfrm>
+      </p:grpSpPr>
+      <p:sp>
+        <p:nvSpPr>
+          <p:cNvPr id="2" name="Title 1">
+            <a:extLst>
+              <a:ext uri="{FF2B5EF4-FFF2-40B4-BE49-F238E27FC236}">
+                <a16:creationId xmlns:a16="http://schemas.microsoft.com/office/drawing/2014/main" id="{FB82F134-DD44-EB79-40EB-C290C08DCF76}"/>
+              </a:ext>
+            </a:extLst>
+          </p:cNvPr>
+          <p:cNvSpPr>
+            <a:spLocks noGrp="1"/>
+          </p:cNvSpPr>
+          <p:nvPr>
+            <p:ph type="title"/>
+          </p:nvPr>
+        </p:nvSpPr>
+        <p:spPr/>
+        <p:txBody>
+          <a:bodyPr/>
+          <a:lstStyle/>
+          <a:p>
+            <a:r>
+              <a:rPr lang="en-US" dirty="0"/>
+              <a:t>Opioid Spending Per Capita</a:t>
+            </a:r>
+          </a:p>
+        </p:txBody>
+      </p:sp>
+      <p:pic>
+        <p:nvPicPr>
+          <p:cNvPr id="4" name="Picture 3">
+            <a:extLst>
+              <a:ext uri="{FF2B5EF4-FFF2-40B4-BE49-F238E27FC236}">
+                <a16:creationId xmlns:a16="http://schemas.microsoft.com/office/drawing/2014/main" id="{FCE9EDDC-BD06-5C5B-85A3-0BEDE3382181}"/>
+              </a:ext>
+            </a:extLst>
+          </p:cNvPr>
+          <p:cNvPicPr>
+            <a:picLocks noChangeAspect="1"/>
+          </p:cNvPicPr>
+          <p:nvPr/>
+        </p:nvPicPr>
+        <p:blipFill>
+          <a:blip r:embed="rId2"/>
+          <a:srcRect l="1577" t="7738" r="400"/>
+          <a:stretch>
+            <a:fillRect/>
+          </a:stretch>
+        </p:blipFill>
+        <p:spPr>
+          <a:xfrm>
+            <a:off x="5384503" y="3279222"/>
+            <a:ext cx="6096000" cy="2902436"/>
+          </a:xfrm>
+          <a:prstGeom prst="rect">
+            <a:avLst/>
+          </a:prstGeom>
+        </p:spPr>
+      </p:pic>
+      <p:sp>
+        <p:nvSpPr>
+          <p:cNvPr id="5" name="TextBox 4">
+            <a:extLst>
+              <a:ext uri="{FF2B5EF4-FFF2-40B4-BE49-F238E27FC236}">
+                <a16:creationId xmlns:a16="http://schemas.microsoft.com/office/drawing/2014/main" id="{D79E3EE2-9903-1319-7680-7C85B6D27B69}"/>
+              </a:ext>
+            </a:extLst>
+          </p:cNvPr>
+          <p:cNvSpPr txBox="1"/>
+          <p:nvPr/>
+        </p:nvSpPr>
+        <p:spPr>
+          <a:xfrm>
+            <a:off x="1033945" y="1814834"/>
+            <a:ext cx="9948036" cy="1446550"/>
+          </a:xfrm>
+          <a:prstGeom prst="rect">
+            <a:avLst/>
+          </a:prstGeom>
+          <a:noFill/>
+        </p:spPr>
+        <p:txBody>
+          <a:bodyPr wrap="square">
+            <a:spAutoFit/>
+          </a:bodyPr>
+          <a:lstStyle>
+            <a:defPPr>
+              <a:defRPr lang="en-US"/>
+            </a:defPPr>
+            <a:lvl1pPr marL="0" algn="l" defTabSz="457200" rtl="0" eaLnBrk="1" latinLnBrk="0" hangingPunct="1">
+              <a:defRPr sz="1800" kern="1200">
+                <a:solidFill>
+                  <a:schemeClr val="tx1"/>
+                </a:solidFill>
+                <a:latin typeface="+mn-lt"/>
+                <a:ea typeface="+mn-ea"/>
+                <a:cs typeface="+mn-cs"/>
+              </a:defRPr>
+            </a:lvl1pPr>
+            <a:lvl2pPr marL="457200" algn="l" defTabSz="457200" rtl="0" eaLnBrk="1" latinLnBrk="0" hangingPunct="1">
+              <a:defRPr sz="1800" kern="1200">
+                <a:solidFill>
+                  <a:schemeClr val="tx1"/>
+                </a:solidFill>
+                <a:latin typeface="+mn-lt"/>
+                <a:ea typeface="+mn-ea"/>
+                <a:cs typeface="+mn-cs"/>
+              </a:defRPr>
+            </a:lvl2pPr>
+            <a:lvl3pPr marL="914400" algn="l" defTabSz="457200" rtl="0" eaLnBrk="1" latinLnBrk="0" hangingPunct="1">
+              <a:defRPr sz="1800" kern="1200">
+                <a:solidFill>
+                  <a:schemeClr val="tx1"/>
+                </a:solidFill>
+                <a:latin typeface="+mn-lt"/>
+                <a:ea typeface="+mn-ea"/>
+                <a:cs typeface="+mn-cs"/>
+              </a:defRPr>
+            </a:lvl3pPr>
+            <a:lvl4pPr marL="1371600" algn="l" defTabSz="457200" rtl="0" eaLnBrk="1" latinLnBrk="0" hangingPunct="1">
+              <a:defRPr sz="1800" kern="1200">
+                <a:solidFill>
+                  <a:schemeClr val="tx1"/>
+                </a:solidFill>
+                <a:latin typeface="+mn-lt"/>
+                <a:ea typeface="+mn-ea"/>
+                <a:cs typeface="+mn-cs"/>
+              </a:defRPr>
+            </a:lvl4pPr>
+            <a:lvl5pPr marL="1828800" algn="l" defTabSz="457200" rtl="0" eaLnBrk="1" latinLnBrk="0" hangingPunct="1">
+              <a:defRPr sz="1800" kern="1200">
+                <a:solidFill>
+                  <a:schemeClr val="tx1"/>
+                </a:solidFill>
+                <a:latin typeface="+mn-lt"/>
+                <a:ea typeface="+mn-ea"/>
+                <a:cs typeface="+mn-cs"/>
+              </a:defRPr>
+            </a:lvl5pPr>
+            <a:lvl6pPr marL="2286000" algn="l" defTabSz="457200" rtl="0" eaLnBrk="1" latinLnBrk="0" hangingPunct="1">
+              <a:defRPr sz="1800" kern="1200">
+                <a:solidFill>
+                  <a:schemeClr val="tx1"/>
+                </a:solidFill>
+                <a:latin typeface="+mn-lt"/>
+                <a:ea typeface="+mn-ea"/>
+                <a:cs typeface="+mn-cs"/>
+              </a:defRPr>
+            </a:lvl6pPr>
+            <a:lvl7pPr marL="2743200" algn="l" defTabSz="457200" rtl="0" eaLnBrk="1" latinLnBrk="0" hangingPunct="1">
+              <a:defRPr sz="1800" kern="1200">
+                <a:solidFill>
+                  <a:schemeClr val="tx1"/>
+                </a:solidFill>
+                <a:latin typeface="+mn-lt"/>
+                <a:ea typeface="+mn-ea"/>
+                <a:cs typeface="+mn-cs"/>
+              </a:defRPr>
+            </a:lvl7pPr>
+            <a:lvl8pPr marL="3200400" algn="l" defTabSz="457200" rtl="0" eaLnBrk="1" latinLnBrk="0" hangingPunct="1">
+              <a:defRPr sz="1800" kern="1200">
+                <a:solidFill>
+                  <a:schemeClr val="tx1"/>
+                </a:solidFill>
+                <a:latin typeface="+mn-lt"/>
+                <a:ea typeface="+mn-ea"/>
+                <a:cs typeface="+mn-cs"/>
+              </a:defRPr>
+            </a:lvl8pPr>
+            <a:lvl9pPr marL="3657600" algn="l" defTabSz="457200" rtl="0" eaLnBrk="1" latinLnBrk="0" hangingPunct="1">
+              <a:defRPr sz="1800" kern="1200">
+                <a:solidFill>
+                  <a:schemeClr val="tx1"/>
+                </a:solidFill>
+                <a:latin typeface="+mn-lt"/>
+                <a:ea typeface="+mn-ea"/>
+                <a:cs typeface="+mn-cs"/>
+              </a:defRPr>
+            </a:lvl9pPr>
+          </a:lstStyle>
+          <a:p>
+            <a:pPr marL="342900" indent="-342900">
+              <a:buFont typeface="Arial" panose="020B0604020202020204" pitchFamily="34" charset="0"/>
+              <a:buChar char="•"/>
+              <a:defRPr sz="2200"/>
+            </a:pPr>
+            <a:r>
+              <a:rPr lang="en-US" b="1" dirty="0"/>
+              <a:t>Moore</a:t>
+            </a:r>
+            <a:r>
+              <a:rPr lang="en-US" dirty="0"/>
+              <a:t>  leads $311 per person</a:t>
+            </a:r>
+          </a:p>
+          <a:p>
+            <a:pPr marL="342900" indent="-342900">
+              <a:buFont typeface="Arial" panose="020B0604020202020204" pitchFamily="34" charset="0"/>
+              <a:buChar char="•"/>
+              <a:defRPr sz="2200"/>
+            </a:pPr>
+            <a:r>
+              <a:rPr lang="en-US" dirty="0"/>
+              <a:t>High opioid spend overlaps with high total spend counties.</a:t>
+            </a:r>
+          </a:p>
+          <a:p>
+            <a:pPr marL="342900" indent="-342900">
+              <a:buFont typeface="Arial" panose="020B0604020202020204" pitchFamily="34" charset="0"/>
+              <a:buChar char="•"/>
+              <a:defRPr sz="2200"/>
+            </a:pPr>
+            <a:r>
+              <a:rPr lang="en-US" dirty="0"/>
+              <a:t>Systemic prescribing patterns, not isolated cases.</a:t>
+            </a:r>
+          </a:p>
+          <a:p>
+            <a:pPr marL="342900" indent="-342900">
+              <a:buFont typeface="Arial" panose="020B0604020202020204" pitchFamily="34" charset="0"/>
+              <a:buChar char="•"/>
+              <a:defRPr sz="2200"/>
+            </a:pPr>
+            <a:r>
+              <a:rPr lang="en-US" dirty="0"/>
+              <a:t>Jackson, Trousdale, Overton show elevated levels.</a:t>
+            </a:r>
+          </a:p>
+        </p:txBody>
+      </p:sp>
+      <p:pic>
+        <p:nvPicPr>
+          <p:cNvPr id="6" name="table">
+            <a:extLst>
+              <a:ext uri="{FF2B5EF4-FFF2-40B4-BE49-F238E27FC236}">
+                <a16:creationId xmlns:a16="http://schemas.microsoft.com/office/drawing/2014/main" id="{3902CFC9-9EB7-1F29-0E39-DA95FCA5BD63}"/>
+              </a:ext>
+            </a:extLst>
+          </p:cNvPr>
+          <p:cNvPicPr>
+            <a:picLocks noChangeAspect="1"/>
+          </p:cNvPicPr>
+          <p:nvPr/>
+        </p:nvPicPr>
+        <p:blipFill>
+          <a:blip r:embed="rId3"/>
+          <a:stretch>
+            <a:fillRect/>
+          </a:stretch>
+        </p:blipFill>
+        <p:spPr>
+          <a:xfrm>
+            <a:off x="1269552" y="3338859"/>
+            <a:ext cx="3362035" cy="2462213"/>
+          </a:xfrm>
+          <a:prstGeom prst="rect">
+            <a:avLst/>
+          </a:prstGeom>
+        </p:spPr>
+      </p:pic>
+    </p:spTree>
+    <p:extLst>
+      <p:ext uri="{BB962C8B-B14F-4D97-AF65-F5344CB8AC3E}">
+        <p14:creationId xmlns:p14="http://schemas.microsoft.com/office/powerpoint/2010/main" val="3348781529"/>
+      </p:ext>
+    </p:extLst>
+  </p:cSld>
+  <p:clrMapOvr>
+    <a:masterClrMapping/>
+  </p:clrMapOvr>
+</p:sld>
+</file>
+
+<file path=ppt/slides/slide12.xml><?xml version="1.0" encoding="utf-8"?>
 <p:sld xmlns:a="http://schemas.openxmlformats.org/drawingml/2006/main" xmlns:r="http://schemas.openxmlformats.org/officeDocument/2006/relationships" xmlns:p="http://schemas.openxmlformats.org/presentationml/2006/main">
   <p:cSld>
     <p:bg>
@@ -3413,72 +4496,47 @@
           <a:chExt cx="0" cy="0"/>
         </a:xfrm>
       </p:grpSpPr>
-      <p:sp useBgFill="1">
-        <p:nvSpPr>
-          <p:cNvPr id="14" name="Rectangle 13">
+      <p:sp>
+        <p:nvSpPr>
+          <p:cNvPr id="2" name="Title 1">
             <a:extLst>
               <a:ext uri="{FF2B5EF4-FFF2-40B4-BE49-F238E27FC236}">
-                <a16:creationId xmlns:a16="http://schemas.microsoft.com/office/drawing/2014/main" id="{2B97F24A-32CE-4C1C-A50D-3016B394DCFB}"/>
-              </a:ext>
-              <a:ext uri="{C183D7F6-B498-43B3-948B-1728B52AA6E4}">
-                <adec:decorative xmlns:adec="http://schemas.microsoft.com/office/drawing/2017/decorative" val="1"/>
+                <a16:creationId xmlns:a16="http://schemas.microsoft.com/office/drawing/2014/main" id="{6DB6E582-B546-D7AC-3206-374F982EFEA5}"/>
               </a:ext>
             </a:extLst>
           </p:cNvPr>
           <p:cNvSpPr>
-            <a:spLocks noGrp="1" noRot="1" noChangeAspect="1" noMove="1" noResize="1" noEditPoints="1" noAdjustHandles="1" noChangeArrowheads="1" noChangeShapeType="1" noTextEdit="1"/>
-          </p:cNvSpPr>
-          <p:nvPr>
-            <p:extLst>
-              <p:ext uri="{386F3935-93C4-4BCD-93E2-E3B085C9AB24}">
-                <p16:designElem xmlns:p16="http://schemas.microsoft.com/office/powerpoint/2015/main" val="1"/>
-              </p:ext>
-            </p:extLst>
-          </p:nvPr>
-        </p:nvSpPr>
-        <p:spPr>
-          <a:xfrm>
-            <a:off x="0" y="0"/>
-            <a:ext cx="12192000" cy="6858000"/>
-          </a:xfrm>
-          <a:prstGeom prst="rect">
-            <a:avLst/>
-          </a:prstGeom>
-          <a:ln>
-            <a:noFill/>
-          </a:ln>
-        </p:spPr>
-        <p:style>
-          <a:lnRef idx="2">
-            <a:schemeClr val="accent1">
-              <a:shade val="50000"/>
-            </a:schemeClr>
-          </a:lnRef>
-          <a:fillRef idx="1">
-            <a:schemeClr val="accent1"/>
-          </a:fillRef>
-          <a:effectRef idx="0">
-            <a:schemeClr val="accent1"/>
-          </a:effectRef>
-          <a:fontRef idx="minor">
-            <a:schemeClr val="lt1"/>
-          </a:fontRef>
-        </p:style>
-        <p:txBody>
-          <a:bodyPr rtlCol="0" anchor="ctr"/>
-          <a:lstStyle/>
-          <a:p>
-            <a:pPr algn="ctr"/>
-            <a:endParaRPr lang="en-US"/>
-          </a:p>
-        </p:txBody>
-      </p:sp>
-      <p:sp>
-        <p:nvSpPr>
-          <p:cNvPr id="2" name="Title 1">
+            <a:spLocks noGrp="1"/>
+          </p:cNvSpPr>
+          <p:nvPr>
+            <p:ph type="title"/>
+          </p:nvPr>
+        </p:nvSpPr>
+        <p:spPr>
+          <a:xfrm>
+            <a:off x="630936" y="502920"/>
+            <a:ext cx="3419856" cy="1463040"/>
+          </a:xfrm>
+        </p:spPr>
+        <p:txBody>
+          <a:bodyPr anchor="ctr">
+            <a:normAutofit/>
+          </a:bodyPr>
+          <a:lstStyle/>
+          <a:p>
+            <a:r>
+              <a:rPr lang="en-US" sz="3700" dirty="0"/>
+              <a:t>Unemployment</a:t>
+            </a:r>
+          </a:p>
+        </p:txBody>
+      </p:sp>
+      <p:sp>
+        <p:nvSpPr>
+          <p:cNvPr id="13" name="Content Placeholder 12">
             <a:extLst>
               <a:ext uri="{FF2B5EF4-FFF2-40B4-BE49-F238E27FC236}">
-                <a16:creationId xmlns:a16="http://schemas.microsoft.com/office/drawing/2014/main" id="{8C341561-9E29-5F91-53B1-51DA25C16055}"/>
+                <a16:creationId xmlns:a16="http://schemas.microsoft.com/office/drawing/2014/main" id="{BEBCC0F4-199F-6FCD-83B1-0E7AC97ABC2A}"/>
               </a:ext>
             </a:extLst>
           </p:cNvPr>
@@ -3486,364 +4544,41 @@
             <a:spLocks noGrp="1"/>
           </p:cNvSpPr>
           <p:nvPr>
-            <p:ph type="title"/>
-          </p:nvPr>
-        </p:nvSpPr>
-        <p:spPr>
-          <a:xfrm>
-            <a:off x="630936" y="639520"/>
-            <a:ext cx="3429000" cy="1719072"/>
-          </a:xfrm>
-        </p:spPr>
-        <p:txBody>
-          <a:bodyPr vert="horz" lIns="91440" tIns="45720" rIns="91440" bIns="45720" rtlCol="0" anchor="b">
+            <p:ph idx="1"/>
+          </p:nvPr>
+        </p:nvSpPr>
+        <p:spPr>
+          <a:xfrm>
+            <a:off x="1043297" y="1913790"/>
+            <a:ext cx="10093214" cy="938881"/>
+          </a:xfrm>
+        </p:spPr>
+        <p:txBody>
+          <a:bodyPr anchor="t">
             <a:normAutofit/>
           </a:bodyPr>
           <a:lstStyle/>
           <a:p>
             <a:r>
-              <a:rPr lang="en-US" sz="5400" kern="1200">
-                <a:solidFill>
-                  <a:schemeClr val="tx1"/>
-                </a:solidFill>
-                <a:latin typeface="+mj-lt"/>
-                <a:ea typeface="+mj-ea"/>
-                <a:cs typeface="+mj-cs"/>
-              </a:rPr>
-              <a:t>Deaths Over Time</a:t>
-            </a:r>
-          </a:p>
-        </p:txBody>
-      </p:sp>
-      <p:sp>
-        <p:nvSpPr>
-          <p:cNvPr id="13" name="sketch line">
+              <a:rPr lang="en-US" sz="2200" dirty="0"/>
+              <a:t>The unemployment rate has been going down but the number of deaths has not</a:t>
+            </a:r>
+          </a:p>
+        </p:txBody>
+      </p:sp>
+      <p:pic>
+        <p:nvPicPr>
+          <p:cNvPr id="9" name="Content Placeholder 8" descr="A graph of a number of dots&#10;&#10;AI-generated content may be incorrect.">
             <a:extLst>
               <a:ext uri="{FF2B5EF4-FFF2-40B4-BE49-F238E27FC236}">
-                <a16:creationId xmlns:a16="http://schemas.microsoft.com/office/drawing/2014/main" id="{6357EC4F-235E-4222-A36F-C7878ACE37F2}"/>
-              </a:ext>
-              <a:ext uri="{C183D7F6-B498-43B3-948B-1728B52AA6E4}">
-                <adec:decorative xmlns:adec="http://schemas.microsoft.com/office/drawing/2017/decorative" val="1"/>
-              </a:ext>
-            </a:extLst>
-          </p:cNvPr>
-          <p:cNvSpPr>
-            <a:spLocks noGrp="1" noRot="1" noChangeAspect="1" noMove="1" noResize="1" noEditPoints="1" noAdjustHandles="1" noChangeArrowheads="1" noChangeShapeType="1" noTextEdit="1"/>
-          </p:cNvSpPr>
-          <p:nvPr>
-            <p:extLst>
-              <p:ext uri="{386F3935-93C4-4BCD-93E2-E3B085C9AB24}">
-                <p16:designElem xmlns:p16="http://schemas.microsoft.com/office/powerpoint/2015/main" val="1"/>
-              </p:ext>
-            </p:extLst>
-          </p:nvPr>
-        </p:nvSpPr>
-        <p:spPr>
-          <a:xfrm>
-            <a:off x="643278" y="2573756"/>
-            <a:ext cx="3255095" cy="18288"/>
-          </a:xfrm>
-          <a:custGeom>
-            <a:avLst/>
-            <a:gdLst>
-              <a:gd name="connsiteX0" fmla="*/ 0 w 3255095"/>
-              <a:gd name="connsiteY0" fmla="*/ 0 h 18288"/>
-              <a:gd name="connsiteX1" fmla="*/ 618468 w 3255095"/>
-              <a:gd name="connsiteY1" fmla="*/ 0 h 18288"/>
-              <a:gd name="connsiteX2" fmla="*/ 1269487 w 3255095"/>
-              <a:gd name="connsiteY2" fmla="*/ 0 h 18288"/>
-              <a:gd name="connsiteX3" fmla="*/ 1953057 w 3255095"/>
-              <a:gd name="connsiteY3" fmla="*/ 0 h 18288"/>
-              <a:gd name="connsiteX4" fmla="*/ 2636627 w 3255095"/>
-              <a:gd name="connsiteY4" fmla="*/ 0 h 18288"/>
-              <a:gd name="connsiteX5" fmla="*/ 3255095 w 3255095"/>
-              <a:gd name="connsiteY5" fmla="*/ 0 h 18288"/>
-              <a:gd name="connsiteX6" fmla="*/ 3255095 w 3255095"/>
-              <a:gd name="connsiteY6" fmla="*/ 18288 h 18288"/>
-              <a:gd name="connsiteX7" fmla="*/ 2538974 w 3255095"/>
-              <a:gd name="connsiteY7" fmla="*/ 18288 h 18288"/>
-              <a:gd name="connsiteX8" fmla="*/ 1822853 w 3255095"/>
-              <a:gd name="connsiteY8" fmla="*/ 18288 h 18288"/>
-              <a:gd name="connsiteX9" fmla="*/ 1171834 w 3255095"/>
-              <a:gd name="connsiteY9" fmla="*/ 18288 h 18288"/>
-              <a:gd name="connsiteX10" fmla="*/ 0 w 3255095"/>
-              <a:gd name="connsiteY10" fmla="*/ 18288 h 18288"/>
-              <a:gd name="connsiteX11" fmla="*/ 0 w 3255095"/>
-              <a:gd name="connsiteY11" fmla="*/ 0 h 18288"/>
-            </a:gdLst>
-            <a:ahLst/>
-            <a:cxnLst>
-              <a:cxn ang="0">
-                <a:pos x="connsiteX0" y="connsiteY0"/>
-              </a:cxn>
-              <a:cxn ang="0">
-                <a:pos x="connsiteX1" y="connsiteY1"/>
-              </a:cxn>
-              <a:cxn ang="0">
-                <a:pos x="connsiteX2" y="connsiteY2"/>
-              </a:cxn>
-              <a:cxn ang="0">
-                <a:pos x="connsiteX3" y="connsiteY3"/>
-              </a:cxn>
-              <a:cxn ang="0">
-                <a:pos x="connsiteX4" y="connsiteY4"/>
-              </a:cxn>
-              <a:cxn ang="0">
-                <a:pos x="connsiteX5" y="connsiteY5"/>
-              </a:cxn>
-              <a:cxn ang="0">
-                <a:pos x="connsiteX6" y="connsiteY6"/>
-              </a:cxn>
-              <a:cxn ang="0">
-                <a:pos x="connsiteX7" y="connsiteY7"/>
-              </a:cxn>
-              <a:cxn ang="0">
-                <a:pos x="connsiteX8" y="connsiteY8"/>
-              </a:cxn>
-              <a:cxn ang="0">
-                <a:pos x="connsiteX9" y="connsiteY9"/>
-              </a:cxn>
-              <a:cxn ang="0">
-                <a:pos x="connsiteX10" y="connsiteY10"/>
-              </a:cxn>
-              <a:cxn ang="0">
-                <a:pos x="connsiteX11" y="connsiteY11"/>
-              </a:cxn>
-            </a:cxnLst>
-            <a:rect l="l" t="t" r="r" b="b"/>
-            <a:pathLst>
-              <a:path w="3255095" h="18288" fill="none" extrusionOk="0">
-                <a:moveTo>
-                  <a:pt x="0" y="0"/>
-                </a:moveTo>
-                <a:cubicBezTo>
-                  <a:pt x="240201" y="-22123"/>
-                  <a:pt x="462021" y="-19623"/>
-                  <a:pt x="618468" y="0"/>
-                </a:cubicBezTo>
-                <a:cubicBezTo>
-                  <a:pt x="774915" y="19623"/>
-                  <a:pt x="974734" y="2035"/>
-                  <a:pt x="1269487" y="0"/>
-                </a:cubicBezTo>
-                <a:cubicBezTo>
-                  <a:pt x="1564240" y="-2035"/>
-                  <a:pt x="1733579" y="10639"/>
-                  <a:pt x="1953057" y="0"/>
-                </a:cubicBezTo>
-                <a:cubicBezTo>
-                  <a:pt x="2172535" y="-10639"/>
-                  <a:pt x="2453962" y="14018"/>
-                  <a:pt x="2636627" y="0"/>
-                </a:cubicBezTo>
-                <a:cubicBezTo>
-                  <a:pt x="2819292" y="-14018"/>
-                  <a:pt x="3121375" y="5399"/>
-                  <a:pt x="3255095" y="0"/>
-                </a:cubicBezTo>
-                <a:cubicBezTo>
-                  <a:pt x="3254386" y="8157"/>
-                  <a:pt x="3254682" y="12125"/>
-                  <a:pt x="3255095" y="18288"/>
-                </a:cubicBezTo>
-                <a:cubicBezTo>
-                  <a:pt x="3088545" y="23203"/>
-                  <a:pt x="2687475" y="7419"/>
-                  <a:pt x="2538974" y="18288"/>
-                </a:cubicBezTo>
-                <a:cubicBezTo>
-                  <a:pt x="2390473" y="29157"/>
-                  <a:pt x="2137381" y="-8959"/>
-                  <a:pt x="1822853" y="18288"/>
-                </a:cubicBezTo>
-                <a:cubicBezTo>
-                  <a:pt x="1508325" y="45535"/>
-                  <a:pt x="1466437" y="20385"/>
-                  <a:pt x="1171834" y="18288"/>
-                </a:cubicBezTo>
-                <a:cubicBezTo>
-                  <a:pt x="877231" y="16191"/>
-                  <a:pt x="561097" y="37643"/>
-                  <a:pt x="0" y="18288"/>
-                </a:cubicBezTo>
-                <a:cubicBezTo>
-                  <a:pt x="-46" y="12483"/>
-                  <a:pt x="-203" y="6491"/>
-                  <a:pt x="0" y="0"/>
-                </a:cubicBezTo>
-                <a:close/>
-              </a:path>
-              <a:path w="3255095" h="18288" stroke="0" extrusionOk="0">
-                <a:moveTo>
-                  <a:pt x="0" y="0"/>
-                </a:moveTo>
-                <a:cubicBezTo>
-                  <a:pt x="291965" y="19429"/>
-                  <a:pt x="363155" y="8568"/>
-                  <a:pt x="618468" y="0"/>
-                </a:cubicBezTo>
-                <a:cubicBezTo>
-                  <a:pt x="873781" y="-8568"/>
-                  <a:pt x="904459" y="-19505"/>
-                  <a:pt x="1171834" y="0"/>
-                </a:cubicBezTo>
-                <a:cubicBezTo>
-                  <a:pt x="1439209" y="19505"/>
-                  <a:pt x="1744369" y="9790"/>
-                  <a:pt x="1887955" y="0"/>
-                </a:cubicBezTo>
-                <a:cubicBezTo>
-                  <a:pt x="2031541" y="-9790"/>
-                  <a:pt x="2346378" y="21240"/>
-                  <a:pt x="2506423" y="0"/>
-                </a:cubicBezTo>
-                <a:cubicBezTo>
-                  <a:pt x="2666468" y="-21240"/>
-                  <a:pt x="2990257" y="30414"/>
-                  <a:pt x="3255095" y="0"/>
-                </a:cubicBezTo>
-                <a:cubicBezTo>
-                  <a:pt x="3254831" y="4493"/>
-                  <a:pt x="3255479" y="9472"/>
-                  <a:pt x="3255095" y="18288"/>
-                </a:cubicBezTo>
-                <a:cubicBezTo>
-                  <a:pt x="3120743" y="16690"/>
-                  <a:pt x="2759628" y="42462"/>
-                  <a:pt x="2604076" y="18288"/>
-                </a:cubicBezTo>
-                <a:cubicBezTo>
-                  <a:pt x="2448524" y="-5886"/>
-                  <a:pt x="2184336" y="19599"/>
-                  <a:pt x="1887955" y="18288"/>
-                </a:cubicBezTo>
-                <a:cubicBezTo>
-                  <a:pt x="1591574" y="16977"/>
-                  <a:pt x="1548845" y="6870"/>
-                  <a:pt x="1334589" y="18288"/>
-                </a:cubicBezTo>
-                <a:cubicBezTo>
-                  <a:pt x="1120333" y="29706"/>
-                  <a:pt x="996014" y="9662"/>
-                  <a:pt x="683570" y="18288"/>
-                </a:cubicBezTo>
-                <a:cubicBezTo>
-                  <a:pt x="371126" y="26914"/>
-                  <a:pt x="198687" y="16167"/>
-                  <a:pt x="0" y="18288"/>
-                </a:cubicBezTo>
-                <a:cubicBezTo>
-                  <a:pt x="843" y="9577"/>
-                  <a:pt x="371" y="6900"/>
-                  <a:pt x="0" y="0"/>
-                </a:cubicBezTo>
-                <a:close/>
-              </a:path>
-            </a:pathLst>
-          </a:custGeom>
-          <a:solidFill>
-            <a:schemeClr val="accent2"/>
-          </a:solidFill>
-          <a:ln w="38100" cap="rnd">
-            <a:solidFill>
-              <a:schemeClr val="accent2"/>
-            </a:solidFill>
-            <a:round/>
-            <a:extLst>
-              <a:ext uri="{C807C97D-BFC1-408E-A445-0C87EB9F89A2}">
-                <ask:lineSketchStyleProps xmlns:ask="http://schemas.microsoft.com/office/drawing/2018/sketchyshapes" sd="1219033472">
-                  <a:prstGeom prst="rect">
-                    <a:avLst/>
-                  </a:prstGeom>
-                  <ask:type>
-                    <ask:lineSketchFreehand/>
-                  </ask:type>
-                </ask:lineSketchStyleProps>
-              </a:ext>
-            </a:extLst>
-          </a:ln>
-        </p:spPr>
-        <p:style>
-          <a:lnRef idx="2">
-            <a:schemeClr val="accent1">
-              <a:shade val="50000"/>
-            </a:schemeClr>
-          </a:lnRef>
-          <a:fillRef idx="1">
-            <a:schemeClr val="accent1"/>
-          </a:fillRef>
-          <a:effectRef idx="0">
-            <a:schemeClr val="accent1"/>
-          </a:effectRef>
-          <a:fontRef idx="minor">
-            <a:schemeClr val="lt1"/>
-          </a:fontRef>
-        </p:style>
-        <p:txBody>
-          <a:bodyPr rtlCol="0" anchor="ctr"/>
-          <a:lstStyle/>
-          <a:p>
-            <a:pPr algn="ctr"/>
-            <a:endParaRPr lang="en-US"/>
-          </a:p>
-        </p:txBody>
-      </p:sp>
-      <p:sp>
-        <p:nvSpPr>
-          <p:cNvPr id="4" name="Content Placeholder 3">
-            <a:extLst>
-              <a:ext uri="{FF2B5EF4-FFF2-40B4-BE49-F238E27FC236}">
-                <a16:creationId xmlns:a16="http://schemas.microsoft.com/office/drawing/2014/main" id="{4CFB5B3C-1324-386B-83DB-97A83149D2A5}"/>
-              </a:ext>
-            </a:extLst>
-          </p:cNvPr>
-          <p:cNvSpPr>
-            <a:spLocks noGrp="1"/>
-          </p:cNvSpPr>
-          <p:nvPr>
-            <p:ph sz="half" idx="2"/>
-          </p:nvPr>
-        </p:nvSpPr>
-        <p:spPr>
-          <a:xfrm>
-            <a:off x="630936" y="2807208"/>
-            <a:ext cx="3429000" cy="3410712"/>
-          </a:xfrm>
-        </p:spPr>
-        <p:txBody>
-          <a:bodyPr vert="horz" lIns="91440" tIns="45720" rIns="91440" bIns="45720" rtlCol="0" anchor="t">
-            <a:normAutofit/>
-          </a:bodyPr>
-          <a:lstStyle/>
-          <a:p>
-            <a:r>
-              <a:rPr lang="en-US" sz="2200" dirty="0"/>
-              <a:t>The rate at which overdose deaths  increasing is slowing down</a:t>
-            </a:r>
-          </a:p>
-          <a:p>
-            <a:r>
-              <a:rPr lang="en-US" sz="2200" dirty="0"/>
-              <a:t>The increase might be due to population growth</a:t>
-            </a:r>
-          </a:p>
-        </p:txBody>
-      </p:sp>
-      <p:pic>
-        <p:nvPicPr>
-          <p:cNvPr id="6" name="Content Placeholder 5" descr="A graph with a line&#10;&#10;AI-generated content may be incorrect.">
-            <a:extLst>
-              <a:ext uri="{FF2B5EF4-FFF2-40B4-BE49-F238E27FC236}">
-                <a16:creationId xmlns:a16="http://schemas.microsoft.com/office/drawing/2014/main" id="{5EF31001-8C0C-C463-4816-B601F671207F}"/>
+                <a16:creationId xmlns:a16="http://schemas.microsoft.com/office/drawing/2014/main" id="{AE8E519D-67A7-E9C1-831D-FFA9C724DAA5}"/>
               </a:ext>
             </a:extLst>
           </p:cNvPr>
           <p:cNvPicPr>
-            <a:picLocks noGrp="1" noChangeAspect="1"/>
+            <a:picLocks noChangeAspect="1"/>
           </p:cNvPicPr>
-          <p:nvPr>
-            <p:ph sz="half" idx="1"/>
-          </p:nvPr>
+          <p:nvPr/>
         </p:nvPicPr>
         <p:blipFill>
           <a:blip r:embed="rId2">
@@ -3859,8 +4594,8 @@
         </p:blipFill>
         <p:spPr>
           <a:xfrm>
-            <a:off x="4654296" y="736548"/>
-            <a:ext cx="6903720" cy="5384904"/>
+            <a:off x="630936" y="3001400"/>
+            <a:ext cx="10917936" cy="2538424"/>
           </a:xfrm>
           <a:prstGeom prst="rect">
             <a:avLst/>
@@ -3870,7 +4605,1134 @@
     </p:spTree>
     <p:extLst>
       <p:ext uri="{BB962C8B-B14F-4D97-AF65-F5344CB8AC3E}">
-        <p14:creationId xmlns:p14="http://schemas.microsoft.com/office/powerpoint/2010/main" val="2015983476"/>
+        <p14:creationId xmlns:p14="http://schemas.microsoft.com/office/powerpoint/2010/main" val="3702852111"/>
+      </p:ext>
+    </p:extLst>
+  </p:cSld>
+  <p:clrMapOvr>
+    <a:masterClrMapping/>
+  </p:clrMapOvr>
+</p:sld>
+</file>
+
+<file path=ppt/slides/slide13.xml><?xml version="1.0" encoding="utf-8"?>
+<p:sld xmlns:a="http://schemas.openxmlformats.org/drawingml/2006/main" xmlns:r="http://schemas.openxmlformats.org/officeDocument/2006/relationships" xmlns:p="http://schemas.openxmlformats.org/presentationml/2006/main">
+  <p:cSld>
+    <p:bg>
+      <p:bgPr>
+        <a:solidFill>
+          <a:schemeClr val="bg1"/>
+        </a:solidFill>
+        <a:effectLst/>
+      </p:bgPr>
+    </p:bg>
+    <p:spTree>
+      <p:nvGrpSpPr>
+        <p:cNvPr id="1" name=""/>
+        <p:cNvGrpSpPr/>
+        <p:nvPr/>
+      </p:nvGrpSpPr>
+      <p:grpSpPr>
+        <a:xfrm>
+          <a:off x="0" y="0"/>
+          <a:ext cx="0" cy="0"/>
+          <a:chOff x="0" y="0"/>
+          <a:chExt cx="0" cy="0"/>
+        </a:xfrm>
+      </p:grpSpPr>
+      <p:sp>
+        <p:nvSpPr>
+          <p:cNvPr id="2" name="Title 1">
+            <a:extLst>
+              <a:ext uri="{FF2B5EF4-FFF2-40B4-BE49-F238E27FC236}">
+                <a16:creationId xmlns:a16="http://schemas.microsoft.com/office/drawing/2014/main" id="{111A9EB2-A3F6-7F13-E8BF-0E2B8B691651}"/>
+              </a:ext>
+            </a:extLst>
+          </p:cNvPr>
+          <p:cNvSpPr>
+            <a:spLocks noGrp="1"/>
+          </p:cNvSpPr>
+          <p:nvPr>
+            <p:ph type="title"/>
+          </p:nvPr>
+        </p:nvSpPr>
+        <p:spPr>
+          <a:xfrm>
+            <a:off x="630936" y="639520"/>
+            <a:ext cx="3429000" cy="1079810"/>
+          </a:xfrm>
+        </p:spPr>
+        <p:txBody>
+          <a:bodyPr vert="horz" lIns="91440" tIns="45720" rIns="91440" bIns="45720" rtlCol="0" anchor="b">
+            <a:normAutofit/>
+          </a:bodyPr>
+          <a:lstStyle/>
+          <a:p>
+            <a:r>
+              <a:rPr lang="en-US" sz="3800" kern="1200" dirty="0">
+                <a:solidFill>
+                  <a:schemeClr val="tx1"/>
+                </a:solidFill>
+                <a:latin typeface="+mj-lt"/>
+                <a:ea typeface="+mj-ea"/>
+                <a:cs typeface="+mj-cs"/>
+              </a:rPr>
+              <a:t>Unemployment</a:t>
+            </a:r>
+          </a:p>
+        </p:txBody>
+      </p:sp>
+      <p:sp>
+        <p:nvSpPr>
+          <p:cNvPr id="3" name="Content Placeholder 2">
+            <a:extLst>
+              <a:ext uri="{FF2B5EF4-FFF2-40B4-BE49-F238E27FC236}">
+                <a16:creationId xmlns:a16="http://schemas.microsoft.com/office/drawing/2014/main" id="{480E7C73-12AB-CBF9-82EC-90B65C3A6AD9}"/>
+              </a:ext>
+            </a:extLst>
+          </p:cNvPr>
+          <p:cNvSpPr>
+            <a:spLocks noGrp="1"/>
+          </p:cNvSpPr>
+          <p:nvPr>
+            <p:ph sz="half" idx="1"/>
+          </p:nvPr>
+        </p:nvSpPr>
+        <p:spPr>
+          <a:xfrm>
+            <a:off x="630936" y="2807208"/>
+            <a:ext cx="3429000" cy="3410712"/>
+          </a:xfrm>
+        </p:spPr>
+        <p:txBody>
+          <a:bodyPr vert="horz" lIns="91440" tIns="45720" rIns="91440" bIns="45720" rtlCol="0" anchor="t">
+            <a:normAutofit/>
+          </a:bodyPr>
+          <a:lstStyle/>
+          <a:p>
+            <a:r>
+              <a:rPr lang="en-US" sz="2400" dirty="0"/>
+              <a:t>Unemployment does not impact the cost of </a:t>
+            </a:r>
+            <a:r>
+              <a:rPr lang="en-US" sz="2400"/>
+              <a:t>Opiods</a:t>
+            </a:r>
+            <a:endParaRPr lang="en-US" sz="2200"/>
+          </a:p>
+        </p:txBody>
+      </p:sp>
+      <p:pic>
+        <p:nvPicPr>
+          <p:cNvPr id="6" name="Content Placeholder 5" descr="A graph showing the cost of unemployment&#10;&#10;AI-generated content may be incorrect.">
+            <a:extLst>
+              <a:ext uri="{FF2B5EF4-FFF2-40B4-BE49-F238E27FC236}">
+                <a16:creationId xmlns:a16="http://schemas.microsoft.com/office/drawing/2014/main" id="{90F493B1-5FB2-054A-4F38-E104246D6E5C}"/>
+              </a:ext>
+            </a:extLst>
+          </p:cNvPr>
+          <p:cNvPicPr>
+            <a:picLocks noGrp="1" noChangeAspect="1"/>
+          </p:cNvPicPr>
+          <p:nvPr>
+            <p:ph sz="half" idx="2"/>
+          </p:nvPr>
+        </p:nvPicPr>
+        <p:blipFill>
+          <a:blip r:embed="rId2">
+            <a:extLst>
+              <a:ext uri="{28A0092B-C50C-407E-A947-70E740481C1C}">
+                <a14:useLocalDpi xmlns:a14="http://schemas.microsoft.com/office/drawing/2010/main" val="0"/>
+              </a:ext>
+            </a:extLst>
+          </a:blip>
+          <a:stretch>
+            <a:fillRect/>
+          </a:stretch>
+        </p:blipFill>
+        <p:spPr>
+          <a:xfrm>
+            <a:off x="4654296" y="1202548"/>
+            <a:ext cx="6903720" cy="4452903"/>
+          </a:xfrm>
+          <a:prstGeom prst="rect">
+            <a:avLst/>
+          </a:prstGeom>
+        </p:spPr>
+      </p:pic>
+    </p:spTree>
+    <p:extLst>
+      <p:ext uri="{BB962C8B-B14F-4D97-AF65-F5344CB8AC3E}">
+        <p14:creationId xmlns:p14="http://schemas.microsoft.com/office/powerpoint/2010/main" val="1710168246"/>
+      </p:ext>
+    </p:extLst>
+  </p:cSld>
+  <p:clrMapOvr>
+    <a:masterClrMapping/>
+  </p:clrMapOvr>
+</p:sld>
+</file>
+
+<file path=ppt/slides/slide14.xml><?xml version="1.0" encoding="utf-8"?>
+<p:sld xmlns:a="http://schemas.openxmlformats.org/drawingml/2006/main" xmlns:r="http://schemas.openxmlformats.org/officeDocument/2006/relationships" xmlns:p="http://schemas.openxmlformats.org/presentationml/2006/main">
+  <p:cSld>
+    <p:spTree>
+      <p:nvGrpSpPr>
+        <p:cNvPr id="1" name=""/>
+        <p:cNvGrpSpPr/>
+        <p:nvPr/>
+      </p:nvGrpSpPr>
+      <p:grpSpPr>
+        <a:xfrm>
+          <a:off x="0" y="0"/>
+          <a:ext cx="0" cy="0"/>
+          <a:chOff x="0" y="0"/>
+          <a:chExt cx="0" cy="0"/>
+        </a:xfrm>
+      </p:grpSpPr>
+      <p:sp>
+        <p:nvSpPr>
+          <p:cNvPr id="2" name="Title 1">
+            <a:extLst>
+              <a:ext uri="{FF2B5EF4-FFF2-40B4-BE49-F238E27FC236}">
+                <a16:creationId xmlns:a16="http://schemas.microsoft.com/office/drawing/2014/main" id="{16FF1BB2-86D2-0D3C-8809-CB76BAECFFD1}"/>
+              </a:ext>
+            </a:extLst>
+          </p:cNvPr>
+          <p:cNvSpPr>
+            <a:spLocks noGrp="1"/>
+          </p:cNvSpPr>
+          <p:nvPr>
+            <p:ph type="title"/>
+          </p:nvPr>
+        </p:nvSpPr>
+        <p:spPr/>
+        <p:txBody>
+          <a:bodyPr/>
+          <a:lstStyle/>
+          <a:p>
+            <a:r>
+              <a:rPr lang="en-US" dirty="0"/>
+              <a:t>Top Prescribers of Opioids</a:t>
+            </a:r>
+          </a:p>
+        </p:txBody>
+      </p:sp>
+      <p:sp>
+        <p:nvSpPr>
+          <p:cNvPr id="5" name="Content Placeholder 2">
+            <a:extLst>
+              <a:ext uri="{FF2B5EF4-FFF2-40B4-BE49-F238E27FC236}">
+                <a16:creationId xmlns:a16="http://schemas.microsoft.com/office/drawing/2014/main" id="{55B025D3-4CDA-3E07-DF96-39B9058ECC31}"/>
+              </a:ext>
+            </a:extLst>
+          </p:cNvPr>
+          <p:cNvSpPr>
+            <a:spLocks noGrp="1"/>
+          </p:cNvSpPr>
+          <p:nvPr>
+            <p:ph sz="half" idx="1"/>
+          </p:nvPr>
+        </p:nvSpPr>
+        <p:spPr>
+          <a:xfrm>
+            <a:off x="751155" y="5120640"/>
+            <a:ext cx="9613861" cy="1162051"/>
+          </a:xfrm>
+        </p:spPr>
+        <p:txBody>
+          <a:bodyPr>
+            <a:normAutofit/>
+          </a:bodyPr>
+          <a:lstStyle/>
+          <a:p>
+            <a:r>
+              <a:rPr lang="en-US" dirty="0"/>
+              <a:t>The top ten prescribers of opioids, by number of claims, are scattered in the northeastern part of the state, but are particularly concentrated in the counties north of Knoxville.</a:t>
+            </a:r>
+          </a:p>
+        </p:txBody>
+      </p:sp>
+      <p:pic>
+        <p:nvPicPr>
+          <p:cNvPr id="6" name="Picture 5" descr="A map of the state of pennsylvania&#10;&#10;AI-generated content may be incorrect.">
+            <a:extLst>
+              <a:ext uri="{FF2B5EF4-FFF2-40B4-BE49-F238E27FC236}">
+                <a16:creationId xmlns:a16="http://schemas.microsoft.com/office/drawing/2014/main" id="{7B1DCBC8-682A-3B5C-38BF-F2CC86BE54EE}"/>
+              </a:ext>
+            </a:extLst>
+          </p:cNvPr>
+          <p:cNvPicPr>
+            <a:picLocks noChangeAspect="1"/>
+          </p:cNvPicPr>
+          <p:nvPr/>
+        </p:nvPicPr>
+        <p:blipFill>
+          <a:blip r:embed="rId2">
+            <a:extLst>
+              <a:ext uri="{28A0092B-C50C-407E-A947-70E740481C1C}">
+                <a14:useLocalDpi xmlns:a14="http://schemas.microsoft.com/office/drawing/2010/main" val="0"/>
+              </a:ext>
+            </a:extLst>
+          </a:blip>
+          <a:srcRect l="3213"/>
+          <a:stretch>
+            <a:fillRect/>
+          </a:stretch>
+        </p:blipFill>
+        <p:spPr>
+          <a:xfrm>
+            <a:off x="165399" y="1941103"/>
+            <a:ext cx="11745292" cy="2975794"/>
+          </a:xfrm>
+          <a:prstGeom prst="rect">
+            <a:avLst/>
+          </a:prstGeom>
+        </p:spPr>
+      </p:pic>
+    </p:spTree>
+    <p:extLst>
+      <p:ext uri="{BB962C8B-B14F-4D97-AF65-F5344CB8AC3E}">
+        <p14:creationId xmlns:p14="http://schemas.microsoft.com/office/powerpoint/2010/main" val="3118861490"/>
+      </p:ext>
+    </p:extLst>
+  </p:cSld>
+  <p:clrMapOvr>
+    <a:masterClrMapping/>
+  </p:clrMapOvr>
+</p:sld>
+</file>
+
+<file path=ppt/slides/slide15.xml><?xml version="1.0" encoding="utf-8"?>
+<p:sld xmlns:a="http://schemas.openxmlformats.org/drawingml/2006/main" xmlns:r="http://schemas.openxmlformats.org/officeDocument/2006/relationships" xmlns:p="http://schemas.openxmlformats.org/presentationml/2006/main">
+  <p:cSld>
+    <p:spTree>
+      <p:nvGrpSpPr>
+        <p:cNvPr id="1" name=""/>
+        <p:cNvGrpSpPr/>
+        <p:nvPr/>
+      </p:nvGrpSpPr>
+      <p:grpSpPr>
+        <a:xfrm>
+          <a:off x="0" y="0"/>
+          <a:ext cx="0" cy="0"/>
+          <a:chOff x="0" y="0"/>
+          <a:chExt cx="0" cy="0"/>
+        </a:xfrm>
+      </p:grpSpPr>
+      <p:sp>
+        <p:nvSpPr>
+          <p:cNvPr id="2" name="Title 1">
+            <a:extLst>
+              <a:ext uri="{FF2B5EF4-FFF2-40B4-BE49-F238E27FC236}">
+                <a16:creationId xmlns:a16="http://schemas.microsoft.com/office/drawing/2014/main" id="{D79FA7FC-B449-E3D2-9AC5-C753E6F0AA45}"/>
+              </a:ext>
+            </a:extLst>
+          </p:cNvPr>
+          <p:cNvSpPr>
+            <a:spLocks noGrp="1"/>
+          </p:cNvSpPr>
+          <p:nvPr>
+            <p:ph type="title"/>
+          </p:nvPr>
+        </p:nvSpPr>
+        <p:spPr/>
+        <p:txBody>
+          <a:bodyPr/>
+          <a:lstStyle/>
+          <a:p>
+            <a:r>
+              <a:rPr lang="en-US" dirty="0"/>
+              <a:t>Top Prescribers of Opioids</a:t>
+            </a:r>
+          </a:p>
+        </p:txBody>
+      </p:sp>
+      <p:sp>
+        <p:nvSpPr>
+          <p:cNvPr id="5" name="Content Placeholder 2">
+            <a:extLst>
+              <a:ext uri="{FF2B5EF4-FFF2-40B4-BE49-F238E27FC236}">
+                <a16:creationId xmlns:a16="http://schemas.microsoft.com/office/drawing/2014/main" id="{C9DEE696-6460-5AC7-AA97-F8A928799F66}"/>
+              </a:ext>
+            </a:extLst>
+          </p:cNvPr>
+          <p:cNvSpPr>
+            <a:spLocks noGrp="1"/>
+          </p:cNvSpPr>
+          <p:nvPr>
+            <p:ph sz="half" idx="1"/>
+          </p:nvPr>
+        </p:nvSpPr>
+        <p:spPr>
+          <a:xfrm>
+            <a:off x="5477164" y="2250851"/>
+            <a:ext cx="6307656" cy="3685338"/>
+          </a:xfrm>
+        </p:spPr>
+        <p:txBody>
+          <a:bodyPr/>
+          <a:lstStyle/>
+          <a:p>
+            <a:r>
+              <a:rPr lang="en-US" dirty="0"/>
+              <a:t>The top hundred prescribers by number of opioid claims account for 13.9% of all opioid claims in Tennessee, despite accounting for only 1% of physicians who prescribed opioids from 2013 – 2017.</a:t>
+            </a:r>
+          </a:p>
+        </p:txBody>
+      </p:sp>
+      <p:pic>
+        <p:nvPicPr>
+          <p:cNvPr id="6" name="Picture 5">
+            <a:extLst>
+              <a:ext uri="{FF2B5EF4-FFF2-40B4-BE49-F238E27FC236}">
+                <a16:creationId xmlns:a16="http://schemas.microsoft.com/office/drawing/2014/main" id="{69EBB8DB-81E6-755B-1B61-AA7933F7370B}"/>
+              </a:ext>
+            </a:extLst>
+          </p:cNvPr>
+          <p:cNvPicPr>
+            <a:picLocks noChangeAspect="1"/>
+          </p:cNvPicPr>
+          <p:nvPr/>
+        </p:nvPicPr>
+        <p:blipFill>
+          <a:blip r:embed="rId2"/>
+          <a:stretch>
+            <a:fillRect/>
+          </a:stretch>
+        </p:blipFill>
+        <p:spPr>
+          <a:xfrm>
+            <a:off x="407180" y="2250851"/>
+            <a:ext cx="4727457" cy="3557023"/>
+          </a:xfrm>
+          <a:prstGeom prst="rect">
+            <a:avLst/>
+          </a:prstGeom>
+        </p:spPr>
+      </p:pic>
+    </p:spTree>
+    <p:extLst>
+      <p:ext uri="{BB962C8B-B14F-4D97-AF65-F5344CB8AC3E}">
+        <p14:creationId xmlns:p14="http://schemas.microsoft.com/office/powerpoint/2010/main" val="585246630"/>
+      </p:ext>
+    </p:extLst>
+  </p:cSld>
+  <p:clrMapOvr>
+    <a:masterClrMapping/>
+  </p:clrMapOvr>
+</p:sld>
+</file>
+
+<file path=ppt/slides/slide16.xml><?xml version="1.0" encoding="utf-8"?>
+<p:sld xmlns:a="http://schemas.openxmlformats.org/drawingml/2006/main" xmlns:r="http://schemas.openxmlformats.org/officeDocument/2006/relationships" xmlns:p="http://schemas.openxmlformats.org/presentationml/2006/main">
+  <p:cSld>
+    <p:spTree>
+      <p:nvGrpSpPr>
+        <p:cNvPr id="1" name=""/>
+        <p:cNvGrpSpPr/>
+        <p:nvPr/>
+      </p:nvGrpSpPr>
+      <p:grpSpPr>
+        <a:xfrm>
+          <a:off x="0" y="0"/>
+          <a:ext cx="0" cy="0"/>
+          <a:chOff x="0" y="0"/>
+          <a:chExt cx="0" cy="0"/>
+        </a:xfrm>
+      </p:grpSpPr>
+      <p:sp>
+        <p:nvSpPr>
+          <p:cNvPr id="2" name="Title 1">
+            <a:extLst>
+              <a:ext uri="{FF2B5EF4-FFF2-40B4-BE49-F238E27FC236}">
+                <a16:creationId xmlns:a16="http://schemas.microsoft.com/office/drawing/2014/main" id="{FAD46AB0-4E50-7438-7DF0-AB7537CBE14C}"/>
+              </a:ext>
+            </a:extLst>
+          </p:cNvPr>
+          <p:cNvSpPr>
+            <a:spLocks noGrp="1"/>
+          </p:cNvSpPr>
+          <p:nvPr>
+            <p:ph type="title"/>
+          </p:nvPr>
+        </p:nvSpPr>
+        <p:spPr/>
+        <p:txBody>
+          <a:bodyPr/>
+          <a:lstStyle/>
+          <a:p>
+            <a:r>
+              <a:rPr lang="en-US" dirty="0"/>
+              <a:t>Davidson County</a:t>
+            </a:r>
+          </a:p>
+        </p:txBody>
+      </p:sp>
+      <p:sp>
+        <p:nvSpPr>
+          <p:cNvPr id="5" name="TextBox 3">
+            <a:extLst>
+              <a:ext uri="{FF2B5EF4-FFF2-40B4-BE49-F238E27FC236}">
+                <a16:creationId xmlns:a16="http://schemas.microsoft.com/office/drawing/2014/main" id="{FCE4C810-650D-F7D9-88B8-D106903F2108}"/>
+              </a:ext>
+            </a:extLst>
+          </p:cNvPr>
+          <p:cNvSpPr txBox="1"/>
+          <p:nvPr/>
+        </p:nvSpPr>
+        <p:spPr>
+          <a:xfrm>
+            <a:off x="1097280" y="1932036"/>
+            <a:ext cx="5178416" cy="461665"/>
+          </a:xfrm>
+          <a:prstGeom prst="rect">
+            <a:avLst/>
+          </a:prstGeom>
+          <a:noFill/>
+        </p:spPr>
+        <p:txBody>
+          <a:bodyPr wrap="square" rtlCol="0">
+            <a:spAutoFit/>
+          </a:bodyPr>
+          <a:lstStyle>
+            <a:defPPr>
+              <a:defRPr lang="en-US"/>
+            </a:defPPr>
+            <a:lvl1pPr marL="0" algn="l" defTabSz="457200" rtl="0" eaLnBrk="1" latinLnBrk="0" hangingPunct="1">
+              <a:defRPr sz="1800" kern="1200">
+                <a:solidFill>
+                  <a:schemeClr val="tx1"/>
+                </a:solidFill>
+                <a:latin typeface="+mn-lt"/>
+                <a:ea typeface="+mn-ea"/>
+                <a:cs typeface="+mn-cs"/>
+              </a:defRPr>
+            </a:lvl1pPr>
+            <a:lvl2pPr marL="457200" algn="l" defTabSz="457200" rtl="0" eaLnBrk="1" latinLnBrk="0" hangingPunct="1">
+              <a:defRPr sz="1800" kern="1200">
+                <a:solidFill>
+                  <a:schemeClr val="tx1"/>
+                </a:solidFill>
+                <a:latin typeface="+mn-lt"/>
+                <a:ea typeface="+mn-ea"/>
+                <a:cs typeface="+mn-cs"/>
+              </a:defRPr>
+            </a:lvl2pPr>
+            <a:lvl3pPr marL="914400" algn="l" defTabSz="457200" rtl="0" eaLnBrk="1" latinLnBrk="0" hangingPunct="1">
+              <a:defRPr sz="1800" kern="1200">
+                <a:solidFill>
+                  <a:schemeClr val="tx1"/>
+                </a:solidFill>
+                <a:latin typeface="+mn-lt"/>
+                <a:ea typeface="+mn-ea"/>
+                <a:cs typeface="+mn-cs"/>
+              </a:defRPr>
+            </a:lvl3pPr>
+            <a:lvl4pPr marL="1371600" algn="l" defTabSz="457200" rtl="0" eaLnBrk="1" latinLnBrk="0" hangingPunct="1">
+              <a:defRPr sz="1800" kern="1200">
+                <a:solidFill>
+                  <a:schemeClr val="tx1"/>
+                </a:solidFill>
+                <a:latin typeface="+mn-lt"/>
+                <a:ea typeface="+mn-ea"/>
+                <a:cs typeface="+mn-cs"/>
+              </a:defRPr>
+            </a:lvl4pPr>
+            <a:lvl5pPr marL="1828800" algn="l" defTabSz="457200" rtl="0" eaLnBrk="1" latinLnBrk="0" hangingPunct="1">
+              <a:defRPr sz="1800" kern="1200">
+                <a:solidFill>
+                  <a:schemeClr val="tx1"/>
+                </a:solidFill>
+                <a:latin typeface="+mn-lt"/>
+                <a:ea typeface="+mn-ea"/>
+                <a:cs typeface="+mn-cs"/>
+              </a:defRPr>
+            </a:lvl5pPr>
+            <a:lvl6pPr marL="2286000" algn="l" defTabSz="457200" rtl="0" eaLnBrk="1" latinLnBrk="0" hangingPunct="1">
+              <a:defRPr sz="1800" kern="1200">
+                <a:solidFill>
+                  <a:schemeClr val="tx1"/>
+                </a:solidFill>
+                <a:latin typeface="+mn-lt"/>
+                <a:ea typeface="+mn-ea"/>
+                <a:cs typeface="+mn-cs"/>
+              </a:defRPr>
+            </a:lvl6pPr>
+            <a:lvl7pPr marL="2743200" algn="l" defTabSz="457200" rtl="0" eaLnBrk="1" latinLnBrk="0" hangingPunct="1">
+              <a:defRPr sz="1800" kern="1200">
+                <a:solidFill>
+                  <a:schemeClr val="tx1"/>
+                </a:solidFill>
+                <a:latin typeface="+mn-lt"/>
+                <a:ea typeface="+mn-ea"/>
+                <a:cs typeface="+mn-cs"/>
+              </a:defRPr>
+            </a:lvl7pPr>
+            <a:lvl8pPr marL="3200400" algn="l" defTabSz="457200" rtl="0" eaLnBrk="1" latinLnBrk="0" hangingPunct="1">
+              <a:defRPr sz="1800" kern="1200">
+                <a:solidFill>
+                  <a:schemeClr val="tx1"/>
+                </a:solidFill>
+                <a:latin typeface="+mn-lt"/>
+                <a:ea typeface="+mn-ea"/>
+                <a:cs typeface="+mn-cs"/>
+              </a:defRPr>
+            </a:lvl8pPr>
+            <a:lvl9pPr marL="3657600" algn="l" defTabSz="457200" rtl="0" eaLnBrk="1" latinLnBrk="0" hangingPunct="1">
+              <a:defRPr sz="1800" kern="1200">
+                <a:solidFill>
+                  <a:schemeClr val="tx1"/>
+                </a:solidFill>
+                <a:latin typeface="+mn-lt"/>
+                <a:ea typeface="+mn-ea"/>
+                <a:cs typeface="+mn-cs"/>
+              </a:defRPr>
+            </a:lvl9pPr>
+          </a:lstStyle>
+          <a:p>
+            <a:r>
+              <a:rPr lang="en-US" sz="2400" dirty="0"/>
+              <a:t>Zip codes with most opioids prescribed</a:t>
+            </a:r>
+          </a:p>
+        </p:txBody>
+      </p:sp>
+      <p:sp>
+        <p:nvSpPr>
+          <p:cNvPr id="6" name="TextBox 5">
+            <a:extLst>
+              <a:ext uri="{FF2B5EF4-FFF2-40B4-BE49-F238E27FC236}">
+                <a16:creationId xmlns:a16="http://schemas.microsoft.com/office/drawing/2014/main" id="{AC815226-D496-F663-240D-7DE9DC3C23CF}"/>
+              </a:ext>
+            </a:extLst>
+          </p:cNvPr>
+          <p:cNvSpPr txBox="1"/>
+          <p:nvPr/>
+        </p:nvSpPr>
+        <p:spPr>
+          <a:xfrm>
+            <a:off x="1919541" y="1399589"/>
+            <a:ext cx="8880951" cy="584775"/>
+          </a:xfrm>
+          <a:prstGeom prst="rect">
+            <a:avLst/>
+          </a:prstGeom>
+          <a:noFill/>
+        </p:spPr>
+        <p:txBody>
+          <a:bodyPr wrap="square">
+            <a:spAutoFit/>
+          </a:bodyPr>
+          <a:lstStyle>
+            <a:defPPr>
+              <a:defRPr lang="en-US"/>
+            </a:defPPr>
+            <a:lvl1pPr marL="0" algn="l" defTabSz="457200" rtl="0" eaLnBrk="1" latinLnBrk="0" hangingPunct="1">
+              <a:defRPr sz="1800" kern="1200">
+                <a:solidFill>
+                  <a:schemeClr val="tx1"/>
+                </a:solidFill>
+                <a:latin typeface="+mn-lt"/>
+                <a:ea typeface="+mn-ea"/>
+                <a:cs typeface="+mn-cs"/>
+              </a:defRPr>
+            </a:lvl1pPr>
+            <a:lvl2pPr marL="457200" algn="l" defTabSz="457200" rtl="0" eaLnBrk="1" latinLnBrk="0" hangingPunct="1">
+              <a:defRPr sz="1800" kern="1200">
+                <a:solidFill>
+                  <a:schemeClr val="tx1"/>
+                </a:solidFill>
+                <a:latin typeface="+mn-lt"/>
+                <a:ea typeface="+mn-ea"/>
+                <a:cs typeface="+mn-cs"/>
+              </a:defRPr>
+            </a:lvl2pPr>
+            <a:lvl3pPr marL="914400" algn="l" defTabSz="457200" rtl="0" eaLnBrk="1" latinLnBrk="0" hangingPunct="1">
+              <a:defRPr sz="1800" kern="1200">
+                <a:solidFill>
+                  <a:schemeClr val="tx1"/>
+                </a:solidFill>
+                <a:latin typeface="+mn-lt"/>
+                <a:ea typeface="+mn-ea"/>
+                <a:cs typeface="+mn-cs"/>
+              </a:defRPr>
+            </a:lvl3pPr>
+            <a:lvl4pPr marL="1371600" algn="l" defTabSz="457200" rtl="0" eaLnBrk="1" latinLnBrk="0" hangingPunct="1">
+              <a:defRPr sz="1800" kern="1200">
+                <a:solidFill>
+                  <a:schemeClr val="tx1"/>
+                </a:solidFill>
+                <a:latin typeface="+mn-lt"/>
+                <a:ea typeface="+mn-ea"/>
+                <a:cs typeface="+mn-cs"/>
+              </a:defRPr>
+            </a:lvl4pPr>
+            <a:lvl5pPr marL="1828800" algn="l" defTabSz="457200" rtl="0" eaLnBrk="1" latinLnBrk="0" hangingPunct="1">
+              <a:defRPr sz="1800" kern="1200">
+                <a:solidFill>
+                  <a:schemeClr val="tx1"/>
+                </a:solidFill>
+                <a:latin typeface="+mn-lt"/>
+                <a:ea typeface="+mn-ea"/>
+                <a:cs typeface="+mn-cs"/>
+              </a:defRPr>
+            </a:lvl5pPr>
+            <a:lvl6pPr marL="2286000" algn="l" defTabSz="457200" rtl="0" eaLnBrk="1" latinLnBrk="0" hangingPunct="1">
+              <a:defRPr sz="1800" kern="1200">
+                <a:solidFill>
+                  <a:schemeClr val="tx1"/>
+                </a:solidFill>
+                <a:latin typeface="+mn-lt"/>
+                <a:ea typeface="+mn-ea"/>
+                <a:cs typeface="+mn-cs"/>
+              </a:defRPr>
+            </a:lvl6pPr>
+            <a:lvl7pPr marL="2743200" algn="l" defTabSz="457200" rtl="0" eaLnBrk="1" latinLnBrk="0" hangingPunct="1">
+              <a:defRPr sz="1800" kern="1200">
+                <a:solidFill>
+                  <a:schemeClr val="tx1"/>
+                </a:solidFill>
+                <a:latin typeface="+mn-lt"/>
+                <a:ea typeface="+mn-ea"/>
+                <a:cs typeface="+mn-cs"/>
+              </a:defRPr>
+            </a:lvl7pPr>
+            <a:lvl8pPr marL="3200400" algn="l" defTabSz="457200" rtl="0" eaLnBrk="1" latinLnBrk="0" hangingPunct="1">
+              <a:defRPr sz="1800" kern="1200">
+                <a:solidFill>
+                  <a:schemeClr val="tx1"/>
+                </a:solidFill>
+                <a:latin typeface="+mn-lt"/>
+                <a:ea typeface="+mn-ea"/>
+                <a:cs typeface="+mn-cs"/>
+              </a:defRPr>
+            </a:lvl8pPr>
+            <a:lvl9pPr marL="3657600" algn="l" defTabSz="457200" rtl="0" eaLnBrk="1" latinLnBrk="0" hangingPunct="1">
+              <a:defRPr sz="1800" kern="1200">
+                <a:solidFill>
+                  <a:schemeClr val="tx1"/>
+                </a:solidFill>
+                <a:latin typeface="+mn-lt"/>
+                <a:ea typeface="+mn-ea"/>
+                <a:cs typeface="+mn-cs"/>
+              </a:defRPr>
+            </a:lvl9pPr>
+          </a:lstStyle>
+          <a:p>
+            <a:endParaRPr lang="en-US" sz="1600" dirty="0"/>
+          </a:p>
+          <a:p>
+            <a:pPr>
+              <a:defRPr sz="2200"/>
+            </a:pPr>
+            <a:endParaRPr lang="en-US" sz="1600" dirty="0"/>
+          </a:p>
+        </p:txBody>
+      </p:sp>
+      <p:pic>
+        <p:nvPicPr>
+          <p:cNvPr id="7" name="Picture 6">
+            <a:extLst>
+              <a:ext uri="{FF2B5EF4-FFF2-40B4-BE49-F238E27FC236}">
+                <a16:creationId xmlns:a16="http://schemas.microsoft.com/office/drawing/2014/main" id="{5145814B-2D43-B272-48FB-939AB9E1ADD7}"/>
+              </a:ext>
+            </a:extLst>
+          </p:cNvPr>
+          <p:cNvPicPr>
+            <a:picLocks noChangeAspect="1" noChangeArrowheads="1"/>
+          </p:cNvPicPr>
+          <p:nvPr/>
+        </p:nvPicPr>
+        <p:blipFill rotWithShape="1">
+          <a:blip r:embed="rId2">
+            <a:extLst>
+              <a:ext uri="{28A0092B-C50C-407E-A947-70E740481C1C}">
+                <a14:useLocalDpi xmlns:a14="http://schemas.microsoft.com/office/drawing/2010/main" val="0"/>
+              </a:ext>
+            </a:extLst>
+          </a:blip>
+          <a:srcRect l="4600" t="5631" b="4221"/>
+          <a:stretch>
+            <a:fillRect/>
+          </a:stretch>
+        </p:blipFill>
+        <p:spPr bwMode="auto">
+          <a:xfrm>
+            <a:off x="6100312" y="1984364"/>
+            <a:ext cx="5055368" cy="4135909"/>
+          </a:xfrm>
+          <a:prstGeom prst="rect">
+            <a:avLst/>
+          </a:prstGeom>
+          <a:noFill/>
+          <a:extLst>
+            <a:ext uri="{909E8E84-426E-40DD-AFC4-6F175D3DCCD1}">
+              <a14:hiddenFill xmlns:a14="http://schemas.microsoft.com/office/drawing/2010/main">
+                <a:solidFill>
+                  <a:srgbClr val="FFFFFF"/>
+                </a:solidFill>
+              </a14:hiddenFill>
+            </a:ext>
+          </a:extLst>
+        </p:spPr>
+      </p:pic>
+      <p:pic>
+        <p:nvPicPr>
+          <p:cNvPr id="8" name="table">
+            <a:extLst>
+              <a:ext uri="{FF2B5EF4-FFF2-40B4-BE49-F238E27FC236}">
+                <a16:creationId xmlns:a16="http://schemas.microsoft.com/office/drawing/2014/main" id="{AD8581B0-DE2E-6782-E83F-FF3A61E59A8B}"/>
+              </a:ext>
+            </a:extLst>
+          </p:cNvPr>
+          <p:cNvPicPr>
+            <a:picLocks noChangeAspect="1"/>
+          </p:cNvPicPr>
+          <p:nvPr/>
+        </p:nvPicPr>
+        <p:blipFill>
+          <a:blip r:embed="rId3"/>
+          <a:stretch>
+            <a:fillRect/>
+          </a:stretch>
+        </p:blipFill>
+        <p:spPr>
+          <a:xfrm>
+            <a:off x="1179974" y="2649032"/>
+            <a:ext cx="2820394" cy="1903227"/>
+          </a:xfrm>
+          <a:prstGeom prst="rect">
+            <a:avLst/>
+          </a:prstGeom>
+        </p:spPr>
+      </p:pic>
+    </p:spTree>
+    <p:extLst>
+      <p:ext uri="{BB962C8B-B14F-4D97-AF65-F5344CB8AC3E}">
+        <p14:creationId xmlns:p14="http://schemas.microsoft.com/office/powerpoint/2010/main" val="3723111427"/>
+      </p:ext>
+    </p:extLst>
+  </p:cSld>
+  <p:clrMapOvr>
+    <a:masterClrMapping/>
+  </p:clrMapOvr>
+</p:sld>
+</file>
+
+<file path=ppt/slides/slide17.xml><?xml version="1.0" encoding="utf-8"?>
+<p:sld xmlns:a="http://schemas.openxmlformats.org/drawingml/2006/main" xmlns:r="http://schemas.openxmlformats.org/officeDocument/2006/relationships" xmlns:p="http://schemas.openxmlformats.org/presentationml/2006/main">
+  <p:cSld>
+    <p:spTree>
+      <p:nvGrpSpPr>
+        <p:cNvPr id="1" name=""/>
+        <p:cNvGrpSpPr/>
+        <p:nvPr/>
+      </p:nvGrpSpPr>
+      <p:grpSpPr>
+        <a:xfrm>
+          <a:off x="0" y="0"/>
+          <a:ext cx="0" cy="0"/>
+          <a:chOff x="0" y="0"/>
+          <a:chExt cx="0" cy="0"/>
+        </a:xfrm>
+      </p:grpSpPr>
+      <p:sp>
+        <p:nvSpPr>
+          <p:cNvPr id="2" name="Title 1">
+            <a:extLst>
+              <a:ext uri="{FF2B5EF4-FFF2-40B4-BE49-F238E27FC236}">
+                <a16:creationId xmlns:a16="http://schemas.microsoft.com/office/drawing/2014/main" id="{F94F9CA9-9127-122A-3F77-B8DED41F2B0D}"/>
+              </a:ext>
+            </a:extLst>
+          </p:cNvPr>
+          <p:cNvSpPr>
+            <a:spLocks noGrp="1"/>
+          </p:cNvSpPr>
+          <p:nvPr>
+            <p:ph type="title"/>
+          </p:nvPr>
+        </p:nvSpPr>
+        <p:spPr/>
+        <p:txBody>
+          <a:bodyPr/>
+          <a:lstStyle/>
+          <a:p>
+            <a:r>
+              <a:rPr lang="en-US" dirty="0"/>
+              <a:t>Conclusion</a:t>
+            </a:r>
+          </a:p>
+        </p:txBody>
+      </p:sp>
+      <p:sp>
+        <p:nvSpPr>
+          <p:cNvPr id="3" name="Content Placeholder 2">
+            <a:extLst>
+              <a:ext uri="{FF2B5EF4-FFF2-40B4-BE49-F238E27FC236}">
+                <a16:creationId xmlns:a16="http://schemas.microsoft.com/office/drawing/2014/main" id="{14A732C7-D169-DCC2-B7C0-20A290AE46E8}"/>
+              </a:ext>
+            </a:extLst>
+          </p:cNvPr>
+          <p:cNvSpPr>
+            <a:spLocks noGrp="1"/>
+          </p:cNvSpPr>
+          <p:nvPr>
+            <p:ph idx="1"/>
+          </p:nvPr>
+        </p:nvSpPr>
+        <p:spPr>
+          <a:xfrm>
+            <a:off x="1097280" y="1845734"/>
+            <a:ext cx="10058400" cy="4097866"/>
+          </a:xfrm>
+        </p:spPr>
+        <p:txBody>
+          <a:bodyPr>
+            <a:normAutofit lnSpcReduction="10000"/>
+          </a:bodyPr>
+          <a:lstStyle/>
+          <a:p>
+            <a:pPr marL="0" indent="0">
+              <a:buNone/>
+            </a:pPr>
+            <a:r>
+              <a:rPr lang="en-US" dirty="0"/>
+              <a:t>Because the prescription claim data was only available as an aggregate over the 2013 – 2017 period, analysis of changes in trends over time was not possible.  A more granular data set would allow for greater awareness of trends.</a:t>
+            </a:r>
+          </a:p>
+          <a:p>
+            <a:pPr marL="0" indent="0">
+              <a:buNone/>
+            </a:pPr>
+            <a:r>
+              <a:rPr lang="en-US" dirty="0"/>
+              <a:t>Additionally, prescriber addresses were tied to their specific zip code rather than a county.  Because some zip codes span multiple counties, any analysis done on claims numbers on a per-county basis will count the entirety of claims from those prescribers, meaning the prescriber’s claims may be double or triple counted.</a:t>
+            </a:r>
+          </a:p>
+          <a:p>
+            <a:pPr marL="0" indent="0">
+              <a:buNone/>
+            </a:pPr>
+            <a:r>
+              <a:rPr lang="en-US" dirty="0"/>
+              <a:t>The data available about overdose deaths does not state whether those deaths are caused by overdoses on opioids or other types of drugs, and does not contain information on whether they were prescribed medications or not.  This additional information would allow for valuable further analysis.</a:t>
+            </a:r>
+          </a:p>
+          <a:p>
+            <a:pPr marL="0" indent="0">
+              <a:buNone/>
+            </a:pPr>
+            <a:r>
+              <a:rPr lang="en-US" dirty="0"/>
+              <a:t>Finally, there are many other factors that may influence the use of opioids that cannot be predicted by or measured with these data sets.  A broader look may find additional facts that help in identifying at-risk areas or proposing solutions to overuse of opioids.</a:t>
+            </a:r>
+          </a:p>
+        </p:txBody>
+      </p:sp>
+    </p:spTree>
+    <p:extLst>
+      <p:ext uri="{BB962C8B-B14F-4D97-AF65-F5344CB8AC3E}">
+        <p14:creationId xmlns:p14="http://schemas.microsoft.com/office/powerpoint/2010/main" val="2597692699"/>
+      </p:ext>
+    </p:extLst>
+  </p:cSld>
+  <p:clrMapOvr>
+    <a:masterClrMapping/>
+  </p:clrMapOvr>
+</p:sld>
+</file>
+
+<file path=ppt/slides/slide18.xml><?xml version="1.0" encoding="utf-8"?>
+<p:sld xmlns:a="http://schemas.openxmlformats.org/drawingml/2006/main" xmlns:r="http://schemas.openxmlformats.org/officeDocument/2006/relationships" xmlns:p="http://schemas.openxmlformats.org/presentationml/2006/main">
+  <p:cSld>
+    <p:spTree>
+      <p:nvGrpSpPr>
+        <p:cNvPr id="1" name=""/>
+        <p:cNvGrpSpPr/>
+        <p:nvPr/>
+      </p:nvGrpSpPr>
+      <p:grpSpPr>
+        <a:xfrm>
+          <a:off x="0" y="0"/>
+          <a:ext cx="0" cy="0"/>
+          <a:chOff x="0" y="0"/>
+          <a:chExt cx="0" cy="0"/>
+        </a:xfrm>
+      </p:grpSpPr>
+      <p:sp>
+        <p:nvSpPr>
+          <p:cNvPr id="2" name="Title 1">
+            <a:extLst>
+              <a:ext uri="{FF2B5EF4-FFF2-40B4-BE49-F238E27FC236}">
+                <a16:creationId xmlns:a16="http://schemas.microsoft.com/office/drawing/2014/main" id="{5C5812B4-A8DA-F5CD-6937-F3C9806BC526}"/>
+              </a:ext>
+            </a:extLst>
+          </p:cNvPr>
+          <p:cNvSpPr>
+            <a:spLocks noGrp="1"/>
+          </p:cNvSpPr>
+          <p:nvPr>
+            <p:ph type="title"/>
+          </p:nvPr>
+        </p:nvSpPr>
+        <p:spPr/>
+        <p:txBody>
+          <a:bodyPr/>
+          <a:lstStyle/>
+          <a:p>
+            <a:r>
+              <a:rPr lang="en-US" dirty="0"/>
+              <a:t>Further Notes About the Data</a:t>
+            </a:r>
+          </a:p>
+        </p:txBody>
+      </p:sp>
+      <p:sp>
+        <p:nvSpPr>
+          <p:cNvPr id="3" name="Content Placeholder 2">
+            <a:extLst>
+              <a:ext uri="{FF2B5EF4-FFF2-40B4-BE49-F238E27FC236}">
+                <a16:creationId xmlns:a16="http://schemas.microsoft.com/office/drawing/2014/main" id="{BBF36D3E-B7D9-46AB-3420-E7C5B36A93B3}"/>
+              </a:ext>
+            </a:extLst>
+          </p:cNvPr>
+          <p:cNvSpPr>
+            <a:spLocks noGrp="1"/>
+          </p:cNvSpPr>
+          <p:nvPr>
+            <p:ph idx="1"/>
+          </p:nvPr>
+        </p:nvSpPr>
+        <p:spPr/>
+        <p:txBody>
+          <a:bodyPr/>
+          <a:lstStyle/>
+          <a:p>
+            <a:r>
+              <a:rPr lang="en-US" dirty="0"/>
+              <a:t>Data on prescription claims, prescriber locations, and overdose deaths were retrieved from the Centers for Medicare &amp; Medicaid Services, and supplemented by unemployment and population data from the Tennessee Department of Economic and Community Development (ECD).</a:t>
+            </a:r>
+          </a:p>
+          <a:p>
+            <a:r>
+              <a:rPr lang="en-US" dirty="0"/>
+              <a:t>Data on prescription claims covers the years 2013 – 2017 as an aggregated amount.</a:t>
+            </a:r>
+          </a:p>
+          <a:p>
+            <a:r>
+              <a:rPr lang="en-US" dirty="0"/>
+              <a:t>Overdose death data covers the years 2015 – 2018.</a:t>
+            </a:r>
+          </a:p>
+          <a:p>
+            <a:r>
+              <a:rPr lang="en-US" dirty="0"/>
+              <a:t>Unemployment data covers the years 2011 – 2017.</a:t>
+            </a:r>
+          </a:p>
+        </p:txBody>
+      </p:sp>
+    </p:spTree>
+    <p:extLst>
+      <p:ext uri="{BB962C8B-B14F-4D97-AF65-F5344CB8AC3E}">
+        <p14:creationId xmlns:p14="http://schemas.microsoft.com/office/powerpoint/2010/main" val="1230637454"/>
+      </p:ext>
+    </p:extLst>
+  </p:cSld>
+  <p:clrMapOvr>
+    <a:masterClrMapping/>
+  </p:clrMapOvr>
+</p:sld>
+</file>
+
+<file path=ppt/slides/slide2.xml><?xml version="1.0" encoding="utf-8"?>
+<p:sld xmlns:a="http://schemas.openxmlformats.org/drawingml/2006/main" xmlns:r="http://schemas.openxmlformats.org/officeDocument/2006/relationships" xmlns:p="http://schemas.openxmlformats.org/presentationml/2006/main">
+  <p:cSld>
+    <p:spTree>
+      <p:nvGrpSpPr>
+        <p:cNvPr id="1" name=""/>
+        <p:cNvGrpSpPr/>
+        <p:nvPr/>
+      </p:nvGrpSpPr>
+      <p:grpSpPr>
+        <a:xfrm>
+          <a:off x="0" y="0"/>
+          <a:ext cx="0" cy="0"/>
+          <a:chOff x="0" y="0"/>
+          <a:chExt cx="0" cy="0"/>
+        </a:xfrm>
+      </p:grpSpPr>
+      <p:sp>
+        <p:nvSpPr>
+          <p:cNvPr id="2" name="Title 1">
+            <a:extLst>
+              <a:ext uri="{FF2B5EF4-FFF2-40B4-BE49-F238E27FC236}">
+                <a16:creationId xmlns:a16="http://schemas.microsoft.com/office/drawing/2014/main" id="{6B9BEB3E-715A-06DB-5F47-38C4545A8E98}"/>
+              </a:ext>
+            </a:extLst>
+          </p:cNvPr>
+          <p:cNvSpPr>
+            <a:spLocks noGrp="1"/>
+          </p:cNvSpPr>
+          <p:nvPr>
+            <p:ph type="title"/>
+          </p:nvPr>
+        </p:nvSpPr>
+        <p:spPr/>
+        <p:txBody>
+          <a:bodyPr/>
+          <a:lstStyle/>
+          <a:p>
+            <a:r>
+              <a:rPr lang="en-US" dirty="0"/>
+              <a:t>Intro</a:t>
+            </a:r>
+          </a:p>
+        </p:txBody>
+      </p:sp>
+      <p:sp>
+        <p:nvSpPr>
+          <p:cNvPr id="3" name="Content Placeholder 2">
+            <a:extLst>
+              <a:ext uri="{FF2B5EF4-FFF2-40B4-BE49-F238E27FC236}">
+                <a16:creationId xmlns:a16="http://schemas.microsoft.com/office/drawing/2014/main" id="{6D5E9348-8E53-53FD-5028-5F84D0292444}"/>
+              </a:ext>
+            </a:extLst>
+          </p:cNvPr>
+          <p:cNvSpPr>
+            <a:spLocks noGrp="1"/>
+          </p:cNvSpPr>
+          <p:nvPr>
+            <p:ph idx="1"/>
+          </p:nvPr>
+        </p:nvSpPr>
+        <p:spPr/>
+        <p:txBody>
+          <a:bodyPr/>
+          <a:lstStyle/>
+          <a:p>
+            <a:r>
+              <a:rPr lang="en-US" dirty="0"/>
+              <a:t>Information from the Centers for Medicare &amp; Medicaid Services and the Tennessee Department of Economic and Community Development were combined to search for possible trends in opioid prescriptions, overdose deaths, and unemployment across the period of 2013 to 2018.</a:t>
+            </a:r>
+          </a:p>
+          <a:p>
+            <a:r>
+              <a:rPr lang="en-US" dirty="0"/>
+              <a:t>Our team examined a variety of possible relationships between these variables to explore how opioid use has changed in the state.</a:t>
+            </a:r>
+          </a:p>
+          <a:p>
+            <a:endParaRPr lang="en-US" dirty="0"/>
+          </a:p>
+        </p:txBody>
+      </p:sp>
+    </p:spTree>
+    <p:extLst>
+      <p:ext uri="{BB962C8B-B14F-4D97-AF65-F5344CB8AC3E}">
+        <p14:creationId xmlns:p14="http://schemas.microsoft.com/office/powerpoint/2010/main" val="1491463004"/>
       </p:ext>
     </p:extLst>
   </p:cSld>
@@ -3905,378 +5767,63 @@
           <a:chExt cx="0" cy="0"/>
         </a:xfrm>
       </p:grpSpPr>
-      <p:sp useBgFill="1">
-        <p:nvSpPr>
-          <p:cNvPr id="12" name="Rectangle 11">
+      <p:sp>
+        <p:nvSpPr>
+          <p:cNvPr id="2" name="Title 1">
             <a:extLst>
               <a:ext uri="{FF2B5EF4-FFF2-40B4-BE49-F238E27FC236}">
-                <a16:creationId xmlns:a16="http://schemas.microsoft.com/office/drawing/2014/main" id="{32AEEBC8-9D30-42EF-95F2-386C2653FBF0}"/>
-              </a:ext>
-              <a:ext uri="{C183D7F6-B498-43B3-948B-1728B52AA6E4}">
-                <adec:decorative xmlns:adec="http://schemas.microsoft.com/office/drawing/2017/decorative" val="1"/>
+                <a16:creationId xmlns:a16="http://schemas.microsoft.com/office/drawing/2014/main" id="{8C341561-9E29-5F91-53B1-51DA25C16055}"/>
               </a:ext>
             </a:extLst>
           </p:cNvPr>
           <p:cNvSpPr>
-            <a:spLocks noGrp="1" noRot="1" noChangeAspect="1" noMove="1" noResize="1" noEditPoints="1" noAdjustHandles="1" noChangeArrowheads="1" noChangeShapeType="1" noTextEdit="1"/>
-          </p:cNvSpPr>
-          <p:nvPr>
-            <p:extLst>
-              <p:ext uri="{386F3935-93C4-4BCD-93E2-E3B085C9AB24}">
-                <p16:designElem xmlns:p16="http://schemas.microsoft.com/office/powerpoint/2015/main" val="1"/>
-              </p:ext>
-            </p:extLst>
-          </p:nvPr>
-        </p:nvSpPr>
-        <p:spPr>
-          <a:xfrm>
-            <a:off x="0" y="0"/>
-            <a:ext cx="12192000" cy="6858000"/>
-          </a:xfrm>
-          <a:prstGeom prst="rect">
-            <a:avLst/>
-          </a:prstGeom>
-          <a:ln>
-            <a:noFill/>
-          </a:ln>
-        </p:spPr>
-        <p:style>
-          <a:lnRef idx="2">
-            <a:schemeClr val="accent1">
-              <a:shade val="50000"/>
-            </a:schemeClr>
-          </a:lnRef>
-          <a:fillRef idx="1">
-            <a:schemeClr val="accent1"/>
-          </a:fillRef>
-          <a:effectRef idx="0">
-            <a:schemeClr val="accent1"/>
-          </a:effectRef>
-          <a:fontRef idx="minor">
-            <a:schemeClr val="lt1"/>
-          </a:fontRef>
-        </p:style>
-        <p:txBody>
-          <a:bodyPr rtlCol="0" anchor="ctr"/>
-          <a:lstStyle/>
-          <a:p>
-            <a:pPr algn="ctr"/>
-            <a:endParaRPr lang="en-US"/>
-          </a:p>
-        </p:txBody>
-      </p:sp>
-      <p:sp>
-        <p:nvSpPr>
-          <p:cNvPr id="2" name="Title 1">
+            <a:spLocks noGrp="1"/>
+          </p:cNvSpPr>
+          <p:nvPr>
+            <p:ph type="title"/>
+          </p:nvPr>
+        </p:nvSpPr>
+        <p:spPr>
+          <a:xfrm>
+            <a:off x="630936" y="639520"/>
+            <a:ext cx="4023360" cy="1105567"/>
+          </a:xfrm>
+        </p:spPr>
+        <p:txBody>
+          <a:bodyPr vert="horz" lIns="91440" tIns="45720" rIns="91440" bIns="45720" rtlCol="0" anchor="b">
+            <a:normAutofit fontScale="90000"/>
+          </a:bodyPr>
+          <a:lstStyle/>
+          <a:p>
+            <a:r>
+              <a:rPr lang="en-US" sz="4400" kern="1200" dirty="0">
+                <a:solidFill>
+                  <a:schemeClr val="tx1"/>
+                </a:solidFill>
+                <a:latin typeface="+mj-lt"/>
+                <a:ea typeface="+mj-ea"/>
+                <a:cs typeface="+mj-cs"/>
+              </a:rPr>
+              <a:t>Deaths Over Time</a:t>
+            </a:r>
+          </a:p>
+        </p:txBody>
+      </p:sp>
+      <p:pic>
+        <p:nvPicPr>
+          <p:cNvPr id="6" name="Content Placeholder 5" descr="A graph with a line&#10;&#10;AI-generated content may be incorrect.">
             <a:extLst>
               <a:ext uri="{FF2B5EF4-FFF2-40B4-BE49-F238E27FC236}">
-                <a16:creationId xmlns:a16="http://schemas.microsoft.com/office/drawing/2014/main" id="{A5A4085D-CF78-4B74-A1C5-6EE9C3F8EB07}"/>
-              </a:ext>
-            </a:extLst>
-          </p:cNvPr>
-          <p:cNvSpPr>
-            <a:spLocks noGrp="1"/>
-          </p:cNvSpPr>
-          <p:nvPr>
-            <p:ph type="title"/>
-          </p:nvPr>
-        </p:nvSpPr>
-        <p:spPr>
-          <a:xfrm>
-            <a:off x="630936" y="502920"/>
-            <a:ext cx="3419856" cy="1463040"/>
-          </a:xfrm>
-        </p:spPr>
-        <p:txBody>
-          <a:bodyPr anchor="ctr">
-            <a:normAutofit/>
-          </a:bodyPr>
-          <a:lstStyle/>
-          <a:p>
-            <a:r>
-              <a:rPr lang="en-US" sz="4800"/>
-              <a:t>Deaths Over Time</a:t>
-            </a:r>
-          </a:p>
-        </p:txBody>
-      </p:sp>
-      <p:sp>
-        <p:nvSpPr>
-          <p:cNvPr id="14" name="sketch line">
-            <a:extLst>
-              <a:ext uri="{FF2B5EF4-FFF2-40B4-BE49-F238E27FC236}">
-                <a16:creationId xmlns:a16="http://schemas.microsoft.com/office/drawing/2014/main" id="{2E92FA66-67D7-4CB4-94D3-E643A9AD4757}"/>
-              </a:ext>
-              <a:ext uri="{C183D7F6-B498-43B3-948B-1728B52AA6E4}">
-                <adec:decorative xmlns:adec="http://schemas.microsoft.com/office/drawing/2017/decorative" val="1"/>
-              </a:ext>
-            </a:extLst>
-          </p:cNvPr>
-          <p:cNvSpPr>
-            <a:spLocks noGrp="1" noRot="1" noChangeAspect="1" noMove="1" noResize="1" noEditPoints="1" noAdjustHandles="1" noChangeArrowheads="1" noChangeShapeType="1" noTextEdit="1"/>
-          </p:cNvSpPr>
-          <p:nvPr>
-            <p:extLst>
-              <p:ext uri="{386F3935-93C4-4BCD-93E2-E3B085C9AB24}">
-                <p16:designElem xmlns:p16="http://schemas.microsoft.com/office/powerpoint/2015/main" val="1"/>
-              </p:ext>
-            </p:extLst>
-          </p:nvPr>
-        </p:nvSpPr>
-        <p:spPr>
-          <a:xfrm rot="5400000">
-            <a:off x="3566159" y="1225296"/>
-            <a:ext cx="1554480" cy="18288"/>
-          </a:xfrm>
-          <a:custGeom>
-            <a:avLst/>
-            <a:gdLst>
-              <a:gd name="connsiteX0" fmla="*/ 0 w 1554480"/>
-              <a:gd name="connsiteY0" fmla="*/ 0 h 18288"/>
-              <a:gd name="connsiteX1" fmla="*/ 549250 w 1554480"/>
-              <a:gd name="connsiteY1" fmla="*/ 0 h 18288"/>
-              <a:gd name="connsiteX2" fmla="*/ 1082954 w 1554480"/>
-              <a:gd name="connsiteY2" fmla="*/ 0 h 18288"/>
-              <a:gd name="connsiteX3" fmla="*/ 1554480 w 1554480"/>
-              <a:gd name="connsiteY3" fmla="*/ 0 h 18288"/>
-              <a:gd name="connsiteX4" fmla="*/ 1554480 w 1554480"/>
-              <a:gd name="connsiteY4" fmla="*/ 18288 h 18288"/>
-              <a:gd name="connsiteX5" fmla="*/ 1067410 w 1554480"/>
-              <a:gd name="connsiteY5" fmla="*/ 18288 h 18288"/>
-              <a:gd name="connsiteX6" fmla="*/ 549250 w 1554480"/>
-              <a:gd name="connsiteY6" fmla="*/ 18288 h 18288"/>
-              <a:gd name="connsiteX7" fmla="*/ 0 w 1554480"/>
-              <a:gd name="connsiteY7" fmla="*/ 18288 h 18288"/>
-              <a:gd name="connsiteX8" fmla="*/ 0 w 1554480"/>
-              <a:gd name="connsiteY8" fmla="*/ 0 h 18288"/>
-            </a:gdLst>
-            <a:ahLst/>
-            <a:cxnLst>
-              <a:cxn ang="0">
-                <a:pos x="connsiteX0" y="connsiteY0"/>
-              </a:cxn>
-              <a:cxn ang="0">
-                <a:pos x="connsiteX1" y="connsiteY1"/>
-              </a:cxn>
-              <a:cxn ang="0">
-                <a:pos x="connsiteX2" y="connsiteY2"/>
-              </a:cxn>
-              <a:cxn ang="0">
-                <a:pos x="connsiteX3" y="connsiteY3"/>
-              </a:cxn>
-              <a:cxn ang="0">
-                <a:pos x="connsiteX4" y="connsiteY4"/>
-              </a:cxn>
-              <a:cxn ang="0">
-                <a:pos x="connsiteX5" y="connsiteY5"/>
-              </a:cxn>
-              <a:cxn ang="0">
-                <a:pos x="connsiteX6" y="connsiteY6"/>
-              </a:cxn>
-              <a:cxn ang="0">
-                <a:pos x="connsiteX7" y="connsiteY7"/>
-              </a:cxn>
-              <a:cxn ang="0">
-                <a:pos x="connsiteX8" y="connsiteY8"/>
-              </a:cxn>
-            </a:cxnLst>
-            <a:rect l="l" t="t" r="r" b="b"/>
-            <a:pathLst>
-              <a:path w="1554480" h="18288" fill="none" extrusionOk="0">
-                <a:moveTo>
-                  <a:pt x="0" y="0"/>
-                </a:moveTo>
-                <a:cubicBezTo>
-                  <a:pt x="114141" y="-19864"/>
-                  <a:pt x="345055" y="-1657"/>
-                  <a:pt x="549250" y="0"/>
-                </a:cubicBezTo>
-                <a:cubicBezTo>
-                  <a:pt x="753445" y="1657"/>
-                  <a:pt x="862292" y="-5674"/>
-                  <a:pt x="1082954" y="0"/>
-                </a:cubicBezTo>
-                <a:cubicBezTo>
-                  <a:pt x="1303616" y="5674"/>
-                  <a:pt x="1363530" y="4537"/>
-                  <a:pt x="1554480" y="0"/>
-                </a:cubicBezTo>
-                <a:cubicBezTo>
-                  <a:pt x="1554963" y="7176"/>
-                  <a:pt x="1553909" y="13682"/>
-                  <a:pt x="1554480" y="18288"/>
-                </a:cubicBezTo>
-                <a:cubicBezTo>
-                  <a:pt x="1338847" y="6127"/>
-                  <a:pt x="1215066" y="37851"/>
-                  <a:pt x="1067410" y="18288"/>
-                </a:cubicBezTo>
-                <a:cubicBezTo>
-                  <a:pt x="919754" y="-1275"/>
-                  <a:pt x="800465" y="3080"/>
-                  <a:pt x="549250" y="18288"/>
-                </a:cubicBezTo>
-                <a:cubicBezTo>
-                  <a:pt x="298035" y="33496"/>
-                  <a:pt x="158868" y="22769"/>
-                  <a:pt x="0" y="18288"/>
-                </a:cubicBezTo>
-                <a:cubicBezTo>
-                  <a:pt x="-655" y="13237"/>
-                  <a:pt x="709" y="4645"/>
-                  <a:pt x="0" y="0"/>
-                </a:cubicBezTo>
-                <a:close/>
-              </a:path>
-              <a:path w="1554480" h="18288" stroke="0" extrusionOk="0">
-                <a:moveTo>
-                  <a:pt x="0" y="0"/>
-                </a:moveTo>
-                <a:cubicBezTo>
-                  <a:pt x="249941" y="-58"/>
-                  <a:pt x="367334" y="23448"/>
-                  <a:pt x="502615" y="0"/>
-                </a:cubicBezTo>
-                <a:cubicBezTo>
-                  <a:pt x="637897" y="-23448"/>
-                  <a:pt x="813653" y="-20418"/>
-                  <a:pt x="974141" y="0"/>
-                </a:cubicBezTo>
-                <a:cubicBezTo>
-                  <a:pt x="1134629" y="20418"/>
-                  <a:pt x="1268772" y="6288"/>
-                  <a:pt x="1554480" y="0"/>
-                </a:cubicBezTo>
-                <a:cubicBezTo>
-                  <a:pt x="1554917" y="7222"/>
-                  <a:pt x="1555359" y="13299"/>
-                  <a:pt x="1554480" y="18288"/>
-                </a:cubicBezTo>
-                <a:cubicBezTo>
-                  <a:pt x="1336087" y="12172"/>
-                  <a:pt x="1310024" y="19759"/>
-                  <a:pt x="1067410" y="18288"/>
-                </a:cubicBezTo>
-                <a:cubicBezTo>
-                  <a:pt x="824796" y="16818"/>
-                  <a:pt x="787902" y="34647"/>
-                  <a:pt x="518160" y="18288"/>
-                </a:cubicBezTo>
-                <a:cubicBezTo>
-                  <a:pt x="248418" y="1930"/>
-                  <a:pt x="133160" y="9205"/>
-                  <a:pt x="0" y="18288"/>
-                </a:cubicBezTo>
-                <a:cubicBezTo>
-                  <a:pt x="-643" y="9451"/>
-                  <a:pt x="-340" y="7114"/>
-                  <a:pt x="0" y="0"/>
-                </a:cubicBezTo>
-                <a:close/>
-              </a:path>
-            </a:pathLst>
-          </a:custGeom>
-          <a:solidFill>
-            <a:schemeClr val="accent2"/>
-          </a:solidFill>
-          <a:ln w="41275" cap="rnd">
-            <a:solidFill>
-              <a:schemeClr val="accent2"/>
-            </a:solidFill>
-            <a:round/>
-            <a:extLst>
-              <a:ext uri="{C807C97D-BFC1-408E-A445-0C87EB9F89A2}">
-                <ask:lineSketchStyleProps xmlns:ask="http://schemas.microsoft.com/office/drawing/2018/sketchyshapes" sd="1219033472">
-                  <a:prstGeom prst="rect">
-                    <a:avLst/>
-                  </a:prstGeom>
-                  <ask:type>
-                    <ask:lineSketchFreehand/>
-                  </ask:type>
-                </ask:lineSketchStyleProps>
-              </a:ext>
-            </a:extLst>
-          </a:ln>
-        </p:spPr>
-        <p:style>
-          <a:lnRef idx="2">
-            <a:schemeClr val="accent1">
-              <a:shade val="50000"/>
-            </a:schemeClr>
-          </a:lnRef>
-          <a:fillRef idx="1">
-            <a:schemeClr val="accent1"/>
-          </a:fillRef>
-          <a:effectRef idx="0">
-            <a:schemeClr val="accent1"/>
-          </a:effectRef>
-          <a:fontRef idx="minor">
-            <a:schemeClr val="lt1"/>
-          </a:fontRef>
-        </p:style>
-        <p:txBody>
-          <a:bodyPr rtlCol="0" anchor="ctr"/>
-          <a:lstStyle/>
-          <a:p>
-            <a:pPr algn="ctr"/>
-            <a:endParaRPr lang="en-US"/>
-          </a:p>
-        </p:txBody>
-      </p:sp>
-      <p:sp>
-        <p:nvSpPr>
-          <p:cNvPr id="9" name="Content Placeholder 8">
-            <a:extLst>
-              <a:ext uri="{FF2B5EF4-FFF2-40B4-BE49-F238E27FC236}">
-                <a16:creationId xmlns:a16="http://schemas.microsoft.com/office/drawing/2014/main" id="{FEE5AB57-5C97-3F4D-DF10-7F5DFBA04160}"/>
-              </a:ext>
-            </a:extLst>
-          </p:cNvPr>
-          <p:cNvSpPr>
-            <a:spLocks noGrp="1"/>
-          </p:cNvSpPr>
-          <p:nvPr>
-            <p:ph idx="1"/>
-          </p:nvPr>
-        </p:nvSpPr>
-        <p:spPr>
-          <a:xfrm>
-            <a:off x="4654295" y="502920"/>
-            <a:ext cx="6894576" cy="1463040"/>
-          </a:xfrm>
-        </p:spPr>
-        <p:txBody>
-          <a:bodyPr anchor="ctr">
-            <a:normAutofit/>
-          </a:bodyPr>
-          <a:lstStyle/>
-          <a:p>
-            <a:r>
-              <a:rPr lang="en-US" sz="2200" dirty="0"/>
-              <a:t>Davidson and Knox have major increases in overdose deaths possible due to the population</a:t>
-            </a:r>
-          </a:p>
-          <a:p>
-            <a:r>
-              <a:rPr lang="en-US" sz="2200" dirty="0"/>
-              <a:t>Shelby however seem to buck that trend with downward trend in overdose deaths</a:t>
-            </a:r>
-          </a:p>
-        </p:txBody>
-      </p:sp>
-      <p:pic>
-        <p:nvPicPr>
-          <p:cNvPr id="5" name="Content Placeholder 4" descr="A map of the state of montana&#10;&#10;AI-generated content may be incorrect.">
-            <a:extLst>
-              <a:ext uri="{FF2B5EF4-FFF2-40B4-BE49-F238E27FC236}">
-                <a16:creationId xmlns:a16="http://schemas.microsoft.com/office/drawing/2014/main" id="{74A46509-EE8C-B49D-7F52-8726A98228D0}"/>
+                <a16:creationId xmlns:a16="http://schemas.microsoft.com/office/drawing/2014/main" id="{5EF31001-8C0C-C463-4816-B601F671207F}"/>
               </a:ext>
             </a:extLst>
           </p:cNvPr>
           <p:cNvPicPr>
-            <a:picLocks noChangeAspect="1"/>
+            <a:picLocks noGrp="1" noChangeAspect="1"/>
           </p:cNvPicPr>
-          <p:nvPr/>
+          <p:nvPr>
+            <p:ph sz="half" idx="1"/>
+          </p:nvPr>
         </p:nvPicPr>
         <p:blipFill>
           <a:blip r:embed="rId2">
@@ -4292,18 +5839,59 @@
         </p:blipFill>
         <p:spPr>
           <a:xfrm>
-            <a:off x="630936" y="2701157"/>
-            <a:ext cx="10917936" cy="3138910"/>
+            <a:off x="4654296" y="736548"/>
+            <a:ext cx="6903720" cy="5384904"/>
           </a:xfrm>
           <a:prstGeom prst="rect">
             <a:avLst/>
           </a:prstGeom>
         </p:spPr>
       </p:pic>
+      <p:sp>
+        <p:nvSpPr>
+          <p:cNvPr id="4" name="Content Placeholder 3">
+            <a:extLst>
+              <a:ext uri="{FF2B5EF4-FFF2-40B4-BE49-F238E27FC236}">
+                <a16:creationId xmlns:a16="http://schemas.microsoft.com/office/drawing/2014/main" id="{4CFB5B3C-1324-386B-83DB-97A83149D2A5}"/>
+              </a:ext>
+            </a:extLst>
+          </p:cNvPr>
+          <p:cNvSpPr>
+            <a:spLocks noGrp="1"/>
+          </p:cNvSpPr>
+          <p:nvPr>
+            <p:ph sz="half" idx="2"/>
+          </p:nvPr>
+        </p:nvSpPr>
+        <p:spPr>
+          <a:xfrm>
+            <a:off x="630936" y="2807208"/>
+            <a:ext cx="3429000" cy="3410712"/>
+          </a:xfrm>
+        </p:spPr>
+        <p:txBody>
+          <a:bodyPr vert="horz" lIns="91440" tIns="45720" rIns="91440" bIns="45720" rtlCol="0" anchor="t">
+            <a:normAutofit/>
+          </a:bodyPr>
+          <a:lstStyle/>
+          <a:p>
+            <a:r>
+              <a:rPr lang="en-US" sz="2200" dirty="0"/>
+              <a:t>The rate at which overdose deaths  increasing is slowing down</a:t>
+            </a:r>
+          </a:p>
+          <a:p>
+            <a:r>
+              <a:rPr lang="en-US" sz="2200" dirty="0"/>
+              <a:t>The increase might be due to population growth</a:t>
+            </a:r>
+          </a:p>
+        </p:txBody>
+      </p:sp>
     </p:spTree>
     <p:extLst>
       <p:ext uri="{BB962C8B-B14F-4D97-AF65-F5344CB8AC3E}">
-        <p14:creationId xmlns:p14="http://schemas.microsoft.com/office/powerpoint/2010/main" val="3272564374"/>
+        <p14:creationId xmlns:p14="http://schemas.microsoft.com/office/powerpoint/2010/main" val="2015983476"/>
       </p:ext>
     </p:extLst>
   </p:cSld>
@@ -4338,72 +5926,47 @@
           <a:chExt cx="0" cy="0"/>
         </a:xfrm>
       </p:grpSpPr>
-      <p:sp useBgFill="1">
-        <p:nvSpPr>
-          <p:cNvPr id="16" name="Rectangle 15">
+      <p:sp>
+        <p:nvSpPr>
+          <p:cNvPr id="2" name="Title 1">
             <a:extLst>
               <a:ext uri="{FF2B5EF4-FFF2-40B4-BE49-F238E27FC236}">
-                <a16:creationId xmlns:a16="http://schemas.microsoft.com/office/drawing/2014/main" id="{32AEEBC8-9D30-42EF-95F2-386C2653FBF0}"/>
-              </a:ext>
-              <a:ext uri="{C183D7F6-B498-43B3-948B-1728B52AA6E4}">
-                <adec:decorative xmlns:adec="http://schemas.microsoft.com/office/drawing/2017/decorative" val="1"/>
+                <a16:creationId xmlns:a16="http://schemas.microsoft.com/office/drawing/2014/main" id="{A5A4085D-CF78-4B74-A1C5-6EE9C3F8EB07}"/>
               </a:ext>
             </a:extLst>
           </p:cNvPr>
           <p:cNvSpPr>
-            <a:spLocks noGrp="1" noRot="1" noChangeAspect="1" noMove="1" noResize="1" noEditPoints="1" noAdjustHandles="1" noChangeArrowheads="1" noChangeShapeType="1" noTextEdit="1"/>
-          </p:cNvSpPr>
-          <p:nvPr>
-            <p:extLst>
-              <p:ext uri="{386F3935-93C4-4BCD-93E2-E3B085C9AB24}">
-                <p16:designElem xmlns:p16="http://schemas.microsoft.com/office/powerpoint/2015/main" val="1"/>
-              </p:ext>
-            </p:extLst>
-          </p:nvPr>
-        </p:nvSpPr>
-        <p:spPr>
-          <a:xfrm>
-            <a:off x="0" y="0"/>
-            <a:ext cx="12192000" cy="6858000"/>
-          </a:xfrm>
-          <a:prstGeom prst="rect">
-            <a:avLst/>
-          </a:prstGeom>
-          <a:ln>
-            <a:noFill/>
-          </a:ln>
-        </p:spPr>
-        <p:style>
-          <a:lnRef idx="2">
-            <a:schemeClr val="accent1">
-              <a:shade val="50000"/>
-            </a:schemeClr>
-          </a:lnRef>
-          <a:fillRef idx="1">
-            <a:schemeClr val="accent1"/>
-          </a:fillRef>
-          <a:effectRef idx="0">
-            <a:schemeClr val="accent1"/>
-          </a:effectRef>
-          <a:fontRef idx="minor">
-            <a:schemeClr val="lt1"/>
-          </a:fontRef>
-        </p:style>
-        <p:txBody>
-          <a:bodyPr rtlCol="0" anchor="ctr"/>
-          <a:lstStyle/>
-          <a:p>
-            <a:pPr algn="ctr"/>
-            <a:endParaRPr lang="en-US"/>
-          </a:p>
-        </p:txBody>
-      </p:sp>
-      <p:sp>
-        <p:nvSpPr>
-          <p:cNvPr id="2" name="Title 1">
+            <a:spLocks noGrp="1"/>
+          </p:cNvSpPr>
+          <p:nvPr>
+            <p:ph type="title"/>
+          </p:nvPr>
+        </p:nvSpPr>
+        <p:spPr>
+          <a:xfrm>
+            <a:off x="630935" y="502920"/>
+            <a:ext cx="4906979" cy="1463040"/>
+          </a:xfrm>
+        </p:spPr>
+        <p:txBody>
+          <a:bodyPr anchor="ctr">
+            <a:normAutofit/>
+          </a:bodyPr>
+          <a:lstStyle/>
+          <a:p>
+            <a:r>
+              <a:rPr lang="en-US" sz="4800" dirty="0"/>
+              <a:t>Deaths Over Time</a:t>
+            </a:r>
+          </a:p>
+        </p:txBody>
+      </p:sp>
+      <p:sp>
+        <p:nvSpPr>
+          <p:cNvPr id="9" name="Content Placeholder 8">
             <a:extLst>
               <a:ext uri="{FF2B5EF4-FFF2-40B4-BE49-F238E27FC236}">
-                <a16:creationId xmlns:a16="http://schemas.microsoft.com/office/drawing/2014/main" id="{6DB6E582-B546-D7AC-3206-374F982EFEA5}"/>
+                <a16:creationId xmlns:a16="http://schemas.microsoft.com/office/drawing/2014/main" id="{FEE5AB57-5C97-3F4D-DF10-7F5DFBA04160}"/>
               </a:ext>
             </a:extLst>
           </p:cNvPr>
@@ -4411,292 +5974,40 @@
             <a:spLocks noGrp="1"/>
           </p:cNvSpPr>
           <p:nvPr>
-            <p:ph type="title"/>
-          </p:nvPr>
-        </p:nvSpPr>
-        <p:spPr>
-          <a:xfrm>
-            <a:off x="630936" y="502920"/>
-            <a:ext cx="3419856" cy="1463040"/>
+            <p:ph idx="1"/>
+          </p:nvPr>
+        </p:nvSpPr>
+        <p:spPr>
+          <a:xfrm>
+            <a:off x="758434" y="1816566"/>
+            <a:ext cx="9911711" cy="1164893"/>
           </a:xfrm>
         </p:spPr>
         <p:txBody>
           <a:bodyPr anchor="ctr">
-            <a:normAutofit/>
+            <a:normAutofit lnSpcReduction="10000"/>
           </a:bodyPr>
           <a:lstStyle/>
           <a:p>
             <a:r>
-              <a:rPr lang="en-US" sz="3700"/>
-              <a:t>Unemployment</a:t>
-            </a:r>
-          </a:p>
-        </p:txBody>
-      </p:sp>
-      <p:sp>
-        <p:nvSpPr>
-          <p:cNvPr id="18" name="sketch line">
+              <a:rPr lang="en-US" sz="2200" dirty="0"/>
+              <a:t>Davidson and Knox have major increases in overdose deaths possible due to the population</a:t>
+            </a:r>
+          </a:p>
+          <a:p>
+            <a:r>
+              <a:rPr lang="en-US" sz="2200" dirty="0"/>
+              <a:t>Shelby however seem to buck that trend with downward trend in overdose deaths</a:t>
+            </a:r>
+          </a:p>
+        </p:txBody>
+      </p:sp>
+      <p:pic>
+        <p:nvPicPr>
+          <p:cNvPr id="5" name="Content Placeholder 4" descr="A map of the state of montana&#10;&#10;AI-generated content may be incorrect.">
             <a:extLst>
               <a:ext uri="{FF2B5EF4-FFF2-40B4-BE49-F238E27FC236}">
-                <a16:creationId xmlns:a16="http://schemas.microsoft.com/office/drawing/2014/main" id="{2E92FA66-67D7-4CB4-94D3-E643A9AD4757}"/>
-              </a:ext>
-              <a:ext uri="{C183D7F6-B498-43B3-948B-1728B52AA6E4}">
-                <adec:decorative xmlns:adec="http://schemas.microsoft.com/office/drawing/2017/decorative" val="1"/>
-              </a:ext>
-            </a:extLst>
-          </p:cNvPr>
-          <p:cNvSpPr>
-            <a:spLocks noGrp="1" noRot="1" noChangeAspect="1" noMove="1" noResize="1" noEditPoints="1" noAdjustHandles="1" noChangeArrowheads="1" noChangeShapeType="1" noTextEdit="1"/>
-          </p:cNvSpPr>
-          <p:nvPr>
-            <p:extLst>
-              <p:ext uri="{386F3935-93C4-4BCD-93E2-E3B085C9AB24}">
-                <p16:designElem xmlns:p16="http://schemas.microsoft.com/office/powerpoint/2015/main" val="1"/>
-              </p:ext>
-            </p:extLst>
-          </p:nvPr>
-        </p:nvSpPr>
-        <p:spPr>
-          <a:xfrm rot="5400000">
-            <a:off x="3566159" y="1225296"/>
-            <a:ext cx="1554480" cy="18288"/>
-          </a:xfrm>
-          <a:custGeom>
-            <a:avLst/>
-            <a:gdLst>
-              <a:gd name="connsiteX0" fmla="*/ 0 w 1554480"/>
-              <a:gd name="connsiteY0" fmla="*/ 0 h 18288"/>
-              <a:gd name="connsiteX1" fmla="*/ 549250 w 1554480"/>
-              <a:gd name="connsiteY1" fmla="*/ 0 h 18288"/>
-              <a:gd name="connsiteX2" fmla="*/ 1082954 w 1554480"/>
-              <a:gd name="connsiteY2" fmla="*/ 0 h 18288"/>
-              <a:gd name="connsiteX3" fmla="*/ 1554480 w 1554480"/>
-              <a:gd name="connsiteY3" fmla="*/ 0 h 18288"/>
-              <a:gd name="connsiteX4" fmla="*/ 1554480 w 1554480"/>
-              <a:gd name="connsiteY4" fmla="*/ 18288 h 18288"/>
-              <a:gd name="connsiteX5" fmla="*/ 1067410 w 1554480"/>
-              <a:gd name="connsiteY5" fmla="*/ 18288 h 18288"/>
-              <a:gd name="connsiteX6" fmla="*/ 549250 w 1554480"/>
-              <a:gd name="connsiteY6" fmla="*/ 18288 h 18288"/>
-              <a:gd name="connsiteX7" fmla="*/ 0 w 1554480"/>
-              <a:gd name="connsiteY7" fmla="*/ 18288 h 18288"/>
-              <a:gd name="connsiteX8" fmla="*/ 0 w 1554480"/>
-              <a:gd name="connsiteY8" fmla="*/ 0 h 18288"/>
-            </a:gdLst>
-            <a:ahLst/>
-            <a:cxnLst>
-              <a:cxn ang="0">
-                <a:pos x="connsiteX0" y="connsiteY0"/>
-              </a:cxn>
-              <a:cxn ang="0">
-                <a:pos x="connsiteX1" y="connsiteY1"/>
-              </a:cxn>
-              <a:cxn ang="0">
-                <a:pos x="connsiteX2" y="connsiteY2"/>
-              </a:cxn>
-              <a:cxn ang="0">
-                <a:pos x="connsiteX3" y="connsiteY3"/>
-              </a:cxn>
-              <a:cxn ang="0">
-                <a:pos x="connsiteX4" y="connsiteY4"/>
-              </a:cxn>
-              <a:cxn ang="0">
-                <a:pos x="connsiteX5" y="connsiteY5"/>
-              </a:cxn>
-              <a:cxn ang="0">
-                <a:pos x="connsiteX6" y="connsiteY6"/>
-              </a:cxn>
-              <a:cxn ang="0">
-                <a:pos x="connsiteX7" y="connsiteY7"/>
-              </a:cxn>
-              <a:cxn ang="0">
-                <a:pos x="connsiteX8" y="connsiteY8"/>
-              </a:cxn>
-            </a:cxnLst>
-            <a:rect l="l" t="t" r="r" b="b"/>
-            <a:pathLst>
-              <a:path w="1554480" h="18288" fill="none" extrusionOk="0">
-                <a:moveTo>
-                  <a:pt x="0" y="0"/>
-                </a:moveTo>
-                <a:cubicBezTo>
-                  <a:pt x="114141" y="-19864"/>
-                  <a:pt x="345055" y="-1657"/>
-                  <a:pt x="549250" y="0"/>
-                </a:cubicBezTo>
-                <a:cubicBezTo>
-                  <a:pt x="753445" y="1657"/>
-                  <a:pt x="862292" y="-5674"/>
-                  <a:pt x="1082954" y="0"/>
-                </a:cubicBezTo>
-                <a:cubicBezTo>
-                  <a:pt x="1303616" y="5674"/>
-                  <a:pt x="1363530" y="4537"/>
-                  <a:pt x="1554480" y="0"/>
-                </a:cubicBezTo>
-                <a:cubicBezTo>
-                  <a:pt x="1554963" y="7176"/>
-                  <a:pt x="1553909" y="13682"/>
-                  <a:pt x="1554480" y="18288"/>
-                </a:cubicBezTo>
-                <a:cubicBezTo>
-                  <a:pt x="1338847" y="6127"/>
-                  <a:pt x="1215066" y="37851"/>
-                  <a:pt x="1067410" y="18288"/>
-                </a:cubicBezTo>
-                <a:cubicBezTo>
-                  <a:pt x="919754" y="-1275"/>
-                  <a:pt x="800465" y="3080"/>
-                  <a:pt x="549250" y="18288"/>
-                </a:cubicBezTo>
-                <a:cubicBezTo>
-                  <a:pt x="298035" y="33496"/>
-                  <a:pt x="158868" y="22769"/>
-                  <a:pt x="0" y="18288"/>
-                </a:cubicBezTo>
-                <a:cubicBezTo>
-                  <a:pt x="-655" y="13237"/>
-                  <a:pt x="709" y="4645"/>
-                  <a:pt x="0" y="0"/>
-                </a:cubicBezTo>
-                <a:close/>
-              </a:path>
-              <a:path w="1554480" h="18288" stroke="0" extrusionOk="0">
-                <a:moveTo>
-                  <a:pt x="0" y="0"/>
-                </a:moveTo>
-                <a:cubicBezTo>
-                  <a:pt x="249941" y="-58"/>
-                  <a:pt x="367334" y="23448"/>
-                  <a:pt x="502615" y="0"/>
-                </a:cubicBezTo>
-                <a:cubicBezTo>
-                  <a:pt x="637897" y="-23448"/>
-                  <a:pt x="813653" y="-20418"/>
-                  <a:pt x="974141" y="0"/>
-                </a:cubicBezTo>
-                <a:cubicBezTo>
-                  <a:pt x="1134629" y="20418"/>
-                  <a:pt x="1268772" y="6288"/>
-                  <a:pt x="1554480" y="0"/>
-                </a:cubicBezTo>
-                <a:cubicBezTo>
-                  <a:pt x="1554917" y="7222"/>
-                  <a:pt x="1555359" y="13299"/>
-                  <a:pt x="1554480" y="18288"/>
-                </a:cubicBezTo>
-                <a:cubicBezTo>
-                  <a:pt x="1336087" y="12172"/>
-                  <a:pt x="1310024" y="19759"/>
-                  <a:pt x="1067410" y="18288"/>
-                </a:cubicBezTo>
-                <a:cubicBezTo>
-                  <a:pt x="824796" y="16818"/>
-                  <a:pt x="787902" y="34647"/>
-                  <a:pt x="518160" y="18288"/>
-                </a:cubicBezTo>
-                <a:cubicBezTo>
-                  <a:pt x="248418" y="1930"/>
-                  <a:pt x="133160" y="9205"/>
-                  <a:pt x="0" y="18288"/>
-                </a:cubicBezTo>
-                <a:cubicBezTo>
-                  <a:pt x="-643" y="9451"/>
-                  <a:pt x="-340" y="7114"/>
-                  <a:pt x="0" y="0"/>
-                </a:cubicBezTo>
-                <a:close/>
-              </a:path>
-            </a:pathLst>
-          </a:custGeom>
-          <a:solidFill>
-            <a:schemeClr val="accent2"/>
-          </a:solidFill>
-          <a:ln w="41275" cap="rnd">
-            <a:solidFill>
-              <a:schemeClr val="accent2"/>
-            </a:solidFill>
-            <a:round/>
-            <a:extLst>
-              <a:ext uri="{C807C97D-BFC1-408E-A445-0C87EB9F89A2}">
-                <ask:lineSketchStyleProps xmlns:ask="http://schemas.microsoft.com/office/drawing/2018/sketchyshapes" sd="1219033472">
-                  <a:prstGeom prst="rect">
-                    <a:avLst/>
-                  </a:prstGeom>
-                  <ask:type>
-                    <ask:lineSketchFreehand/>
-                  </ask:type>
-                </ask:lineSketchStyleProps>
-              </a:ext>
-            </a:extLst>
-          </a:ln>
-        </p:spPr>
-        <p:style>
-          <a:lnRef idx="2">
-            <a:schemeClr val="accent1">
-              <a:shade val="50000"/>
-            </a:schemeClr>
-          </a:lnRef>
-          <a:fillRef idx="1">
-            <a:schemeClr val="accent1"/>
-          </a:fillRef>
-          <a:effectRef idx="0">
-            <a:schemeClr val="accent1"/>
-          </a:effectRef>
-          <a:fontRef idx="minor">
-            <a:schemeClr val="lt1"/>
-          </a:fontRef>
-        </p:style>
-        <p:txBody>
-          <a:bodyPr rtlCol="0" anchor="ctr"/>
-          <a:lstStyle/>
-          <a:p>
-            <a:pPr algn="ctr"/>
-            <a:endParaRPr lang="en-US"/>
-          </a:p>
-        </p:txBody>
-      </p:sp>
-      <p:sp>
-        <p:nvSpPr>
-          <p:cNvPr id="13" name="Content Placeholder 12">
-            <a:extLst>
-              <a:ext uri="{FF2B5EF4-FFF2-40B4-BE49-F238E27FC236}">
-                <a16:creationId xmlns:a16="http://schemas.microsoft.com/office/drawing/2014/main" id="{BEBCC0F4-199F-6FCD-83B1-0E7AC97ABC2A}"/>
-              </a:ext>
-            </a:extLst>
-          </p:cNvPr>
-          <p:cNvSpPr>
-            <a:spLocks noGrp="1"/>
-          </p:cNvSpPr>
-          <p:nvPr>
-            <p:ph idx="1"/>
-          </p:nvPr>
-        </p:nvSpPr>
-        <p:spPr>
-          <a:xfrm>
-            <a:off x="4654295" y="502920"/>
-            <a:ext cx="6894576" cy="1463040"/>
-          </a:xfrm>
-        </p:spPr>
-        <p:txBody>
-          <a:bodyPr anchor="ctr">
-            <a:normAutofit/>
-          </a:bodyPr>
-          <a:lstStyle/>
-          <a:p>
-            <a:r>
-              <a:rPr lang="en-US" sz="2200" dirty="0"/>
-              <a:t>The unemployment rate has been going down but the number of deaths has not</a:t>
-            </a:r>
-          </a:p>
-        </p:txBody>
-      </p:sp>
-      <p:pic>
-        <p:nvPicPr>
-          <p:cNvPr id="9" name="Content Placeholder 8" descr="A graph of a number of dots&#10;&#10;AI-generated content may be incorrect.">
-            <a:extLst>
-              <a:ext uri="{FF2B5EF4-FFF2-40B4-BE49-F238E27FC236}">
-                <a16:creationId xmlns:a16="http://schemas.microsoft.com/office/drawing/2014/main" id="{AE8E519D-67A7-E9C1-831D-FFA9C724DAA5}"/>
+                <a16:creationId xmlns:a16="http://schemas.microsoft.com/office/drawing/2014/main" id="{74A46509-EE8C-B49D-7F52-8726A98228D0}"/>
               </a:ext>
             </a:extLst>
           </p:cNvPr>
@@ -4719,8 +6030,8 @@
         </p:blipFill>
         <p:spPr>
           <a:xfrm>
-            <a:off x="630936" y="3001400"/>
-            <a:ext cx="10917936" cy="2538424"/>
+            <a:off x="630935" y="3058381"/>
+            <a:ext cx="10917936" cy="3138910"/>
           </a:xfrm>
           <a:prstGeom prst="rect">
             <a:avLst/>
@@ -4730,7 +6041,7 @@
     </p:spTree>
     <p:extLst>
       <p:ext uri="{BB962C8B-B14F-4D97-AF65-F5344CB8AC3E}">
-        <p14:creationId xmlns:p14="http://schemas.microsoft.com/office/powerpoint/2010/main" val="3702852111"/>
+        <p14:creationId xmlns:p14="http://schemas.microsoft.com/office/powerpoint/2010/main" val="3272564374"/>
       </p:ext>
     </p:extLst>
   </p:cSld>
@@ -4743,14 +6054,6 @@
 <file path=ppt/slides/slide5.xml><?xml version="1.0" encoding="utf-8"?>
 <p:sld xmlns:a="http://schemas.openxmlformats.org/drawingml/2006/main" xmlns:r="http://schemas.openxmlformats.org/officeDocument/2006/relationships" xmlns:p="http://schemas.openxmlformats.org/presentationml/2006/main">
   <p:cSld>
-    <p:bg>
-      <p:bgPr>
-        <a:solidFill>
-          <a:schemeClr val="bg1"/>
-        </a:solidFill>
-        <a:effectLst/>
-      </p:bgPr>
-    </p:bg>
     <p:spTree>
       <p:nvGrpSpPr>
         <p:cNvPr id="1" name=""/>
@@ -4765,72 +6068,110 @@
           <a:chExt cx="0" cy="0"/>
         </a:xfrm>
       </p:grpSpPr>
-      <p:sp useBgFill="1">
-        <p:nvSpPr>
-          <p:cNvPr id="11" name="Rectangle 10">
+      <p:sp>
+        <p:nvSpPr>
+          <p:cNvPr id="2" name="Title 1">
             <a:extLst>
               <a:ext uri="{FF2B5EF4-FFF2-40B4-BE49-F238E27FC236}">
-                <a16:creationId xmlns:a16="http://schemas.microsoft.com/office/drawing/2014/main" id="{2B97F24A-32CE-4C1C-A50D-3016B394DCFB}"/>
-              </a:ext>
-              <a:ext uri="{C183D7F6-B498-43B3-948B-1728B52AA6E4}">
-                <adec:decorative xmlns:adec="http://schemas.microsoft.com/office/drawing/2017/decorative" val="1"/>
+                <a16:creationId xmlns:a16="http://schemas.microsoft.com/office/drawing/2014/main" id="{BCB3BA5F-183A-4678-712E-FC3CC5DAFE20}"/>
               </a:ext>
             </a:extLst>
           </p:cNvPr>
           <p:cNvSpPr>
-            <a:spLocks noGrp="1" noRot="1" noChangeAspect="1" noMove="1" noResize="1" noEditPoints="1" noAdjustHandles="1" noChangeArrowheads="1" noChangeShapeType="1" noTextEdit="1"/>
-          </p:cNvSpPr>
-          <p:nvPr>
-            <p:extLst>
-              <p:ext uri="{386F3935-93C4-4BCD-93E2-E3B085C9AB24}">
-                <p16:designElem xmlns:p16="http://schemas.microsoft.com/office/powerpoint/2015/main" val="1"/>
-              </p:ext>
-            </p:extLst>
-          </p:nvPr>
-        </p:nvSpPr>
-        <p:spPr>
-          <a:xfrm>
-            <a:off x="0" y="0"/>
-            <a:ext cx="12192000" cy="6858000"/>
-          </a:xfrm>
-          <a:prstGeom prst="rect">
-            <a:avLst/>
-          </a:prstGeom>
-          <a:ln>
-            <a:noFill/>
-          </a:ln>
-        </p:spPr>
-        <p:style>
-          <a:lnRef idx="2">
-            <a:schemeClr val="accent1">
-              <a:shade val="50000"/>
-            </a:schemeClr>
-          </a:lnRef>
-          <a:fillRef idx="1">
-            <a:schemeClr val="accent1"/>
-          </a:fillRef>
-          <a:effectRef idx="0">
-            <a:schemeClr val="accent1"/>
-          </a:effectRef>
-          <a:fontRef idx="minor">
-            <a:schemeClr val="lt1"/>
-          </a:fontRef>
-        </p:style>
-        <p:txBody>
-          <a:bodyPr rtlCol="0" anchor="ctr"/>
-          <a:lstStyle/>
-          <a:p>
-            <a:pPr algn="ctr"/>
-            <a:endParaRPr lang="en-US"/>
-          </a:p>
-        </p:txBody>
-      </p:sp>
+            <a:spLocks noGrp="1"/>
+          </p:cNvSpPr>
+          <p:nvPr>
+            <p:ph type="title"/>
+          </p:nvPr>
+        </p:nvSpPr>
+        <p:spPr/>
+        <p:txBody>
+          <a:bodyPr/>
+          <a:lstStyle/>
+          <a:p>
+            <a:r>
+              <a:rPr lang="en-US" dirty="0"/>
+              <a:t>Spending on Opioids</a:t>
+            </a:r>
+          </a:p>
+        </p:txBody>
+      </p:sp>
+      <p:sp>
+        <p:nvSpPr>
+          <p:cNvPr id="3" name="Content Placeholder 2">
+            <a:extLst>
+              <a:ext uri="{FF2B5EF4-FFF2-40B4-BE49-F238E27FC236}">
+                <a16:creationId xmlns:a16="http://schemas.microsoft.com/office/drawing/2014/main" id="{BA139E6E-E7FC-6CF5-77AF-6179E6B7534F}"/>
+              </a:ext>
+            </a:extLst>
+          </p:cNvPr>
+          <p:cNvSpPr>
+            <a:spLocks noGrp="1"/>
+          </p:cNvSpPr>
+          <p:nvPr>
+            <p:ph idx="1"/>
+          </p:nvPr>
+        </p:nvSpPr>
+        <p:spPr/>
+        <p:txBody>
+          <a:bodyPr/>
+          <a:lstStyle/>
+          <a:p>
+            <a:r>
+              <a:rPr lang="en-US" dirty="0"/>
+              <a:t>Next we looked at how the amount spent on opioids related to overdose deaths, both in strict numbers and as compared to non-opioid prescription spending.</a:t>
+            </a:r>
+          </a:p>
+          <a:p>
+            <a:r>
+              <a:rPr lang="en-US" dirty="0"/>
+              <a:t>To normalize the available data, we compared annual averages per capita across the counties of Tennessee. </a:t>
+            </a:r>
+          </a:p>
+          <a:p>
+            <a:pPr marL="0" indent="0">
+              <a:buNone/>
+            </a:pPr>
+            <a:endParaRPr lang="en-US" dirty="0"/>
+          </a:p>
+        </p:txBody>
+      </p:sp>
+    </p:spTree>
+    <p:extLst>
+      <p:ext uri="{BB962C8B-B14F-4D97-AF65-F5344CB8AC3E}">
+        <p14:creationId xmlns:p14="http://schemas.microsoft.com/office/powerpoint/2010/main" val="3104852050"/>
+      </p:ext>
+    </p:extLst>
+  </p:cSld>
+  <p:clrMapOvr>
+    <a:masterClrMapping/>
+  </p:clrMapOvr>
+</p:sld>
+</file>
+
+<file path=ppt/slides/slide6.xml><?xml version="1.0" encoding="utf-8"?>
+<p:sld xmlns:a="http://schemas.openxmlformats.org/drawingml/2006/main" xmlns:r="http://schemas.openxmlformats.org/officeDocument/2006/relationships" xmlns:p="http://schemas.openxmlformats.org/presentationml/2006/main">
+  <p:cSld>
+    <p:spTree>
+      <p:nvGrpSpPr>
+        <p:cNvPr id="1" name=""/>
+        <p:cNvGrpSpPr/>
+        <p:nvPr/>
+      </p:nvGrpSpPr>
+      <p:grpSpPr>
+        <a:xfrm>
+          <a:off x="0" y="0"/>
+          <a:ext cx="0" cy="0"/>
+          <a:chOff x="0" y="0"/>
+          <a:chExt cx="0" cy="0"/>
+        </a:xfrm>
+      </p:grpSpPr>
       <p:sp>
         <p:nvSpPr>
           <p:cNvPr id="2" name="Title 1">
             <a:extLst>
               <a:ext uri="{FF2B5EF4-FFF2-40B4-BE49-F238E27FC236}">
-                <a16:creationId xmlns:a16="http://schemas.microsoft.com/office/drawing/2014/main" id="{111A9EB2-A3F6-7F13-E8BF-0E2B8B691651}"/>
+                <a16:creationId xmlns:a16="http://schemas.microsoft.com/office/drawing/2014/main" id="{567EB6D6-67BD-B2FE-72F8-D0C2FE47B41A}"/>
               </a:ext>
             </a:extLst>
           </p:cNvPr>
@@ -4841,360 +6182,66 @@
             <p:ph type="title"/>
           </p:nvPr>
         </p:nvSpPr>
-        <p:spPr>
-          <a:xfrm>
-            <a:off x="630936" y="639520"/>
-            <a:ext cx="3429000" cy="1719072"/>
-          </a:xfrm>
-        </p:spPr>
-        <p:txBody>
-          <a:bodyPr vert="horz" lIns="91440" tIns="45720" rIns="91440" bIns="45720" rtlCol="0" anchor="b">
+        <p:spPr/>
+        <p:txBody>
+          <a:bodyPr>
             <a:normAutofit/>
           </a:bodyPr>
           <a:lstStyle/>
           <a:p>
             <a:r>
-              <a:rPr lang="en-US" sz="3800" kern="1200" dirty="0">
-                <a:solidFill>
-                  <a:schemeClr val="tx1"/>
-                </a:solidFill>
-                <a:latin typeface="+mj-lt"/>
-                <a:ea typeface="+mj-ea"/>
-                <a:cs typeface="+mj-cs"/>
-              </a:rPr>
-              <a:t>Unemployment</a:t>
-            </a:r>
-          </a:p>
-        </p:txBody>
-      </p:sp>
-      <p:sp>
-        <p:nvSpPr>
-          <p:cNvPr id="13" name="sketch line">
+              <a:rPr lang="en-US" sz="4000" dirty="0"/>
+              <a:t>Death rates vary within narrow band of spending</a:t>
+            </a:r>
+          </a:p>
+        </p:txBody>
+      </p:sp>
+      <p:sp>
+        <p:nvSpPr>
+          <p:cNvPr id="4" name="Content Placeholder 2">
             <a:extLst>
               <a:ext uri="{FF2B5EF4-FFF2-40B4-BE49-F238E27FC236}">
-                <a16:creationId xmlns:a16="http://schemas.microsoft.com/office/drawing/2014/main" id="{CD8B4F24-440B-49E9-B85D-733523DC064B}"/>
-              </a:ext>
-              <a:ext uri="{C183D7F6-B498-43B3-948B-1728B52AA6E4}">
-                <adec:decorative xmlns:adec="http://schemas.microsoft.com/office/drawing/2017/decorative" val="1"/>
+                <a16:creationId xmlns:a16="http://schemas.microsoft.com/office/drawing/2014/main" id="{5B1B1C87-DFA7-EEDB-9E49-6EECADBEB1EB}"/>
               </a:ext>
             </a:extLst>
           </p:cNvPr>
           <p:cNvSpPr>
-            <a:spLocks noGrp="1" noRot="1" noChangeAspect="1" noMove="1" noResize="1" noEditPoints="1" noAdjustHandles="1" noChangeArrowheads="1" noChangeShapeType="1" noTextEdit="1"/>
-          </p:cNvSpPr>
-          <p:nvPr>
-            <p:extLst>
-              <p:ext uri="{386F3935-93C4-4BCD-93E2-E3B085C9AB24}">
-                <p16:designElem xmlns:p16="http://schemas.microsoft.com/office/powerpoint/2015/main" val="1"/>
-              </p:ext>
-            </p:extLst>
-          </p:nvPr>
-        </p:nvSpPr>
-        <p:spPr>
-          <a:xfrm>
-            <a:off x="643278" y="2573756"/>
-            <a:ext cx="3255095" cy="18288"/>
-          </a:xfrm>
-          <a:custGeom>
-            <a:avLst/>
-            <a:gdLst>
-              <a:gd name="connsiteX0" fmla="*/ 0 w 3255095"/>
-              <a:gd name="connsiteY0" fmla="*/ 0 h 18288"/>
-              <a:gd name="connsiteX1" fmla="*/ 618468 w 3255095"/>
-              <a:gd name="connsiteY1" fmla="*/ 0 h 18288"/>
-              <a:gd name="connsiteX2" fmla="*/ 1269487 w 3255095"/>
-              <a:gd name="connsiteY2" fmla="*/ 0 h 18288"/>
-              <a:gd name="connsiteX3" fmla="*/ 1953057 w 3255095"/>
-              <a:gd name="connsiteY3" fmla="*/ 0 h 18288"/>
-              <a:gd name="connsiteX4" fmla="*/ 2636627 w 3255095"/>
-              <a:gd name="connsiteY4" fmla="*/ 0 h 18288"/>
-              <a:gd name="connsiteX5" fmla="*/ 3255095 w 3255095"/>
-              <a:gd name="connsiteY5" fmla="*/ 0 h 18288"/>
-              <a:gd name="connsiteX6" fmla="*/ 3255095 w 3255095"/>
-              <a:gd name="connsiteY6" fmla="*/ 18288 h 18288"/>
-              <a:gd name="connsiteX7" fmla="*/ 2538974 w 3255095"/>
-              <a:gd name="connsiteY7" fmla="*/ 18288 h 18288"/>
-              <a:gd name="connsiteX8" fmla="*/ 1822853 w 3255095"/>
-              <a:gd name="connsiteY8" fmla="*/ 18288 h 18288"/>
-              <a:gd name="connsiteX9" fmla="*/ 1171834 w 3255095"/>
-              <a:gd name="connsiteY9" fmla="*/ 18288 h 18288"/>
-              <a:gd name="connsiteX10" fmla="*/ 0 w 3255095"/>
-              <a:gd name="connsiteY10" fmla="*/ 18288 h 18288"/>
-              <a:gd name="connsiteX11" fmla="*/ 0 w 3255095"/>
-              <a:gd name="connsiteY11" fmla="*/ 0 h 18288"/>
-            </a:gdLst>
-            <a:ahLst/>
-            <a:cxnLst>
-              <a:cxn ang="0">
-                <a:pos x="connsiteX0" y="connsiteY0"/>
-              </a:cxn>
-              <a:cxn ang="0">
-                <a:pos x="connsiteX1" y="connsiteY1"/>
-              </a:cxn>
-              <a:cxn ang="0">
-                <a:pos x="connsiteX2" y="connsiteY2"/>
-              </a:cxn>
-              <a:cxn ang="0">
-                <a:pos x="connsiteX3" y="connsiteY3"/>
-              </a:cxn>
-              <a:cxn ang="0">
-                <a:pos x="connsiteX4" y="connsiteY4"/>
-              </a:cxn>
-              <a:cxn ang="0">
-                <a:pos x="connsiteX5" y="connsiteY5"/>
-              </a:cxn>
-              <a:cxn ang="0">
-                <a:pos x="connsiteX6" y="connsiteY6"/>
-              </a:cxn>
-              <a:cxn ang="0">
-                <a:pos x="connsiteX7" y="connsiteY7"/>
-              </a:cxn>
-              <a:cxn ang="0">
-                <a:pos x="connsiteX8" y="connsiteY8"/>
-              </a:cxn>
-              <a:cxn ang="0">
-                <a:pos x="connsiteX9" y="connsiteY9"/>
-              </a:cxn>
-              <a:cxn ang="0">
-                <a:pos x="connsiteX10" y="connsiteY10"/>
-              </a:cxn>
-              <a:cxn ang="0">
-                <a:pos x="connsiteX11" y="connsiteY11"/>
-              </a:cxn>
-            </a:cxnLst>
-            <a:rect l="l" t="t" r="r" b="b"/>
-            <a:pathLst>
-              <a:path w="3255095" h="18288" fill="none" extrusionOk="0">
-                <a:moveTo>
-                  <a:pt x="0" y="0"/>
-                </a:moveTo>
-                <a:cubicBezTo>
-                  <a:pt x="240201" y="-22123"/>
-                  <a:pt x="462021" y="-19623"/>
-                  <a:pt x="618468" y="0"/>
-                </a:cubicBezTo>
-                <a:cubicBezTo>
-                  <a:pt x="774915" y="19623"/>
-                  <a:pt x="974734" y="2035"/>
-                  <a:pt x="1269487" y="0"/>
-                </a:cubicBezTo>
-                <a:cubicBezTo>
-                  <a:pt x="1564240" y="-2035"/>
-                  <a:pt x="1733579" y="10639"/>
-                  <a:pt x="1953057" y="0"/>
-                </a:cubicBezTo>
-                <a:cubicBezTo>
-                  <a:pt x="2172535" y="-10639"/>
-                  <a:pt x="2453962" y="14018"/>
-                  <a:pt x="2636627" y="0"/>
-                </a:cubicBezTo>
-                <a:cubicBezTo>
-                  <a:pt x="2819292" y="-14018"/>
-                  <a:pt x="3121375" y="5399"/>
-                  <a:pt x="3255095" y="0"/>
-                </a:cubicBezTo>
-                <a:cubicBezTo>
-                  <a:pt x="3254386" y="8157"/>
-                  <a:pt x="3254682" y="12125"/>
-                  <a:pt x="3255095" y="18288"/>
-                </a:cubicBezTo>
-                <a:cubicBezTo>
-                  <a:pt x="3088545" y="23203"/>
-                  <a:pt x="2687475" y="7419"/>
-                  <a:pt x="2538974" y="18288"/>
-                </a:cubicBezTo>
-                <a:cubicBezTo>
-                  <a:pt x="2390473" y="29157"/>
-                  <a:pt x="2137381" y="-8959"/>
-                  <a:pt x="1822853" y="18288"/>
-                </a:cubicBezTo>
-                <a:cubicBezTo>
-                  <a:pt x="1508325" y="45535"/>
-                  <a:pt x="1466437" y="20385"/>
-                  <a:pt x="1171834" y="18288"/>
-                </a:cubicBezTo>
-                <a:cubicBezTo>
-                  <a:pt x="877231" y="16191"/>
-                  <a:pt x="561097" y="37643"/>
-                  <a:pt x="0" y="18288"/>
-                </a:cubicBezTo>
-                <a:cubicBezTo>
-                  <a:pt x="-46" y="12483"/>
-                  <a:pt x="-203" y="6491"/>
-                  <a:pt x="0" y="0"/>
-                </a:cubicBezTo>
-                <a:close/>
-              </a:path>
-              <a:path w="3255095" h="18288" stroke="0" extrusionOk="0">
-                <a:moveTo>
-                  <a:pt x="0" y="0"/>
-                </a:moveTo>
-                <a:cubicBezTo>
-                  <a:pt x="291965" y="19429"/>
-                  <a:pt x="363155" y="8568"/>
-                  <a:pt x="618468" y="0"/>
-                </a:cubicBezTo>
-                <a:cubicBezTo>
-                  <a:pt x="873781" y="-8568"/>
-                  <a:pt x="904459" y="-19505"/>
-                  <a:pt x="1171834" y="0"/>
-                </a:cubicBezTo>
-                <a:cubicBezTo>
-                  <a:pt x="1439209" y="19505"/>
-                  <a:pt x="1744369" y="9790"/>
-                  <a:pt x="1887955" y="0"/>
-                </a:cubicBezTo>
-                <a:cubicBezTo>
-                  <a:pt x="2031541" y="-9790"/>
-                  <a:pt x="2346378" y="21240"/>
-                  <a:pt x="2506423" y="0"/>
-                </a:cubicBezTo>
-                <a:cubicBezTo>
-                  <a:pt x="2666468" y="-21240"/>
-                  <a:pt x="2990257" y="30414"/>
-                  <a:pt x="3255095" y="0"/>
-                </a:cubicBezTo>
-                <a:cubicBezTo>
-                  <a:pt x="3254831" y="4493"/>
-                  <a:pt x="3255479" y="9472"/>
-                  <a:pt x="3255095" y="18288"/>
-                </a:cubicBezTo>
-                <a:cubicBezTo>
-                  <a:pt x="3120743" y="16690"/>
-                  <a:pt x="2759628" y="42462"/>
-                  <a:pt x="2604076" y="18288"/>
-                </a:cubicBezTo>
-                <a:cubicBezTo>
-                  <a:pt x="2448524" y="-5886"/>
-                  <a:pt x="2184336" y="19599"/>
-                  <a:pt x="1887955" y="18288"/>
-                </a:cubicBezTo>
-                <a:cubicBezTo>
-                  <a:pt x="1591574" y="16977"/>
-                  <a:pt x="1548845" y="6870"/>
-                  <a:pt x="1334589" y="18288"/>
-                </a:cubicBezTo>
-                <a:cubicBezTo>
-                  <a:pt x="1120333" y="29706"/>
-                  <a:pt x="996014" y="9662"/>
-                  <a:pt x="683570" y="18288"/>
-                </a:cubicBezTo>
-                <a:cubicBezTo>
-                  <a:pt x="371126" y="26914"/>
-                  <a:pt x="198687" y="16167"/>
-                  <a:pt x="0" y="18288"/>
-                </a:cubicBezTo>
-                <a:cubicBezTo>
-                  <a:pt x="843" y="9577"/>
-                  <a:pt x="371" y="6900"/>
-                  <a:pt x="0" y="0"/>
-                </a:cubicBezTo>
-                <a:close/>
-              </a:path>
-            </a:pathLst>
-          </a:custGeom>
-          <a:solidFill>
-            <a:schemeClr val="accent2"/>
-          </a:solidFill>
-          <a:ln w="38100" cap="rnd">
-            <a:solidFill>
-              <a:schemeClr val="accent2"/>
-            </a:solidFill>
-            <a:round/>
-            <a:extLst>
-              <a:ext uri="{C807C97D-BFC1-408E-A445-0C87EB9F89A2}">
-                <ask:lineSketchStyleProps xmlns:ask="http://schemas.microsoft.com/office/drawing/2018/sketchyshapes" sd="1219033472">
-                  <a:prstGeom prst="rect">
-                    <a:avLst/>
-                  </a:prstGeom>
-                  <ask:type>
-                    <ask:lineSketchFreehand/>
-                  </ask:type>
-                </ask:lineSketchStyleProps>
-              </a:ext>
-            </a:extLst>
-          </a:ln>
-        </p:spPr>
-        <p:style>
-          <a:lnRef idx="2">
-            <a:schemeClr val="accent1">
-              <a:shade val="50000"/>
-            </a:schemeClr>
-          </a:lnRef>
-          <a:fillRef idx="1">
-            <a:schemeClr val="accent1"/>
-          </a:fillRef>
-          <a:effectRef idx="0">
-            <a:schemeClr val="accent1"/>
-          </a:effectRef>
-          <a:fontRef idx="minor">
-            <a:schemeClr val="lt1"/>
-          </a:fontRef>
-        </p:style>
-        <p:txBody>
-          <a:bodyPr rtlCol="0" anchor="ctr"/>
-          <a:lstStyle/>
-          <a:p>
-            <a:pPr algn="ctr"/>
-            <a:endParaRPr lang="en-US"/>
-          </a:p>
-        </p:txBody>
-      </p:sp>
-      <p:sp>
-        <p:nvSpPr>
-          <p:cNvPr id="3" name="Content Placeholder 2">
+            <a:spLocks noGrp="1"/>
+          </p:cNvSpPr>
+          <p:nvPr>
+            <p:ph idx="1"/>
+          </p:nvPr>
+        </p:nvSpPr>
+        <p:spPr>
+          <a:xfrm>
+            <a:off x="7061703" y="2336873"/>
+            <a:ext cx="4449975" cy="3599316"/>
+          </a:xfrm>
+        </p:spPr>
+        <p:txBody>
+          <a:bodyPr/>
+          <a:lstStyle/>
+          <a:p>
+            <a:r>
+              <a:rPr lang="en-US" dirty="0"/>
+              <a:t>Most Tennessee counties spend, on average, less than $10 per resident on opioid prescriptions each year, but average annual overdose death rates per hundred thousand range from zero to over 40.</a:t>
+            </a:r>
+          </a:p>
+        </p:txBody>
+      </p:sp>
+      <p:pic>
+        <p:nvPicPr>
+          <p:cNvPr id="5" name="Picture 4" descr="A graph showing the amount of blood in the blood&#10;&#10;AI-generated content may be incorrect.">
             <a:extLst>
               <a:ext uri="{FF2B5EF4-FFF2-40B4-BE49-F238E27FC236}">
-                <a16:creationId xmlns:a16="http://schemas.microsoft.com/office/drawing/2014/main" id="{480E7C73-12AB-CBF9-82EC-90B65C3A6AD9}"/>
-              </a:ext>
-            </a:extLst>
-          </p:cNvPr>
-          <p:cNvSpPr>
-            <a:spLocks noGrp="1"/>
-          </p:cNvSpPr>
-          <p:nvPr>
-            <p:ph sz="half" idx="1"/>
-          </p:nvPr>
-        </p:nvSpPr>
-        <p:spPr>
-          <a:xfrm>
-            <a:off x="630936" y="2807208"/>
-            <a:ext cx="3429000" cy="3410712"/>
-          </a:xfrm>
-        </p:spPr>
-        <p:txBody>
-          <a:bodyPr vert="horz" lIns="91440" tIns="45720" rIns="91440" bIns="45720" rtlCol="0" anchor="t">
-            <a:normAutofit/>
-          </a:bodyPr>
-          <a:lstStyle/>
-          <a:p>
-            <a:r>
-              <a:rPr lang="en-US" sz="2400" dirty="0"/>
-              <a:t>Unemployment does not impact the cost of </a:t>
-            </a:r>
-            <a:r>
-              <a:rPr lang="en-US" sz="2400"/>
-              <a:t>Opiods</a:t>
-            </a:r>
-            <a:endParaRPr lang="en-US" sz="2200"/>
-          </a:p>
-        </p:txBody>
-      </p:sp>
-      <p:pic>
-        <p:nvPicPr>
-          <p:cNvPr id="6" name="Content Placeholder 5" descr="A graph showing the cost of unemployment&#10;&#10;AI-generated content may be incorrect.">
-            <a:extLst>
-              <a:ext uri="{FF2B5EF4-FFF2-40B4-BE49-F238E27FC236}">
-                <a16:creationId xmlns:a16="http://schemas.microsoft.com/office/drawing/2014/main" id="{90F493B1-5FB2-054A-4F38-E104246D6E5C}"/>
+                <a16:creationId xmlns:a16="http://schemas.microsoft.com/office/drawing/2014/main" id="{FDF1299F-A601-9744-93FA-00EE149A611C}"/>
               </a:ext>
             </a:extLst>
           </p:cNvPr>
           <p:cNvPicPr>
-            <a:picLocks noGrp="1" noChangeAspect="1"/>
+            <a:picLocks noChangeAspect="1"/>
           </p:cNvPicPr>
-          <p:nvPr>
-            <p:ph sz="half" idx="2"/>
-          </p:nvPr>
+          <p:nvPr/>
         </p:nvPicPr>
         <p:blipFill>
           <a:blip r:embed="rId2">
@@ -5210,8 +6257,8 @@
         </p:blipFill>
         <p:spPr>
           <a:xfrm>
-            <a:off x="4654296" y="1202548"/>
-            <a:ext cx="6903720" cy="4452903"/>
+            <a:off x="320252" y="2213791"/>
+            <a:ext cx="6547117" cy="4105664"/>
           </a:xfrm>
           <a:prstGeom prst="rect">
             <a:avLst/>
@@ -5221,7 +6268,537 @@
     </p:spTree>
     <p:extLst>
       <p:ext uri="{BB962C8B-B14F-4D97-AF65-F5344CB8AC3E}">
-        <p14:creationId xmlns:p14="http://schemas.microsoft.com/office/powerpoint/2010/main" val="1710168246"/>
+        <p14:creationId xmlns:p14="http://schemas.microsoft.com/office/powerpoint/2010/main" val="3857140834"/>
+      </p:ext>
+    </p:extLst>
+  </p:cSld>
+  <p:clrMapOvr>
+    <a:masterClrMapping/>
+  </p:clrMapOvr>
+</p:sld>
+</file>
+
+<file path=ppt/slides/slide7.xml><?xml version="1.0" encoding="utf-8"?>
+<p:sld xmlns:a="http://schemas.openxmlformats.org/drawingml/2006/main" xmlns:r="http://schemas.openxmlformats.org/officeDocument/2006/relationships" xmlns:p="http://schemas.openxmlformats.org/presentationml/2006/main">
+  <p:cSld>
+    <p:spTree>
+      <p:nvGrpSpPr>
+        <p:cNvPr id="1" name=""/>
+        <p:cNvGrpSpPr/>
+        <p:nvPr/>
+      </p:nvGrpSpPr>
+      <p:grpSpPr>
+        <a:xfrm>
+          <a:off x="0" y="0"/>
+          <a:ext cx="0" cy="0"/>
+          <a:chOff x="0" y="0"/>
+          <a:chExt cx="0" cy="0"/>
+        </a:xfrm>
+      </p:grpSpPr>
+      <p:sp>
+        <p:nvSpPr>
+          <p:cNvPr id="2" name="Title 1">
+            <a:extLst>
+              <a:ext uri="{FF2B5EF4-FFF2-40B4-BE49-F238E27FC236}">
+                <a16:creationId xmlns:a16="http://schemas.microsoft.com/office/drawing/2014/main" id="{D239AFCA-CA50-D465-23A8-040F4AEA7FB3}"/>
+              </a:ext>
+            </a:extLst>
+          </p:cNvPr>
+          <p:cNvSpPr>
+            <a:spLocks noGrp="1"/>
+          </p:cNvSpPr>
+          <p:nvPr>
+            <p:ph type="title"/>
+          </p:nvPr>
+        </p:nvSpPr>
+        <p:spPr/>
+        <p:txBody>
+          <a:bodyPr>
+            <a:normAutofit/>
+          </a:bodyPr>
+          <a:lstStyle/>
+          <a:p>
+            <a:r>
+              <a:rPr lang="en-US" sz="4400" dirty="0"/>
+              <a:t>Percent of prescription spending on opioids</a:t>
+            </a:r>
+          </a:p>
+        </p:txBody>
+      </p:sp>
+      <p:sp>
+        <p:nvSpPr>
+          <p:cNvPr id="4" name="Content Placeholder 2">
+            <a:extLst>
+              <a:ext uri="{FF2B5EF4-FFF2-40B4-BE49-F238E27FC236}">
+                <a16:creationId xmlns:a16="http://schemas.microsoft.com/office/drawing/2014/main" id="{E531EB6C-78DA-EC5C-FCBB-8470A1ECBC2F}"/>
+              </a:ext>
+            </a:extLst>
+          </p:cNvPr>
+          <p:cNvSpPr>
+            <a:spLocks noGrp="1"/>
+          </p:cNvSpPr>
+          <p:nvPr>
+            <p:ph idx="1"/>
+          </p:nvPr>
+        </p:nvSpPr>
+        <p:spPr>
+          <a:xfrm>
+            <a:off x="7841673" y="2336873"/>
+            <a:ext cx="3971636" cy="3599316"/>
+          </a:xfrm>
+        </p:spPr>
+        <p:txBody>
+          <a:bodyPr>
+            <a:normAutofit/>
+          </a:bodyPr>
+          <a:lstStyle/>
+          <a:p>
+            <a:r>
+              <a:rPr lang="en-US" dirty="0"/>
+              <a:t>For over 75% of Tennessee counties, less than 6% of prescription drug costs go to opioids.  But for Clay, Coffee, and Montgomery counties, that number is over 8%, and in Benton 18.7% of prescription costs are for opioids.</a:t>
+            </a:r>
+          </a:p>
+        </p:txBody>
+      </p:sp>
+      <p:pic>
+        <p:nvPicPr>
+          <p:cNvPr id="5" name="Picture 4">
+            <a:extLst>
+              <a:ext uri="{FF2B5EF4-FFF2-40B4-BE49-F238E27FC236}">
+                <a16:creationId xmlns:a16="http://schemas.microsoft.com/office/drawing/2014/main" id="{76947A54-9738-CBA3-8A79-42D503291A92}"/>
+              </a:ext>
+            </a:extLst>
+          </p:cNvPr>
+          <p:cNvPicPr>
+            <a:picLocks noChangeAspect="1"/>
+          </p:cNvPicPr>
+          <p:nvPr/>
+        </p:nvPicPr>
+        <p:blipFill>
+          <a:blip r:embed="rId2"/>
+          <a:stretch>
+            <a:fillRect/>
+          </a:stretch>
+        </p:blipFill>
+        <p:spPr>
+          <a:xfrm>
+            <a:off x="292394" y="2170618"/>
+            <a:ext cx="7327606" cy="3081571"/>
+          </a:xfrm>
+          <a:prstGeom prst="rect">
+            <a:avLst/>
+          </a:prstGeom>
+        </p:spPr>
+      </p:pic>
+    </p:spTree>
+    <p:extLst>
+      <p:ext uri="{BB962C8B-B14F-4D97-AF65-F5344CB8AC3E}">
+        <p14:creationId xmlns:p14="http://schemas.microsoft.com/office/powerpoint/2010/main" val="2471413312"/>
+      </p:ext>
+    </p:extLst>
+  </p:cSld>
+  <p:clrMapOvr>
+    <a:masterClrMapping/>
+  </p:clrMapOvr>
+</p:sld>
+</file>
+
+<file path=ppt/slides/slide8.xml><?xml version="1.0" encoding="utf-8"?>
+<p:sld xmlns:a="http://schemas.openxmlformats.org/drawingml/2006/main" xmlns:r="http://schemas.openxmlformats.org/officeDocument/2006/relationships" xmlns:p="http://schemas.openxmlformats.org/presentationml/2006/main">
+  <p:cSld>
+    <p:spTree>
+      <p:nvGrpSpPr>
+        <p:cNvPr id="1" name=""/>
+        <p:cNvGrpSpPr/>
+        <p:nvPr/>
+      </p:nvGrpSpPr>
+      <p:grpSpPr>
+        <a:xfrm>
+          <a:off x="0" y="0"/>
+          <a:ext cx="0" cy="0"/>
+          <a:chOff x="0" y="0"/>
+          <a:chExt cx="0" cy="0"/>
+        </a:xfrm>
+      </p:grpSpPr>
+      <p:sp>
+        <p:nvSpPr>
+          <p:cNvPr id="2" name="Title 1">
+            <a:extLst>
+              <a:ext uri="{FF2B5EF4-FFF2-40B4-BE49-F238E27FC236}">
+                <a16:creationId xmlns:a16="http://schemas.microsoft.com/office/drawing/2014/main" id="{4ECFE4A6-6C7E-E486-A3CB-31BA6A594B78}"/>
+              </a:ext>
+            </a:extLst>
+          </p:cNvPr>
+          <p:cNvSpPr>
+            <a:spLocks noGrp="1"/>
+          </p:cNvSpPr>
+          <p:nvPr>
+            <p:ph type="title"/>
+          </p:nvPr>
+        </p:nvSpPr>
+        <p:spPr/>
+        <p:txBody>
+          <a:bodyPr>
+            <a:normAutofit/>
+          </a:bodyPr>
+          <a:lstStyle/>
+          <a:p>
+            <a:r>
+              <a:rPr lang="en-US" sz="4000" dirty="0"/>
+              <a:t>Increased proportion of opioid spending not related to death rate</a:t>
+            </a:r>
+          </a:p>
+        </p:txBody>
+      </p:sp>
+      <p:sp>
+        <p:nvSpPr>
+          <p:cNvPr id="4" name="Content Placeholder 2">
+            <a:extLst>
+              <a:ext uri="{FF2B5EF4-FFF2-40B4-BE49-F238E27FC236}">
+                <a16:creationId xmlns:a16="http://schemas.microsoft.com/office/drawing/2014/main" id="{4C424EFC-6D0D-6AF4-D415-587189222712}"/>
+              </a:ext>
+            </a:extLst>
+          </p:cNvPr>
+          <p:cNvSpPr>
+            <a:spLocks noGrp="1"/>
+          </p:cNvSpPr>
+          <p:nvPr>
+            <p:ph idx="1"/>
+          </p:nvPr>
+        </p:nvSpPr>
+        <p:spPr>
+          <a:xfrm>
+            <a:off x="7952509" y="2336873"/>
+            <a:ext cx="3768436" cy="3599316"/>
+          </a:xfrm>
+        </p:spPr>
+        <p:txBody>
+          <a:bodyPr/>
+          <a:lstStyle/>
+          <a:p>
+            <a:r>
+              <a:rPr lang="en-US" dirty="0"/>
+              <a:t>The percentage of prescription costs spent on opioids has no strong correlation with the overdose death rate across Tennessee counties, with a correlation coefficient of 0.054.</a:t>
+            </a:r>
+          </a:p>
+        </p:txBody>
+      </p:sp>
+      <p:pic>
+        <p:nvPicPr>
+          <p:cNvPr id="5" name="Picture 4" descr="A graph showing numbers and percentages of prescriptions&#10;&#10;AI-generated content may be incorrect.">
+            <a:extLst>
+              <a:ext uri="{FF2B5EF4-FFF2-40B4-BE49-F238E27FC236}">
+                <a16:creationId xmlns:a16="http://schemas.microsoft.com/office/drawing/2014/main" id="{C5E2F61E-894E-2EB2-9BFF-9EE37592F2CC}"/>
+              </a:ext>
+            </a:extLst>
+          </p:cNvPr>
+          <p:cNvPicPr>
+            <a:picLocks noChangeAspect="1"/>
+          </p:cNvPicPr>
+          <p:nvPr/>
+        </p:nvPicPr>
+        <p:blipFill>
+          <a:blip r:embed="rId2">
+            <a:extLst>
+              <a:ext uri="{28A0092B-C50C-407E-A947-70E740481C1C}">
+                <a14:useLocalDpi xmlns:a14="http://schemas.microsoft.com/office/drawing/2010/main" val="0"/>
+              </a:ext>
+            </a:extLst>
+          </a:blip>
+          <a:stretch>
+            <a:fillRect/>
+          </a:stretch>
+        </p:blipFill>
+        <p:spPr>
+          <a:xfrm>
+            <a:off x="329176" y="2279723"/>
+            <a:ext cx="7342647" cy="4105664"/>
+          </a:xfrm>
+          <a:prstGeom prst="rect">
+            <a:avLst/>
+          </a:prstGeom>
+        </p:spPr>
+      </p:pic>
+    </p:spTree>
+    <p:extLst>
+      <p:ext uri="{BB962C8B-B14F-4D97-AF65-F5344CB8AC3E}">
+        <p14:creationId xmlns:p14="http://schemas.microsoft.com/office/powerpoint/2010/main" val="1658246925"/>
+      </p:ext>
+    </p:extLst>
+  </p:cSld>
+  <p:clrMapOvr>
+    <a:masterClrMapping/>
+  </p:clrMapOvr>
+</p:sld>
+</file>
+
+<file path=ppt/slides/slide9.xml><?xml version="1.0" encoding="utf-8"?>
+<p:sld xmlns:a="http://schemas.openxmlformats.org/drawingml/2006/main" xmlns:r="http://schemas.openxmlformats.org/officeDocument/2006/relationships" xmlns:p="http://schemas.openxmlformats.org/presentationml/2006/main">
+  <p:cSld>
+    <p:spTree>
+      <p:nvGrpSpPr>
+        <p:cNvPr id="1" name=""/>
+        <p:cNvGrpSpPr/>
+        <p:nvPr/>
+      </p:nvGrpSpPr>
+      <p:grpSpPr>
+        <a:xfrm>
+          <a:off x="0" y="0"/>
+          <a:ext cx="0" cy="0"/>
+          <a:chOff x="0" y="0"/>
+          <a:chExt cx="0" cy="0"/>
+        </a:xfrm>
+      </p:grpSpPr>
+      <p:sp>
+        <p:nvSpPr>
+          <p:cNvPr id="2" name="Title 1">
+            <a:extLst>
+              <a:ext uri="{FF2B5EF4-FFF2-40B4-BE49-F238E27FC236}">
+                <a16:creationId xmlns:a16="http://schemas.microsoft.com/office/drawing/2014/main" id="{C1F51A9C-7C01-0CF1-9D4E-87ED6F8FADC4}"/>
+              </a:ext>
+            </a:extLst>
+          </p:cNvPr>
+          <p:cNvSpPr>
+            <a:spLocks noGrp="1"/>
+          </p:cNvSpPr>
+          <p:nvPr>
+            <p:ph type="title"/>
+          </p:nvPr>
+        </p:nvSpPr>
+        <p:spPr/>
+        <p:txBody>
+          <a:bodyPr/>
+          <a:lstStyle/>
+          <a:p>
+            <a:r>
+              <a:rPr lang="en-US" dirty="0"/>
+              <a:t>Overdose Deaths Per Capita</a:t>
+            </a:r>
+          </a:p>
+        </p:txBody>
+      </p:sp>
+      <p:pic>
+        <p:nvPicPr>
+          <p:cNvPr id="4" name="Picture 3">
+            <a:extLst>
+              <a:ext uri="{FF2B5EF4-FFF2-40B4-BE49-F238E27FC236}">
+                <a16:creationId xmlns:a16="http://schemas.microsoft.com/office/drawing/2014/main" id="{4C4D1696-15D2-2F91-B48F-6947D3E4D98D}"/>
+              </a:ext>
+            </a:extLst>
+          </p:cNvPr>
+          <p:cNvPicPr>
+            <a:picLocks noChangeAspect="1"/>
+          </p:cNvPicPr>
+          <p:nvPr/>
+        </p:nvPicPr>
+        <p:blipFill>
+          <a:blip r:embed="rId2"/>
+          <a:srcRect l="1468" t="7927"/>
+          <a:stretch>
+            <a:fillRect/>
+          </a:stretch>
+        </p:blipFill>
+        <p:spPr>
+          <a:xfrm>
+            <a:off x="4697050" y="2889086"/>
+            <a:ext cx="7059052" cy="2856242"/>
+          </a:xfrm>
+          <a:prstGeom prst="rect">
+            <a:avLst/>
+          </a:prstGeom>
+        </p:spPr>
+      </p:pic>
+      <p:sp>
+        <p:nvSpPr>
+          <p:cNvPr id="5" name="TextBox 5">
+            <a:extLst>
+              <a:ext uri="{FF2B5EF4-FFF2-40B4-BE49-F238E27FC236}">
+                <a16:creationId xmlns:a16="http://schemas.microsoft.com/office/drawing/2014/main" id="{4A2FE268-7BF3-A1D4-42C5-C76A55CFFE5B}"/>
+              </a:ext>
+            </a:extLst>
+          </p:cNvPr>
+          <p:cNvSpPr txBox="1"/>
+          <p:nvPr/>
+        </p:nvSpPr>
+        <p:spPr>
+          <a:xfrm>
+            <a:off x="956905" y="1891523"/>
+            <a:ext cx="9419464" cy="769441"/>
+          </a:xfrm>
+          <a:prstGeom prst="rect">
+            <a:avLst/>
+          </a:prstGeom>
+          <a:noFill/>
+        </p:spPr>
+        <p:txBody>
+          <a:bodyPr wrap="square">
+            <a:spAutoFit/>
+          </a:bodyPr>
+          <a:lstStyle>
+            <a:defPPr>
+              <a:defRPr lang="en-US"/>
+            </a:defPPr>
+            <a:lvl1pPr marL="0" algn="l" defTabSz="457200" rtl="0" eaLnBrk="1" latinLnBrk="0" hangingPunct="1">
+              <a:defRPr sz="1800" kern="1200">
+                <a:solidFill>
+                  <a:schemeClr val="tx1"/>
+                </a:solidFill>
+                <a:latin typeface="+mn-lt"/>
+                <a:ea typeface="+mn-ea"/>
+                <a:cs typeface="+mn-cs"/>
+              </a:defRPr>
+            </a:lvl1pPr>
+            <a:lvl2pPr marL="457200" algn="l" defTabSz="457200" rtl="0" eaLnBrk="1" latinLnBrk="0" hangingPunct="1">
+              <a:defRPr sz="1800" kern="1200">
+                <a:solidFill>
+                  <a:schemeClr val="tx1"/>
+                </a:solidFill>
+                <a:latin typeface="+mn-lt"/>
+                <a:ea typeface="+mn-ea"/>
+                <a:cs typeface="+mn-cs"/>
+              </a:defRPr>
+            </a:lvl2pPr>
+            <a:lvl3pPr marL="914400" algn="l" defTabSz="457200" rtl="0" eaLnBrk="1" latinLnBrk="0" hangingPunct="1">
+              <a:defRPr sz="1800" kern="1200">
+                <a:solidFill>
+                  <a:schemeClr val="tx1"/>
+                </a:solidFill>
+                <a:latin typeface="+mn-lt"/>
+                <a:ea typeface="+mn-ea"/>
+                <a:cs typeface="+mn-cs"/>
+              </a:defRPr>
+            </a:lvl3pPr>
+            <a:lvl4pPr marL="1371600" algn="l" defTabSz="457200" rtl="0" eaLnBrk="1" latinLnBrk="0" hangingPunct="1">
+              <a:defRPr sz="1800" kern="1200">
+                <a:solidFill>
+                  <a:schemeClr val="tx1"/>
+                </a:solidFill>
+                <a:latin typeface="+mn-lt"/>
+                <a:ea typeface="+mn-ea"/>
+                <a:cs typeface="+mn-cs"/>
+              </a:defRPr>
+            </a:lvl4pPr>
+            <a:lvl5pPr marL="1828800" algn="l" defTabSz="457200" rtl="0" eaLnBrk="1" latinLnBrk="0" hangingPunct="1">
+              <a:defRPr sz="1800" kern="1200">
+                <a:solidFill>
+                  <a:schemeClr val="tx1"/>
+                </a:solidFill>
+                <a:latin typeface="+mn-lt"/>
+                <a:ea typeface="+mn-ea"/>
+                <a:cs typeface="+mn-cs"/>
+              </a:defRPr>
+            </a:lvl5pPr>
+            <a:lvl6pPr marL="2286000" algn="l" defTabSz="457200" rtl="0" eaLnBrk="1" latinLnBrk="0" hangingPunct="1">
+              <a:defRPr sz="1800" kern="1200">
+                <a:solidFill>
+                  <a:schemeClr val="tx1"/>
+                </a:solidFill>
+                <a:latin typeface="+mn-lt"/>
+                <a:ea typeface="+mn-ea"/>
+                <a:cs typeface="+mn-cs"/>
+              </a:defRPr>
+            </a:lvl6pPr>
+            <a:lvl7pPr marL="2743200" algn="l" defTabSz="457200" rtl="0" eaLnBrk="1" latinLnBrk="0" hangingPunct="1">
+              <a:defRPr sz="1800" kern="1200">
+                <a:solidFill>
+                  <a:schemeClr val="tx1"/>
+                </a:solidFill>
+                <a:latin typeface="+mn-lt"/>
+                <a:ea typeface="+mn-ea"/>
+                <a:cs typeface="+mn-cs"/>
+              </a:defRPr>
+            </a:lvl7pPr>
+            <a:lvl8pPr marL="3200400" algn="l" defTabSz="457200" rtl="0" eaLnBrk="1" latinLnBrk="0" hangingPunct="1">
+              <a:defRPr sz="1800" kern="1200">
+                <a:solidFill>
+                  <a:schemeClr val="tx1"/>
+                </a:solidFill>
+                <a:latin typeface="+mn-lt"/>
+                <a:ea typeface="+mn-ea"/>
+                <a:cs typeface="+mn-cs"/>
+              </a:defRPr>
+            </a:lvl8pPr>
+            <a:lvl9pPr marL="3657600" algn="l" defTabSz="457200" rtl="0" eaLnBrk="1" latinLnBrk="0" hangingPunct="1">
+              <a:defRPr sz="1800" kern="1200">
+                <a:solidFill>
+                  <a:schemeClr val="tx1"/>
+                </a:solidFill>
+                <a:latin typeface="+mn-lt"/>
+                <a:ea typeface="+mn-ea"/>
+                <a:cs typeface="+mn-cs"/>
+              </a:defRPr>
+            </a:lvl9pPr>
+          </a:lstStyle>
+          <a:p>
+            <a:pPr marL="342900" indent="-342900">
+              <a:buFont typeface="Arial" panose="020B0604020202020204" pitchFamily="34" charset="0"/>
+              <a:buChar char="•"/>
+              <a:defRPr sz="2200"/>
+            </a:pPr>
+            <a:r>
+              <a:rPr lang="en-US" b="1" dirty="0"/>
+              <a:t>Cheatham</a:t>
+            </a:r>
+            <a:r>
+              <a:rPr lang="en-US" dirty="0"/>
+              <a:t>  has the highest overdose death rate (</a:t>
+            </a:r>
+            <a:r>
+              <a:rPr lang="en-US" b="1" dirty="0"/>
+              <a:t>184</a:t>
+            </a:r>
+            <a:r>
+              <a:rPr lang="en-US" dirty="0"/>
+              <a:t> per 100000).</a:t>
+            </a:r>
+          </a:p>
+          <a:p>
+            <a:pPr marL="342900" indent="-342900">
+              <a:buFont typeface="Arial" panose="020B0604020202020204" pitchFamily="34" charset="0"/>
+              <a:buChar char="•"/>
+              <a:defRPr sz="2200"/>
+            </a:pPr>
+            <a:r>
+              <a:rPr lang="en-US" dirty="0"/>
+              <a:t>Rural counties (Hancock, Clay, Roane) also show higher deaths per capita      </a:t>
+            </a:r>
+          </a:p>
+        </p:txBody>
+      </p:sp>
+      <p:pic>
+        <p:nvPicPr>
+          <p:cNvPr id="6" name="table">
+            <a:extLst>
+              <a:ext uri="{FF2B5EF4-FFF2-40B4-BE49-F238E27FC236}">
+                <a16:creationId xmlns:a16="http://schemas.microsoft.com/office/drawing/2014/main" id="{0D72DB4B-E790-D8D5-EA92-F463B5B6A5F9}"/>
+              </a:ext>
+            </a:extLst>
+          </p:cNvPr>
+          <p:cNvPicPr>
+            <a:picLocks noChangeAspect="1"/>
+          </p:cNvPicPr>
+          <p:nvPr/>
+        </p:nvPicPr>
+        <p:blipFill>
+          <a:blip r:embed="rId3"/>
+          <a:stretch>
+            <a:fillRect/>
+          </a:stretch>
+        </p:blipFill>
+        <p:spPr>
+          <a:xfrm>
+            <a:off x="992841" y="2963045"/>
+            <a:ext cx="3466214" cy="2234196"/>
+          </a:xfrm>
+          <a:prstGeom prst="rect">
+            <a:avLst/>
+          </a:prstGeom>
+        </p:spPr>
+      </p:pic>
+    </p:spTree>
+    <p:extLst>
+      <p:ext uri="{BB962C8B-B14F-4D97-AF65-F5344CB8AC3E}">
+        <p14:creationId xmlns:p14="http://schemas.microsoft.com/office/powerpoint/2010/main" val="1624224444"/>
       </p:ext>
     </p:extLst>
   </p:cSld>
@@ -5232,54 +6809,54 @@
 </file>
 
 <file path=ppt/theme/theme1.xml><?xml version="1.0" encoding="utf-8"?>
-<a:theme xmlns:a="http://schemas.openxmlformats.org/drawingml/2006/main" name="Office Theme">
+<a:theme xmlns:a="http://schemas.openxmlformats.org/drawingml/2006/main" name="Retrospect">
   <a:themeElements>
-    <a:clrScheme name="Office">
+    <a:clrScheme name="Retrospect">
       <a:dk1>
-        <a:sysClr val="windowText" lastClr="000000"/>
+        <a:srgbClr val="000000"/>
       </a:dk1>
       <a:lt1>
         <a:sysClr val="window" lastClr="FFFFFF"/>
       </a:lt1>
       <a:dk2>
-        <a:srgbClr val="0E2841"/>
+        <a:srgbClr val="637052"/>
       </a:dk2>
       <a:lt2>
-        <a:srgbClr val="E8E8E8"/>
+        <a:srgbClr val="CCDDEA"/>
       </a:lt2>
       <a:accent1>
-        <a:srgbClr val="156082"/>
+        <a:srgbClr val="E48312"/>
       </a:accent1>
       <a:accent2>
-        <a:srgbClr val="E97132"/>
+        <a:srgbClr val="BD582C"/>
       </a:accent2>
       <a:accent3>
-        <a:srgbClr val="196B24"/>
+        <a:srgbClr val="865640"/>
       </a:accent3>
       <a:accent4>
-        <a:srgbClr val="0F9ED5"/>
+        <a:srgbClr val="9B8357"/>
       </a:accent4>
       <a:accent5>
-        <a:srgbClr val="A02B93"/>
+        <a:srgbClr val="C2BC80"/>
       </a:accent5>
       <a:accent6>
-        <a:srgbClr val="4EA72E"/>
+        <a:srgbClr val="94A088"/>
       </a:accent6>
       <a:hlink>
-        <a:srgbClr val="467886"/>
+        <a:srgbClr val="2998E3"/>
       </a:hlink>
       <a:folHlink>
-        <a:srgbClr val="96607D"/>
+        <a:srgbClr val="8C8C8C"/>
       </a:folHlink>
     </a:clrScheme>
-    <a:fontScheme name="Office">
+    <a:fontScheme name="Retrospect">
       <a:majorFont>
-        <a:latin typeface="Aptos Display" panose="02110004020202020204"/>
+        <a:latin typeface="Calibri Light" panose="020F0302020204030204"/>
         <a:ea typeface=""/>
         <a:cs typeface=""/>
-        <a:font script="Jpan" typeface="游ゴシック Light"/>
+        <a:font script="Jpan" typeface="ＭＳ Ｐゴシック"/>
         <a:font script="Hang" typeface="맑은 고딕"/>
-        <a:font script="Hans" typeface="等线 Light"/>
+        <a:font script="Hans" typeface="宋体"/>
         <a:font script="Hant" typeface="新細明體"/>
         <a:font script="Arab" typeface="Times New Roman"/>
         <a:font script="Hebr" typeface="Times New Roman"/>
@@ -5307,31 +6884,14 @@
         <a:font script="Viet" typeface="Times New Roman"/>
         <a:font script="Uigh" typeface="Microsoft Uighur"/>
         <a:font script="Geor" typeface="Sylfaen"/>
-        <a:font script="Armn" typeface="Arial"/>
-        <a:font script="Bugi" typeface="Leelawadee UI"/>
-        <a:font script="Bopo" typeface="Microsoft JhengHei"/>
-        <a:font script="Java" typeface="Javanese Text"/>
-        <a:font script="Lisu" typeface="Segoe UI"/>
-        <a:font script="Mymr" typeface="Myanmar Text"/>
-        <a:font script="Nkoo" typeface="Ebrima"/>
-        <a:font script="Olck" typeface="Nirmala UI"/>
-        <a:font script="Osma" typeface="Ebrima"/>
-        <a:font script="Phag" typeface="Phagspa"/>
-        <a:font script="Syrn" typeface="Estrangelo Edessa"/>
-        <a:font script="Syrj" typeface="Estrangelo Edessa"/>
-        <a:font script="Syre" typeface="Estrangelo Edessa"/>
-        <a:font script="Sora" typeface="Nirmala UI"/>
-        <a:font script="Tale" typeface="Microsoft Tai Le"/>
-        <a:font script="Talu" typeface="Microsoft New Tai Lue"/>
-        <a:font script="Tfng" typeface="Ebrima"/>
       </a:majorFont>
       <a:minorFont>
-        <a:latin typeface="Aptos" panose="02110004020202020204"/>
+        <a:latin typeface="Calibri" panose="020F0502020204030204"/>
         <a:ea typeface=""/>
         <a:cs typeface=""/>
-        <a:font script="Jpan" typeface="游ゴシック"/>
+        <a:font script="Jpan" typeface="ＭＳ Ｐゴシック"/>
         <a:font script="Hang" typeface="맑은 고딕"/>
-        <a:font script="Hans" typeface="等线"/>
+        <a:font script="Hans" typeface="宋体"/>
         <a:font script="Hant" typeface="新細明體"/>
         <a:font script="Arab" typeface="Arial"/>
         <a:font script="Hebr" typeface="Arial"/>
@@ -5359,26 +6919,9 @@
         <a:font script="Viet" typeface="Arial"/>
         <a:font script="Uigh" typeface="Microsoft Uighur"/>
         <a:font script="Geor" typeface="Sylfaen"/>
-        <a:font script="Armn" typeface="Arial"/>
-        <a:font script="Bugi" typeface="Leelawadee UI"/>
-        <a:font script="Bopo" typeface="Microsoft JhengHei"/>
-        <a:font script="Java" typeface="Javanese Text"/>
-        <a:font script="Lisu" typeface="Segoe UI"/>
-        <a:font script="Mymr" typeface="Myanmar Text"/>
-        <a:font script="Nkoo" typeface="Ebrima"/>
-        <a:font script="Olck" typeface="Nirmala UI"/>
-        <a:font script="Osma" typeface="Ebrima"/>
-        <a:font script="Phag" typeface="Phagspa"/>
-        <a:font script="Syrn" typeface="Estrangelo Edessa"/>
-        <a:font script="Syrj" typeface="Estrangelo Edessa"/>
-        <a:font script="Syre" typeface="Estrangelo Edessa"/>
-        <a:font script="Sora" typeface="Nirmala UI"/>
-        <a:font script="Tale" typeface="Microsoft Tai Le"/>
-        <a:font script="Talu" typeface="Microsoft New Tai Lue"/>
-        <a:font script="Tfng" typeface="Ebrima"/>
       </a:minorFont>
     </a:fontScheme>
-    <a:fmtScheme name="Office">
+    <a:fmtScheme name="Retrospect">
       <a:fillStyleLst>
         <a:solidFill>
           <a:schemeClr val="phClr"/>
@@ -5387,53 +6930,61 @@
           <a:gsLst>
             <a:gs pos="0">
               <a:schemeClr val="phClr">
-                <a:lumMod val="110000"/>
-                <a:satMod val="105000"/>
-                <a:tint val="67000"/>
+                <a:tint val="65000"/>
+                <a:shade val="92000"/>
+                <a:satMod val="130000"/>
               </a:schemeClr>
             </a:gs>
-            <a:gs pos="50000">
+            <a:gs pos="45000">
               <a:schemeClr val="phClr">
-                <a:lumMod val="105000"/>
-                <a:satMod val="103000"/>
-                <a:tint val="73000"/>
+                <a:tint val="60000"/>
+                <a:shade val="99000"/>
+                <a:satMod val="120000"/>
               </a:schemeClr>
             </a:gs>
             <a:gs pos="100000">
               <a:schemeClr val="phClr">
-                <a:lumMod val="105000"/>
-                <a:satMod val="109000"/>
-                <a:tint val="81000"/>
+                <a:tint val="55000"/>
+                <a:satMod val="140000"/>
               </a:schemeClr>
             </a:gs>
           </a:gsLst>
-          <a:lin ang="5400000" scaled="0"/>
+          <a:path path="circle">
+            <a:fillToRect l="100000" t="100000" r="100000" b="100000"/>
+          </a:path>
         </a:gradFill>
         <a:gradFill rotWithShape="1">
           <a:gsLst>
             <a:gs pos="0">
               <a:schemeClr val="phClr">
-                <a:satMod val="103000"/>
-                <a:lumMod val="102000"/>
-                <a:tint val="94000"/>
+                <a:shade val="85000"/>
+                <a:satMod val="130000"/>
               </a:schemeClr>
             </a:gs>
-            <a:gs pos="50000">
+            <a:gs pos="34000">
               <a:schemeClr val="phClr">
-                <a:satMod val="110000"/>
-                <a:lumMod val="100000"/>
-                <a:shade val="100000"/>
+                <a:shade val="87000"/>
+                <a:satMod val="125000"/>
+              </a:schemeClr>
+            </a:gs>
+            <a:gs pos="70000">
+              <a:schemeClr val="phClr">
+                <a:tint val="100000"/>
+                <a:shade val="90000"/>
+                <a:satMod val="130000"/>
               </a:schemeClr>
             </a:gs>
             <a:gs pos="100000">
               <a:schemeClr val="phClr">
-                <a:lumMod val="99000"/>
-                <a:satMod val="120000"/>
-                <a:shade val="78000"/>
+                <a:tint val="100000"/>
+                <a:shade val="100000"/>
+                <a:satMod val="110000"/>
               </a:schemeClr>
             </a:gs>
           </a:gsLst>
-          <a:lin ang="5400000" scaled="0"/>
+          <a:path path="circle">
+            <a:fillToRect l="100000" t="100000" r="100000" b="100000"/>
+          </a:path>
         </a:gradFill>
       </a:fillStyleLst>
       <a:lnStyleLst>
@@ -5442,21 +6993,18 @@
             <a:schemeClr val="phClr"/>
           </a:solidFill>
           <a:prstDash val="solid"/>
-          <a:miter lim="800000"/>
         </a:ln>
-        <a:ln w="19050" cap="flat" cmpd="sng" algn="ctr">
+        <a:ln w="15875" cap="flat" cmpd="sng" algn="ctr">
           <a:solidFill>
             <a:schemeClr val="phClr"/>
           </a:solidFill>
           <a:prstDash val="solid"/>
-          <a:miter lim="800000"/>
         </a:ln>
         <a:ln w="25400" cap="flat" cmpd="sng" algn="ctr">
           <a:solidFill>
             <a:schemeClr val="phClr"/>
           </a:solidFill>
           <a:prstDash val="solid"/>
-          <a:miter lim="800000"/>
         </a:ln>
       </a:lnStyleLst>
       <a:effectStyleLst>
@@ -5464,16 +7012,33 @@
           <a:effectLst/>
         </a:effectStyle>
         <a:effectStyle>
-          <a:effectLst/>
+          <a:effectLst>
+            <a:outerShdw blurRad="38100" dist="25400" dir="2700000" algn="br" rotWithShape="0">
+              <a:srgbClr val="000000">
+                <a:alpha val="60000"/>
+              </a:srgbClr>
+            </a:outerShdw>
+          </a:effectLst>
         </a:effectStyle>
         <a:effectStyle>
           <a:effectLst>
-            <a:outerShdw blurRad="57150" dist="19050" dir="5400000" algn="ctr" rotWithShape="0">
+            <a:outerShdw blurRad="44450" dist="25400" dir="2700000" algn="br" rotWithShape="0">
               <a:srgbClr val="000000">
-                <a:alpha val="63000"/>
+                <a:alpha val="60000"/>
               </a:srgbClr>
             </a:outerShdw>
           </a:effectLst>
+          <a:scene3d>
+            <a:camera prst="orthographicFront">
+              <a:rot lat="0" lon="0" rev="0"/>
+            </a:camera>
+            <a:lightRig rig="threePt" dir="t">
+              <a:rot lat="0" lon="0" rev="19800000"/>
+            </a:lightRig>
+          </a:scene3d>
+          <a:sp3d prstMaterial="flat">
+            <a:bevelT w="25400" h="31750"/>
+          </a:sp3d>
         </a:effectStyle>
       </a:effectStyleLst>
       <a:bgFillStyleLst>
@@ -5482,65 +7047,45 @@
         </a:solidFill>
         <a:solidFill>
           <a:schemeClr val="phClr">
-            <a:tint val="95000"/>
-            <a:satMod val="170000"/>
+            <a:tint val="90000"/>
+            <a:shade val="97000"/>
+            <a:satMod val="130000"/>
           </a:schemeClr>
         </a:solidFill>
         <a:gradFill rotWithShape="1">
           <a:gsLst>
             <a:gs pos="0">
               <a:schemeClr val="phClr">
-                <a:tint val="93000"/>
-                <a:satMod val="150000"/>
-                <a:shade val="98000"/>
-                <a:lumMod val="102000"/>
+                <a:tint val="96000"/>
+                <a:shade val="99000"/>
+                <a:satMod val="140000"/>
               </a:schemeClr>
             </a:gs>
-            <a:gs pos="50000">
+            <a:gs pos="65000">
               <a:schemeClr val="phClr">
-                <a:tint val="98000"/>
+                <a:tint val="100000"/>
+                <a:shade val="80000"/>
                 <a:satMod val="130000"/>
-                <a:shade val="90000"/>
-                <a:lumMod val="103000"/>
               </a:schemeClr>
             </a:gs>
             <a:gs pos="100000">
               <a:schemeClr val="phClr">
-                <a:shade val="63000"/>
+                <a:tint val="100000"/>
+                <a:shade val="48000"/>
                 <a:satMod val="120000"/>
               </a:schemeClr>
             </a:gs>
           </a:gsLst>
-          <a:lin ang="5400000" scaled="0"/>
+          <a:lin ang="16200000" scaled="0"/>
         </a:gradFill>
       </a:bgFillStyleLst>
     </a:fmtScheme>
   </a:themeElements>
-  <a:objectDefaults>
-    <a:lnDef>
-      <a:spPr/>
-      <a:bodyPr/>
-      <a:lstStyle/>
-      <a:style>
-        <a:lnRef idx="2">
-          <a:schemeClr val="accent1"/>
-        </a:lnRef>
-        <a:fillRef idx="0">
-          <a:schemeClr val="accent1"/>
-        </a:fillRef>
-        <a:effectRef idx="1">
-          <a:schemeClr val="accent1"/>
-        </a:effectRef>
-        <a:fontRef idx="minor">
-          <a:schemeClr val="tx1"/>
-        </a:fontRef>
-      </a:style>
-    </a:lnDef>
-  </a:objectDefaults>
+  <a:objectDefaults/>
   <a:extraClrSchemeLst/>
   <a:extLst>
     <a:ext uri="{05A4C25C-085E-4340-85A3-A5531E510DB2}">
-      <thm15:themeFamily xmlns:thm15="http://schemas.microsoft.com/office/thememl/2012/main" name="Office Theme" id="{2E142A2C-CD16-42D6-873A-C26D2A0506FA}" vid="{1BDDFF52-6CD6-40A5-AB3C-68EB2F1E4D0A}"/>
+      <thm15:themeFamily xmlns:thm15="http://schemas.microsoft.com/office/thememl/2012/main" name="Retrospect" id="{5F128B03-DCCA-4EEB-AB3B-CF2899314A46}" vid="{3F1AAB62-24C6-49D2-8E01-B56FAC9A3DCD}"/>
     </a:ext>
   </a:extLst>
 </a:theme>
